--- a/presentation/데이터기반_도시설계_기말_통합발표.pptx
+++ b/presentation/데이터기반_도시설계_기말_통합발표.pptx
@@ -12656,7 +12656,7 @@
       <p:grpSpPr/>
       <p:sp>
         <p:nvSpPr>
-          <p:cNvPr id="3" name="Rectangle 2"/>
+          <p:cNvPr id="2" name="Rectangle 1"/>
           <p:cNvSpPr/>
           <p:nvPr/>
         </p:nvSpPr>
@@ -12699,24 +12699,7 @@
       </p:sp>
       <p:sp>
         <p:nvSpPr>
-          <p:cNvPr id="2" name="Title 1"/>
-          <p:cNvSpPr>
-            <a:spLocks noGrp="1"/>
-          </p:cNvSpPr>
-          <p:nvPr>
-            <p:ph type="title"/>
-          </p:nvPr>
-        </p:nvSpPr>
-        <p:spPr/>
-        <p:txBody>
-          <a:bodyPr/>
-          <a:lstStyle/>
-          <a:p/>
-        </p:txBody>
-      </p:sp>
-      <p:sp>
-        <p:nvSpPr>
-          <p:cNvPr id="4" name="Rectangle 3"/>
+          <p:cNvPr id="3" name="Rectangle 2"/>
           <p:cNvSpPr/>
           <p:nvPr/>
         </p:nvSpPr>
@@ -12759,14 +12742,49 @@
       </p:sp>
       <p:sp>
         <p:nvSpPr>
+          <p:cNvPr id="4" name="TextBox 3"/>
+          <p:cNvSpPr txBox="1"/>
+          <p:nvPr/>
+        </p:nvSpPr>
+        <p:spPr>
+          <a:xfrm>
+            <a:off x="621792" y="640080"/>
+            <a:ext cx="8229600" cy="274320"/>
+          </a:xfrm>
+          <a:prstGeom prst="rect">
+            <a:avLst/>
+          </a:prstGeom>
+          <a:noFill/>
+        </p:spPr>
+        <p:txBody>
+          <a:bodyPr wrap="square" lIns="0" tIns="0">
+            <a:spAutoFit/>
+          </a:bodyPr>
+          <a:lstStyle/>
+          <a:p>
+            <a:pPr algn="l"/>
+            <a:r>
+              <a:rPr sz="1100" b="0">
+                <a:solidFill>
+                  <a:srgbClr val="787774"/>
+                </a:solidFill>
+                <a:latin typeface="Noto Sans KR"/>
+              </a:rPr>
+              <a:t>데이터기반 도시설계 · 기말 프로젝트</a:t>
+            </a:r>
+          </a:p>
+        </p:txBody>
+      </p:sp>
+      <p:sp>
+        <p:nvSpPr>
           <p:cNvPr id="5" name="TextBox 4"/>
           <p:cNvSpPr txBox="1"/>
           <p:nvPr/>
         </p:nvSpPr>
         <p:spPr>
           <a:xfrm>
-            <a:off x="621792" y="640080"/>
-            <a:ext cx="8229600" cy="274320"/>
+            <a:off x="621792" y="1005840"/>
+            <a:ext cx="8229600" cy="640080"/>
           </a:xfrm>
           <a:prstGeom prst="rect">
             <a:avLst/>
@@ -12781,13 +12799,13 @@
           <a:p>
             <a:pPr algn="l"/>
             <a:r>
-              <a:rPr sz="1100" b="0">
-                <a:solidFill>
-                  <a:srgbClr val="787774"/>
-                </a:solidFill>
-                <a:latin typeface="Noto Sans KR"/>
-              </a:rPr>
-              <a:t>데이터기반 도시설계 · 기말 프로젝트</a:t>
+              <a:rPr sz="2400" b="1">
+                <a:solidFill>
+                  <a:srgbClr val="37352F"/>
+                </a:solidFill>
+                <a:latin typeface="Noto Sans KR"/>
+              </a:rPr>
+              <a:t>DSM → DEM Converter</a:t>
             </a:r>
           </a:p>
         </p:txBody>
@@ -12800,7 +12818,7 @@
         </p:nvSpPr>
         <p:spPr>
           <a:xfrm>
-            <a:off x="621792" y="1005840"/>
+            <a:off x="621792" y="1554480"/>
             <a:ext cx="8229600" cy="640080"/>
           </a:xfrm>
           <a:prstGeom prst="rect">
@@ -12818,41 +12836,6 @@
             <a:r>
               <a:rPr sz="2400" b="1">
                 <a:solidFill>
-                  <a:srgbClr val="37352F"/>
-                </a:solidFill>
-                <a:latin typeface="Noto Sans KR"/>
-              </a:rPr>
-              <a:t>DSM → DEM Converter</a:t>
-            </a:r>
-          </a:p>
-        </p:txBody>
-      </p:sp>
-      <p:sp>
-        <p:nvSpPr>
-          <p:cNvPr id="7" name="TextBox 6"/>
-          <p:cNvSpPr txBox="1"/>
-          <p:nvPr/>
-        </p:nvSpPr>
-        <p:spPr>
-          <a:xfrm>
-            <a:off x="621792" y="1554480"/>
-            <a:ext cx="8229600" cy="640080"/>
-          </a:xfrm>
-          <a:prstGeom prst="rect">
-            <a:avLst/>
-          </a:prstGeom>
-          <a:noFill/>
-        </p:spPr>
-        <p:txBody>
-          <a:bodyPr wrap="square" lIns="0" tIns="0">
-            <a:spAutoFit/>
-          </a:bodyPr>
-          <a:lstStyle/>
-          <a:p>
-            <a:pPr algn="l"/>
-            <a:r>
-              <a:rPr sz="2400" b="1">
-                <a:solidFill>
                   <a:srgbClr val="2383E2"/>
                 </a:solidFill>
                 <a:latin typeface="Noto Sans KR"/>
@@ -12864,7 +12847,7 @@
       </p:sp>
       <p:sp>
         <p:nvSpPr>
-          <p:cNvPr id="8" name="Rectangle 7"/>
+          <p:cNvPr id="7" name="Rectangle 6"/>
           <p:cNvSpPr/>
           <p:nvPr/>
         </p:nvSpPr>
@@ -12907,7 +12890,7 @@
       </p:sp>
       <p:sp>
         <p:nvSpPr>
-          <p:cNvPr id="9" name="TextBox 8"/>
+          <p:cNvPr id="8" name="TextBox 7"/>
           <p:cNvSpPr txBox="1"/>
           <p:nvPr/>
         </p:nvSpPr>
@@ -12942,7 +12925,7 @@
       </p:sp>
       <p:sp>
         <p:nvSpPr>
-          <p:cNvPr id="10" name="Rounded Rectangle 9"/>
+          <p:cNvPr id="9" name="Rounded Rectangle 8"/>
           <p:cNvSpPr/>
           <p:nvPr/>
         </p:nvSpPr>
@@ -13031,7 +13014,7 @@
       </p:sp>
       <p:sp>
         <p:nvSpPr>
-          <p:cNvPr id="11" name="Rounded Rectangle 10"/>
+          <p:cNvPr id="10" name="Rounded Rectangle 9"/>
           <p:cNvSpPr/>
           <p:nvPr/>
         </p:nvSpPr>
@@ -13120,7 +13103,7 @@
       </p:sp>
       <p:sp>
         <p:nvSpPr>
-          <p:cNvPr id="12" name="Rounded Rectangle 11"/>
+          <p:cNvPr id="11" name="Rounded Rectangle 10"/>
           <p:cNvSpPr/>
           <p:nvPr/>
         </p:nvSpPr>
@@ -13209,7 +13192,7 @@
       </p:sp>
       <p:sp>
         <p:nvSpPr>
-          <p:cNvPr id="13" name="TextBox 12"/>
+          <p:cNvPr id="12" name="TextBox 11"/>
           <p:cNvSpPr txBox="1"/>
           <p:nvPr/>
         </p:nvSpPr>
@@ -13244,7 +13227,7 @@
       </p:sp>
       <p:sp>
         <p:nvSpPr>
-          <p:cNvPr id="14" name="TextBox 13"/>
+          <p:cNvPr id="13" name="TextBox 12"/>
           <p:cNvSpPr txBox="1"/>
           <p:nvPr/>
         </p:nvSpPr>
@@ -13297,7 +13280,7 @@
       <p:grpSpPr/>
       <p:sp>
         <p:nvSpPr>
-          <p:cNvPr id="3" name="Rectangle 2"/>
+          <p:cNvPr id="2" name="Rectangle 1"/>
           <p:cNvSpPr/>
           <p:nvPr/>
         </p:nvSpPr>
@@ -13340,19 +13323,37 @@
       </p:sp>
       <p:sp>
         <p:nvSpPr>
-          <p:cNvPr id="2" name="Title 1"/>
-          <p:cNvSpPr>
-            <a:spLocks noGrp="1"/>
-          </p:cNvSpPr>
-          <p:nvPr>
-            <p:ph type="title"/>
-          </p:nvPr>
-        </p:nvSpPr>
-        <p:spPr/>
-        <p:txBody>
-          <a:bodyPr/>
-          <a:lstStyle/>
-          <a:p/>
+          <p:cNvPr id="3" name="TextBox 2"/>
+          <p:cNvSpPr txBox="1"/>
+          <p:nvPr/>
+        </p:nvSpPr>
+        <p:spPr>
+          <a:xfrm>
+            <a:off x="621792" y="429768"/>
+            <a:ext cx="7909560" cy="219456"/>
+          </a:xfrm>
+          <a:prstGeom prst="rect">
+            <a:avLst/>
+          </a:prstGeom>
+          <a:noFill/>
+        </p:spPr>
+        <p:txBody>
+          <a:bodyPr wrap="square" lIns="0" tIns="0">
+            <a:spAutoFit/>
+          </a:bodyPr>
+          <a:lstStyle/>
+          <a:p>
+            <a:pPr algn="l"/>
+            <a:r>
+              <a:rPr sz="1000" b="0">
+                <a:solidFill>
+                  <a:srgbClr val="787774"/>
+                </a:solidFill>
+                <a:latin typeface="Noto Sans KR"/>
+              </a:rPr>
+              <a:t>연계 · 선정 이유</a:t>
+            </a:r>
+          </a:p>
         </p:txBody>
       </p:sp>
       <p:sp>
@@ -13363,8 +13364,8 @@
         </p:nvSpPr>
         <p:spPr>
           <a:xfrm>
-            <a:off x="621792" y="429768"/>
-            <a:ext cx="7909560" cy="219456"/>
+            <a:off x="621792" y="658368"/>
+            <a:ext cx="7909560" cy="411480"/>
           </a:xfrm>
           <a:prstGeom prst="rect">
             <a:avLst/>
@@ -13379,41 +13380,6 @@
           <a:p>
             <a:pPr algn="l"/>
             <a:r>
-              <a:rPr sz="1000" b="0">
-                <a:solidFill>
-                  <a:srgbClr val="787774"/>
-                </a:solidFill>
-                <a:latin typeface="Noto Sans KR"/>
-              </a:rPr>
-              <a:t>연계 · 선정 이유</a:t>
-            </a:r>
-          </a:p>
-        </p:txBody>
-      </p:sp>
-      <p:sp>
-        <p:nvSpPr>
-          <p:cNvPr id="5" name="TextBox 4"/>
-          <p:cNvSpPr txBox="1"/>
-          <p:nvPr/>
-        </p:nvSpPr>
-        <p:spPr>
-          <a:xfrm>
-            <a:off x="621792" y="658368"/>
-            <a:ext cx="7909560" cy="411480"/>
-          </a:xfrm>
-          <a:prstGeom prst="rect">
-            <a:avLst/>
-          </a:prstGeom>
-          <a:noFill/>
-        </p:spPr>
-        <p:txBody>
-          <a:bodyPr wrap="square" lIns="0" tIns="0">
-            <a:spAutoFit/>
-          </a:bodyPr>
-          <a:lstStyle/>
-          <a:p>
-            <a:pPr algn="l"/>
-            <a:r>
               <a:rPr sz="2000" b="1">
                 <a:solidFill>
                   <a:srgbClr val="37352F"/>
@@ -13427,7 +13393,7 @@
       </p:sp>
       <p:sp>
         <p:nvSpPr>
-          <p:cNvPr id="6" name="Rectangle 5"/>
+          <p:cNvPr id="5" name="Rectangle 4"/>
           <p:cNvSpPr/>
           <p:nvPr/>
         </p:nvSpPr>
@@ -13470,7 +13436,7 @@
       </p:sp>
       <p:sp>
         <p:nvSpPr>
-          <p:cNvPr id="7" name="TextBox 6"/>
+          <p:cNvPr id="6" name="TextBox 5"/>
           <p:cNvSpPr txBox="1"/>
           <p:nvPr/>
         </p:nvSpPr>
@@ -13505,7 +13471,7 @@
       </p:sp>
       <p:sp>
         <p:nvSpPr>
-          <p:cNvPr id="8" name="Rounded Rectangle 7"/>
+          <p:cNvPr id="7" name="Rounded Rectangle 6"/>
           <p:cNvSpPr/>
           <p:nvPr/>
         </p:nvSpPr>
@@ -13553,13 +13519,48 @@
       </p:sp>
       <p:sp>
         <p:nvSpPr>
+          <p:cNvPr id="8" name="TextBox 7"/>
+          <p:cNvSpPr txBox="1"/>
+          <p:nvPr/>
+        </p:nvSpPr>
+        <p:spPr>
+          <a:xfrm>
+            <a:off x="777240" y="1783080"/>
+            <a:ext cx="3657600" cy="274320"/>
+          </a:xfrm>
+          <a:prstGeom prst="rect">
+            <a:avLst/>
+          </a:prstGeom>
+          <a:noFill/>
+        </p:spPr>
+        <p:txBody>
+          <a:bodyPr wrap="square" lIns="0" tIns="0">
+            <a:spAutoFit/>
+          </a:bodyPr>
+          <a:lstStyle/>
+          <a:p>
+            <a:pPr algn="l"/>
+            <a:r>
+              <a:rPr sz="1200" b="1">
+                <a:solidFill>
+                  <a:srgbClr val="2383E2"/>
+                </a:solidFill>
+                <a:latin typeface="Noto Sans KR"/>
+              </a:rPr>
+              <a:t>DEM vs DSM</a:t>
+            </a:r>
+          </a:p>
+        </p:txBody>
+      </p:sp>
+      <p:sp>
+        <p:nvSpPr>
           <p:cNvPr id="9" name="TextBox 8"/>
           <p:cNvSpPr txBox="1"/>
           <p:nvPr/>
         </p:nvSpPr>
         <p:spPr>
           <a:xfrm>
-            <a:off x="777240" y="1783080"/>
+            <a:off x="777240" y="2103120"/>
             <a:ext cx="3657600" cy="274320"/>
           </a:xfrm>
           <a:prstGeom prst="rect">
@@ -13575,13 +13576,13 @@
           <a:p>
             <a:pPr algn="l"/>
             <a:r>
-              <a:rPr sz="1200" b="1">
-                <a:solidFill>
-                  <a:srgbClr val="2383E2"/>
-                </a:solidFill>
-                <a:latin typeface="Noto Sans KR"/>
-              </a:rPr>
-              <a:t>DEM vs DSM</a:t>
+              <a:rPr sz="900" b="0">
+                <a:solidFill>
+                  <a:srgbClr val="37352F"/>
+                </a:solidFill>
+                <a:latin typeface="Noto Sans KR"/>
+              </a:rPr>
+              <a:t>DEM — 객체 제거된 순수 지표 (지형 분석)</a:t>
             </a:r>
           </a:p>
         </p:txBody>
@@ -13594,7 +13595,7 @@
         </p:nvSpPr>
         <p:spPr>
           <a:xfrm>
-            <a:off x="777240" y="2103120"/>
+            <a:off x="777240" y="2331720"/>
             <a:ext cx="3657600" cy="274320"/>
           </a:xfrm>
           <a:prstGeom prst="rect">
@@ -13616,7 +13617,7 @@
                 </a:solidFill>
                 <a:latin typeface="Noto Sans KR"/>
               </a:rPr>
-              <a:t>DEM — 객체 제거된 순수 지표 (지형 분석)</a:t>
+              <a:t>DSM — 건물·수목 포함 표면 (그림자 분석)</a:t>
             </a:r>
           </a:p>
         </p:txBody>
@@ -13629,8 +13630,8 @@
         </p:nvSpPr>
         <p:spPr>
           <a:xfrm>
-            <a:off x="777240" y="2331720"/>
-            <a:ext cx="3657600" cy="274320"/>
+            <a:off x="777240" y="2651760"/>
+            <a:ext cx="3657600" cy="1371600"/>
           </a:xfrm>
           <a:prstGeom prst="rect">
             <a:avLst/>
@@ -13643,40 +13644,21 @@
           </a:bodyPr>
           <a:lstStyle/>
           <a:p>
-            <a:pPr algn="l"/>
-            <a:r>
-              <a:rPr sz="900" b="0">
+            <a:pPr>
+              <a:spcAft>
+                <a:spcPts val="400"/>
+              </a:spcAft>
+            </a:pPr>
+            <a:r>
+              <a:rPr sz="800" b="0">
                 <a:solidFill>
                   <a:srgbClr val="37352F"/>
                 </a:solidFill>
                 <a:latin typeface="Noto Sans KR"/>
               </a:rPr>
-              <a:t>DSM — 건물·수목 포함 표면 (그림자 분석)</a:t>
-            </a:r>
-          </a:p>
-        </p:txBody>
-      </p:sp>
-      <p:sp>
-        <p:nvSpPr>
-          <p:cNvPr id="12" name="TextBox 11"/>
-          <p:cNvSpPr txBox="1"/>
-          <p:nvPr/>
-        </p:nvSpPr>
-        <p:spPr>
-          <a:xfrm>
-            <a:off x="777240" y="2651760"/>
-            <a:ext cx="3657600" cy="1371600"/>
-          </a:xfrm>
-          <a:prstGeom prst="rect">
-            <a:avLst/>
-          </a:prstGeom>
-          <a:noFill/>
-        </p:spPr>
-        <p:txBody>
-          <a:bodyPr wrap="square" lIns="0" tIns="0">
-            <a:spAutoFit/>
-          </a:bodyPr>
-          <a:lstStyle/>
+              <a:t>•  그림자는 표면 객체(건물·수목)의 꼭대기가 광선을 가려야 생김</a:t>
+            </a:r>
+          </a:p>
           <a:p>
             <a:pPr>
               <a:spcAft>
@@ -13690,7 +13672,7 @@
                 </a:solidFill>
                 <a:latin typeface="Noto Sans KR"/>
               </a:rPr>
-              <a:t>•  그림자는 표면 객체(건물·수목)의 꼭대기가 광선을 가려야 생김</a:t>
+              <a:t>•  DEM은 객체가 없으므로 그림자 시뮬레이션 불가</a:t>
             </a:r>
           </a:p>
           <a:p>
@@ -13706,7 +13688,7 @@
                 </a:solidFill>
                 <a:latin typeface="Noto Sans KR"/>
               </a:rPr>
-              <a:t>•  DEM은 객체가 없으므로 그림자 시뮬레이션 불가</a:t>
+              <a:t>•  DSM의 표면 = ray-cast 광선이 부딪힐 차폐물</a:t>
             </a:r>
           </a:p>
           <a:p>
@@ -13722,22 +13704,6 @@
                 </a:solidFill>
                 <a:latin typeface="Noto Sans KR"/>
               </a:rPr>
-              <a:t>•  DSM의 표면 = ray-cast 광선이 부딪힐 차폐물</a:t>
-            </a:r>
-          </a:p>
-          <a:p>
-            <a:pPr>
-              <a:spcAft>
-                <a:spcPts val="400"/>
-              </a:spcAft>
-            </a:pPr>
-            <a:r>
-              <a:rPr sz="800" b="0">
-                <a:solidFill>
-                  <a:srgbClr val="37352F"/>
-                </a:solidFill>
-                <a:latin typeface="Noto Sans KR"/>
-              </a:rPr>
               <a:t>•  nDSM = DSM − DEM = 객체 순높이 (그림자 입력)</a:t>
             </a:r>
           </a:p>
@@ -13745,7 +13711,7 @@
       </p:sp>
       <p:sp>
         <p:nvSpPr>
-          <p:cNvPr id="13" name="Rounded Rectangle 12"/>
+          <p:cNvPr id="12" name="Rounded Rectangle 11"/>
           <p:cNvSpPr/>
           <p:nvPr/>
         </p:nvSpPr>
@@ -13793,14 +13759,49 @@
       </p:sp>
       <p:sp>
         <p:nvSpPr>
+          <p:cNvPr id="13" name="TextBox 12"/>
+          <p:cNvSpPr txBox="1"/>
+          <p:nvPr/>
+        </p:nvSpPr>
+        <p:spPr>
+          <a:xfrm>
+            <a:off x="4773168" y="1783080"/>
+            <a:ext cx="3657600" cy="274320"/>
+          </a:xfrm>
+          <a:prstGeom prst="rect">
+            <a:avLst/>
+          </a:prstGeom>
+          <a:noFill/>
+        </p:spPr>
+        <p:txBody>
+          <a:bodyPr wrap="square" lIns="0" tIns="0">
+            <a:spAutoFit/>
+          </a:bodyPr>
+          <a:lstStyle/>
+          <a:p>
+            <a:pPr algn="l"/>
+            <a:r>
+              <a:rPr sz="1200" b="1">
+                <a:solidFill>
+                  <a:srgbClr val="2383E2"/>
+                </a:solidFill>
+                <a:latin typeface="Noto Sans KR"/>
+              </a:rPr>
+              <a:t>친구 도구 → 우리 도구 자산 흐름</a:t>
+            </a:r>
+          </a:p>
+        </p:txBody>
+      </p:sp>
+      <p:sp>
+        <p:nvSpPr>
           <p:cNvPr id="14" name="TextBox 13"/>
           <p:cNvSpPr txBox="1"/>
           <p:nvPr/>
         </p:nvSpPr>
         <p:spPr>
           <a:xfrm>
-            <a:off x="4773168" y="1783080"/>
-            <a:ext cx="3657600" cy="274320"/>
+            <a:off x="4773168" y="2103120"/>
+            <a:ext cx="3657600" cy="1828800"/>
           </a:xfrm>
           <a:prstGeom prst="rect">
             <a:avLst/>
@@ -13813,41 +13814,6 @@
           </a:bodyPr>
           <a:lstStyle/>
           <a:p>
-            <a:pPr algn="l"/>
-            <a:r>
-              <a:rPr sz="1200" b="1">
-                <a:solidFill>
-                  <a:srgbClr val="2383E2"/>
-                </a:solidFill>
-                <a:latin typeface="Noto Sans KR"/>
-              </a:rPr>
-              <a:t>친구 도구 → 우리 도구 자산 흐름</a:t>
-            </a:r>
-          </a:p>
-        </p:txBody>
-      </p:sp>
-      <p:sp>
-        <p:nvSpPr>
-          <p:cNvPr id="15" name="TextBox 14"/>
-          <p:cNvSpPr txBox="1"/>
-          <p:nvPr/>
-        </p:nvSpPr>
-        <p:spPr>
-          <a:xfrm>
-            <a:off x="4773168" y="2103120"/>
-            <a:ext cx="3657600" cy="1828800"/>
-          </a:xfrm>
-          <a:prstGeom prst="rect">
-            <a:avLst/>
-          </a:prstGeom>
-          <a:noFill/>
-        </p:spPr>
-        <p:txBody>
-          <a:bodyPr wrap="square" lIns="0" tIns="0">
-            <a:spAutoFit/>
-          </a:bodyPr>
-          <a:lstStyle/>
-          <a:p>
             <a:pPr>
               <a:spcAft>
                 <a:spcPts val="400"/>
@@ -13915,7 +13881,7 @@
       </p:sp>
       <p:sp>
         <p:nvSpPr>
-          <p:cNvPr id="16" name="Rounded Rectangle 15"/>
+          <p:cNvPr id="15" name="Rounded Rectangle 14"/>
           <p:cNvSpPr/>
           <p:nvPr/>
         </p:nvSpPr>
@@ -13963,13 +13929,48 @@
       </p:sp>
       <p:sp>
         <p:nvSpPr>
+          <p:cNvPr id="16" name="TextBox 15"/>
+          <p:cNvSpPr txBox="1"/>
+          <p:nvPr/>
+        </p:nvSpPr>
+        <p:spPr>
+          <a:xfrm>
+            <a:off x="777240" y="4160520"/>
+            <a:ext cx="7589520" cy="274320"/>
+          </a:xfrm>
+          <a:prstGeom prst="rect">
+            <a:avLst/>
+          </a:prstGeom>
+          <a:noFill/>
+        </p:spPr>
+        <p:txBody>
+          <a:bodyPr wrap="square" lIns="0" tIns="0">
+            <a:spAutoFit/>
+          </a:bodyPr>
+          <a:lstStyle/>
+          <a:p>
+            <a:pPr algn="l"/>
+            <a:r>
+              <a:rPr sz="1000" b="1">
+                <a:solidFill>
+                  <a:srgbClr val="CB7B26"/>
+                </a:solidFill>
+                <a:latin typeface="Noto Sans KR"/>
+              </a:rPr>
+              <a:t>📘 교수님 강의자료 13p 추천 — Deep Umbra (GAN 기반 일조 컴퓨테이션)</a:t>
+            </a:r>
+          </a:p>
+        </p:txBody>
+      </p:sp>
+      <p:sp>
+        <p:nvSpPr>
           <p:cNvPr id="17" name="TextBox 16"/>
           <p:cNvSpPr txBox="1"/>
           <p:nvPr/>
         </p:nvSpPr>
         <p:spPr>
           <a:xfrm>
-            <a:off x="777240" y="4160520"/>
+            <a:off x="777240" y="4434840"/>
             <a:ext cx="7589520" cy="274320"/>
           </a:xfrm>
           <a:prstGeom prst="rect">
@@ -13985,13 +13986,13 @@
           <a:p>
             <a:pPr algn="l"/>
             <a:r>
-              <a:rPr sz="1000" b="1">
-                <a:solidFill>
-                  <a:srgbClr val="CB7B26"/>
-                </a:solidFill>
-                <a:latin typeface="Noto Sans KR"/>
-              </a:rPr>
-              <a:t>📘 교수님 강의자료 13p 추천 — Deep Umbra (GAN 기반 일조 컴퓨테이션)</a:t>
+              <a:rPr sz="900" b="0">
+                <a:solidFill>
+                  <a:srgbClr val="37352F"/>
+                </a:solidFill>
+                <a:latin typeface="Noto Sans KR"/>
+              </a:rPr>
+              <a:t>→ 본 프로젝트는 풀 GAN 학습 대신 DSM + 4시점 ray-cast 로 단순화 (핵심 정신: 다시점 시간 누적)</a:t>
             </a:r>
           </a:p>
         </p:txBody>
@@ -14004,8 +14005,8 @@
         </p:nvSpPr>
         <p:spPr>
           <a:xfrm>
-            <a:off x="777240" y="4434840"/>
-            <a:ext cx="7589520" cy="274320"/>
+            <a:off x="621792" y="4855464"/>
+            <a:ext cx="7909560" cy="210312"/>
           </a:xfrm>
           <a:prstGeom prst="rect">
             <a:avLst/>
@@ -14022,11 +14023,11 @@
             <a:r>
               <a:rPr sz="900" b="0">
                 <a:solidFill>
-                  <a:srgbClr val="37352F"/>
-                </a:solidFill>
-                <a:latin typeface="Noto Sans KR"/>
-              </a:rPr>
-              <a:t>→ 본 프로젝트는 풀 GAN 학습 대신 DSM + 4시점 ray-cast 로 단순화 (핵심 정신: 다시점 시간 누적)</a:t>
+                  <a:srgbClr val="9B9A97"/>
+                </a:solidFill>
+                <a:latin typeface="Noto Sans KR"/>
+              </a:rPr>
+              <a:t>동작구 그늘막 입지 분석 · 데이터기반 도시설계</a:t>
             </a:r>
           </a:p>
         </p:txBody>
@@ -14034,41 +14035,6 @@
       <p:sp>
         <p:nvSpPr>
           <p:cNvPr id="19" name="TextBox 18"/>
-          <p:cNvSpPr txBox="1"/>
-          <p:nvPr/>
-        </p:nvSpPr>
-        <p:spPr>
-          <a:xfrm>
-            <a:off x="621792" y="4855464"/>
-            <a:ext cx="7909560" cy="210312"/>
-          </a:xfrm>
-          <a:prstGeom prst="rect">
-            <a:avLst/>
-          </a:prstGeom>
-          <a:noFill/>
-        </p:spPr>
-        <p:txBody>
-          <a:bodyPr wrap="square" lIns="0" tIns="0">
-            <a:spAutoFit/>
-          </a:bodyPr>
-          <a:lstStyle/>
-          <a:p>
-            <a:pPr algn="l"/>
-            <a:r>
-              <a:rPr sz="900" b="0">
-                <a:solidFill>
-                  <a:srgbClr val="9B9A97"/>
-                </a:solidFill>
-                <a:latin typeface="Noto Sans KR"/>
-              </a:rPr>
-              <a:t>동작구 그늘막 입지 분석 · 데이터기반 도시설계</a:t>
-            </a:r>
-          </a:p>
-        </p:txBody>
-      </p:sp>
-      <p:sp>
-        <p:nvSpPr>
-          <p:cNvPr id="20" name="TextBox 19"/>
           <p:cNvSpPr txBox="1"/>
           <p:nvPr/>
         </p:nvSpPr>
@@ -14121,7 +14087,7 @@
       <p:grpSpPr/>
       <p:sp>
         <p:nvSpPr>
-          <p:cNvPr id="3" name="Rectangle 2"/>
+          <p:cNvPr id="2" name="Rectangle 1"/>
           <p:cNvSpPr/>
           <p:nvPr/>
         </p:nvSpPr>
@@ -14164,19 +14130,37 @@
       </p:sp>
       <p:sp>
         <p:nvSpPr>
-          <p:cNvPr id="2" name="Title 1"/>
-          <p:cNvSpPr>
-            <a:spLocks noGrp="1"/>
-          </p:cNvSpPr>
-          <p:nvPr>
-            <p:ph type="title"/>
-          </p:nvPr>
-        </p:nvSpPr>
-        <p:spPr/>
-        <p:txBody>
-          <a:bodyPr/>
-          <a:lstStyle/>
-          <a:p/>
+          <p:cNvPr id="3" name="TextBox 2"/>
+          <p:cNvSpPr txBox="1"/>
+          <p:nvPr/>
+        </p:nvSpPr>
+        <p:spPr>
+          <a:xfrm>
+            <a:off x="621792" y="429768"/>
+            <a:ext cx="7909560" cy="219456"/>
+          </a:xfrm>
+          <a:prstGeom prst="rect">
+            <a:avLst/>
+          </a:prstGeom>
+          <a:noFill/>
+        </p:spPr>
+        <p:txBody>
+          <a:bodyPr wrap="square" lIns="0" tIns="0">
+            <a:spAutoFit/>
+          </a:bodyPr>
+          <a:lstStyle/>
+          <a:p>
+            <a:pPr algn="l"/>
+            <a:r>
+              <a:rPr sz="1000" b="0">
+                <a:solidFill>
+                  <a:srgbClr val="787774"/>
+                </a:solidFill>
+                <a:latin typeface="Noto Sans KR"/>
+              </a:rPr>
+              <a:t>보완 흐름</a:t>
+            </a:r>
+          </a:p>
         </p:txBody>
       </p:sp>
       <p:sp>
@@ -14187,8 +14171,8 @@
         </p:nvSpPr>
         <p:spPr>
           <a:xfrm>
-            <a:off x="621792" y="429768"/>
-            <a:ext cx="7909560" cy="219456"/>
+            <a:off x="621792" y="658368"/>
+            <a:ext cx="7909560" cy="411480"/>
           </a:xfrm>
           <a:prstGeom prst="rect">
             <a:avLst/>
@@ -14203,41 +14187,6 @@
           <a:p>
             <a:pPr algn="l"/>
             <a:r>
-              <a:rPr sz="1000" b="0">
-                <a:solidFill>
-                  <a:srgbClr val="787774"/>
-                </a:solidFill>
-                <a:latin typeface="Noto Sans KR"/>
-              </a:rPr>
-              <a:t>보완 흐름</a:t>
-            </a:r>
-          </a:p>
-        </p:txBody>
-      </p:sp>
-      <p:sp>
-        <p:nvSpPr>
-          <p:cNvPr id="5" name="TextBox 4"/>
-          <p:cNvSpPr txBox="1"/>
-          <p:nvPr/>
-        </p:nvSpPr>
-        <p:spPr>
-          <a:xfrm>
-            <a:off x="621792" y="658368"/>
-            <a:ext cx="7909560" cy="411480"/>
-          </a:xfrm>
-          <a:prstGeom prst="rect">
-            <a:avLst/>
-          </a:prstGeom>
-          <a:noFill/>
-        </p:spPr>
-        <p:txBody>
-          <a:bodyPr wrap="square" lIns="0" tIns="0">
-            <a:spAutoFit/>
-          </a:bodyPr>
-          <a:lstStyle/>
-          <a:p>
-            <a:pPr algn="l"/>
-            <a:r>
               <a:rPr sz="2000" b="1">
                 <a:solidFill>
                   <a:srgbClr val="37352F"/>
@@ -14251,7 +14200,7 @@
       </p:sp>
       <p:sp>
         <p:nvSpPr>
-          <p:cNvPr id="6" name="Rectangle 5"/>
+          <p:cNvPr id="5" name="Rectangle 4"/>
           <p:cNvSpPr/>
           <p:nvPr/>
         </p:nvSpPr>
@@ -14294,7 +14243,7 @@
       </p:sp>
       <p:graphicFrame>
         <p:nvGraphicFramePr>
-          <p:cNvPr id="7" name="Table 6"/>
+          <p:cNvPr id="6" name="Table 5"/>
           <p:cNvGraphicFramePr>
             <a:graphicFrameLocks noGrp="1"/>
           </p:cNvGraphicFramePr>
@@ -14885,14 +14834,49 @@
       </p:graphicFrame>
       <p:sp>
         <p:nvSpPr>
+          <p:cNvPr id="7" name="TextBox 6"/>
+          <p:cNvSpPr txBox="1"/>
+          <p:nvPr/>
+        </p:nvSpPr>
+        <p:spPr>
+          <a:xfrm>
+            <a:off x="621792" y="4617720"/>
+            <a:ext cx="7909560" cy="274320"/>
+          </a:xfrm>
+          <a:prstGeom prst="rect">
+            <a:avLst/>
+          </a:prstGeom>
+          <a:noFill/>
+        </p:spPr>
+        <p:txBody>
+          <a:bodyPr wrap="square" lIns="0" tIns="0">
+            <a:spAutoFit/>
+          </a:bodyPr>
+          <a:lstStyle/>
+          <a:p>
+            <a:pPr algn="l"/>
+            <a:r>
+              <a:rPr sz="1000" b="1">
+                <a:solidFill>
+                  <a:srgbClr val="2383E2"/>
+                </a:solidFill>
+                <a:latin typeface="Noto Sans KR"/>
+              </a:rPr>
+              <a:t>→ 데이터 품질·시뮬레이션 정확도·정책 의사결정 3개 차원 동시 강화</a:t>
+            </a:r>
+          </a:p>
+        </p:txBody>
+      </p:sp>
+      <p:sp>
+        <p:nvSpPr>
           <p:cNvPr id="8" name="TextBox 7"/>
           <p:cNvSpPr txBox="1"/>
           <p:nvPr/>
         </p:nvSpPr>
         <p:spPr>
           <a:xfrm>
-            <a:off x="621792" y="4617720"/>
-            <a:ext cx="7909560" cy="274320"/>
+            <a:off x="621792" y="4855464"/>
+            <a:ext cx="7909560" cy="210312"/>
           </a:xfrm>
           <a:prstGeom prst="rect">
             <a:avLst/>
@@ -14907,13 +14891,13 @@
           <a:p>
             <a:pPr algn="l"/>
             <a:r>
-              <a:rPr sz="1000" b="1">
-                <a:solidFill>
-                  <a:srgbClr val="2383E2"/>
-                </a:solidFill>
-                <a:latin typeface="Noto Sans KR"/>
-              </a:rPr>
-              <a:t>→ 데이터 품질·시뮬레이션 정확도·정책 의사결정 3개 차원 동시 강화</a:t>
+              <a:rPr sz="900" b="0">
+                <a:solidFill>
+                  <a:srgbClr val="9B9A97"/>
+                </a:solidFill>
+                <a:latin typeface="Noto Sans KR"/>
+              </a:rPr>
+              <a:t>동작구 그늘막 입지 분석 · 데이터기반 도시설계</a:t>
             </a:r>
           </a:p>
         </p:txBody>
@@ -14921,41 +14905,6 @@
       <p:sp>
         <p:nvSpPr>
           <p:cNvPr id="9" name="TextBox 8"/>
-          <p:cNvSpPr txBox="1"/>
-          <p:nvPr/>
-        </p:nvSpPr>
-        <p:spPr>
-          <a:xfrm>
-            <a:off x="621792" y="4855464"/>
-            <a:ext cx="7909560" cy="210312"/>
-          </a:xfrm>
-          <a:prstGeom prst="rect">
-            <a:avLst/>
-          </a:prstGeom>
-          <a:noFill/>
-        </p:spPr>
-        <p:txBody>
-          <a:bodyPr wrap="square" lIns="0" tIns="0">
-            <a:spAutoFit/>
-          </a:bodyPr>
-          <a:lstStyle/>
-          <a:p>
-            <a:pPr algn="l"/>
-            <a:r>
-              <a:rPr sz="900" b="0">
-                <a:solidFill>
-                  <a:srgbClr val="9B9A97"/>
-                </a:solidFill>
-                <a:latin typeface="Noto Sans KR"/>
-              </a:rPr>
-              <a:t>동작구 그늘막 입지 분석 · 데이터기반 도시설계</a:t>
-            </a:r>
-          </a:p>
-        </p:txBody>
-      </p:sp>
-      <p:sp>
-        <p:nvSpPr>
-          <p:cNvPr id="10" name="TextBox 9"/>
           <p:cNvSpPr txBox="1"/>
           <p:nvPr/>
         </p:nvSpPr>
@@ -15008,7 +14957,7 @@
       <p:grpSpPr/>
       <p:sp>
         <p:nvSpPr>
-          <p:cNvPr id="3" name="Rectangle 2"/>
+          <p:cNvPr id="2" name="Rectangle 1"/>
           <p:cNvSpPr/>
           <p:nvPr/>
         </p:nvSpPr>
@@ -15051,19 +15000,37 @@
       </p:sp>
       <p:sp>
         <p:nvSpPr>
-          <p:cNvPr id="2" name="Title 1"/>
-          <p:cNvSpPr>
-            <a:spLocks noGrp="1"/>
-          </p:cNvSpPr>
-          <p:nvPr>
-            <p:ph type="title"/>
-          </p:nvPr>
-        </p:nvSpPr>
-        <p:spPr/>
-        <p:txBody>
-          <a:bodyPr/>
-          <a:lstStyle/>
-          <a:p/>
+          <p:cNvPr id="3" name="TextBox 2"/>
+          <p:cNvSpPr txBox="1"/>
+          <p:nvPr/>
+        </p:nvSpPr>
+        <p:spPr>
+          <a:xfrm>
+            <a:off x="621792" y="429768"/>
+            <a:ext cx="7909560" cy="219456"/>
+          </a:xfrm>
+          <a:prstGeom prst="rect">
+            <a:avLst/>
+          </a:prstGeom>
+          <a:noFill/>
+        </p:spPr>
+        <p:txBody>
+          <a:bodyPr wrap="square" lIns="0" tIns="0">
+            <a:spAutoFit/>
+          </a:bodyPr>
+          <a:lstStyle/>
+          <a:p>
+            <a:pPr algn="l"/>
+            <a:r>
+              <a:rPr sz="1000" b="0">
+                <a:solidFill>
+                  <a:srgbClr val="787774"/>
+                </a:solidFill>
+                <a:latin typeface="Noto Sans KR"/>
+              </a:rPr>
+              <a:t>입력 데이터 · Score</a:t>
+            </a:r>
+          </a:p>
         </p:txBody>
       </p:sp>
       <p:sp>
@@ -15074,8 +15041,8 @@
         </p:nvSpPr>
         <p:spPr>
           <a:xfrm>
-            <a:off x="621792" y="429768"/>
-            <a:ext cx="7909560" cy="219456"/>
+            <a:off x="621792" y="658368"/>
+            <a:ext cx="7909560" cy="411480"/>
           </a:xfrm>
           <a:prstGeom prst="rect">
             <a:avLst/>
@@ -15090,41 +15057,6 @@
           <a:p>
             <a:pPr algn="l"/>
             <a:r>
-              <a:rPr sz="1000" b="0">
-                <a:solidFill>
-                  <a:srgbClr val="787774"/>
-                </a:solidFill>
-                <a:latin typeface="Noto Sans KR"/>
-              </a:rPr>
-              <a:t>입력 데이터 · Score</a:t>
-            </a:r>
-          </a:p>
-        </p:txBody>
-      </p:sp>
-      <p:sp>
-        <p:nvSpPr>
-          <p:cNvPr id="5" name="TextBox 4"/>
-          <p:cNvSpPr txBox="1"/>
-          <p:nvPr/>
-        </p:nvSpPr>
-        <p:spPr>
-          <a:xfrm>
-            <a:off x="621792" y="658368"/>
-            <a:ext cx="7909560" cy="411480"/>
-          </a:xfrm>
-          <a:prstGeom prst="rect">
-            <a:avLst/>
-          </a:prstGeom>
-          <a:noFill/>
-        </p:spPr>
-        <p:txBody>
-          <a:bodyPr wrap="square" lIns="0" tIns="0">
-            <a:spAutoFit/>
-          </a:bodyPr>
-          <a:lstStyle/>
-          <a:p>
-            <a:pPr algn="l"/>
-            <a:r>
               <a:rPr sz="2000" b="1">
                 <a:solidFill>
                   <a:srgbClr val="37352F"/>
@@ -15138,7 +15070,7 @@
       </p:sp>
       <p:sp>
         <p:nvSpPr>
-          <p:cNvPr id="6" name="Rectangle 5"/>
+          <p:cNvPr id="5" name="Rectangle 4"/>
           <p:cNvSpPr/>
           <p:nvPr/>
         </p:nvSpPr>
@@ -15181,14 +15113,49 @@
       </p:sp>
       <p:sp>
         <p:nvSpPr>
+          <p:cNvPr id="6" name="TextBox 5"/>
+          <p:cNvSpPr txBox="1"/>
+          <p:nvPr/>
+        </p:nvSpPr>
+        <p:spPr>
+          <a:xfrm>
+            <a:off x="621792" y="1325880"/>
+            <a:ext cx="4114800" cy="274320"/>
+          </a:xfrm>
+          <a:prstGeom prst="rect">
+            <a:avLst/>
+          </a:prstGeom>
+          <a:noFill/>
+        </p:spPr>
+        <p:txBody>
+          <a:bodyPr wrap="square" lIns="0" tIns="0">
+            <a:spAutoFit/>
+          </a:bodyPr>
+          <a:lstStyle/>
+          <a:p>
+            <a:pPr algn="l"/>
+            <a:r>
+              <a:rPr sz="1100" b="1">
+                <a:solidFill>
+                  <a:srgbClr val="2383E2"/>
+                </a:solidFill>
+                <a:latin typeface="Noto Sans KR"/>
+              </a:rPr>
+              <a:t>데이터 9종 (3 계층)</a:t>
+            </a:r>
+          </a:p>
+        </p:txBody>
+      </p:sp>
+      <p:sp>
+        <p:nvSpPr>
           <p:cNvPr id="7" name="TextBox 6"/>
           <p:cNvSpPr txBox="1"/>
           <p:nvPr/>
         </p:nvSpPr>
         <p:spPr>
           <a:xfrm>
-            <a:off x="621792" y="1325880"/>
-            <a:ext cx="4114800" cy="274320"/>
+            <a:off x="621792" y="1600200"/>
+            <a:ext cx="4114800" cy="2286000"/>
           </a:xfrm>
           <a:prstGeom prst="rect">
             <a:avLst/>
@@ -15201,41 +15168,6 @@
           </a:bodyPr>
           <a:lstStyle/>
           <a:p>
-            <a:pPr algn="l"/>
-            <a:r>
-              <a:rPr sz="1100" b="1">
-                <a:solidFill>
-                  <a:srgbClr val="2383E2"/>
-                </a:solidFill>
-                <a:latin typeface="Noto Sans KR"/>
-              </a:rPr>
-              <a:t>데이터 9종 (3 계층)</a:t>
-            </a:r>
-          </a:p>
-        </p:txBody>
-      </p:sp>
-      <p:sp>
-        <p:nvSpPr>
-          <p:cNvPr id="8" name="TextBox 7"/>
-          <p:cNvSpPr txBox="1"/>
-          <p:nvPr/>
-        </p:nvSpPr>
-        <p:spPr>
-          <a:xfrm>
-            <a:off x="621792" y="1600200"/>
-            <a:ext cx="4114800" cy="2286000"/>
-          </a:xfrm>
-          <a:prstGeom prst="rect">
-            <a:avLst/>
-          </a:prstGeom>
-          <a:noFill/>
-        </p:spPr>
-        <p:txBody>
-          <a:bodyPr wrap="square" lIns="0" tIns="0">
-            <a:spAutoFit/>
-          </a:bodyPr>
-          <a:lstStyle/>
-          <a:p>
             <a:pPr>
               <a:spcAft>
                 <a:spcPts val="400"/>
@@ -15319,7 +15251,7 @@
       </p:sp>
       <p:sp>
         <p:nvSpPr>
-          <p:cNvPr id="9" name="Rounded Rectangle 8"/>
+          <p:cNvPr id="8" name="Rounded Rectangle 7"/>
           <p:cNvSpPr/>
           <p:nvPr/>
         </p:nvSpPr>
@@ -15365,13 +15297,48 @@
       </p:sp>
       <p:sp>
         <p:nvSpPr>
+          <p:cNvPr id="9" name="TextBox 8"/>
+          <p:cNvSpPr txBox="1"/>
+          <p:nvPr/>
+        </p:nvSpPr>
+        <p:spPr>
+          <a:xfrm>
+            <a:off x="4937760" y="1417320"/>
+            <a:ext cx="3520440" cy="274320"/>
+          </a:xfrm>
+          <a:prstGeom prst="rect">
+            <a:avLst/>
+          </a:prstGeom>
+          <a:noFill/>
+        </p:spPr>
+        <p:txBody>
+          <a:bodyPr wrap="square" lIns="0" tIns="0">
+            <a:spAutoFit/>
+          </a:bodyPr>
+          <a:lstStyle/>
+          <a:p>
+            <a:pPr algn="l"/>
+            <a:r>
+              <a:rPr sz="1000" b="1">
+                <a:solidFill>
+                  <a:srgbClr val="FFEE58"/>
+                </a:solidFill>
+                <a:latin typeface="Consolas"/>
+              </a:rPr>
+              <a:t>Score = Σ wᵢ × MinMax(Featureᵢ)</a:t>
+            </a:r>
+          </a:p>
+        </p:txBody>
+      </p:sp>
+      <p:sp>
+        <p:nvSpPr>
           <p:cNvPr id="10" name="TextBox 9"/>
           <p:cNvSpPr txBox="1"/>
           <p:nvPr/>
         </p:nvSpPr>
         <p:spPr>
           <a:xfrm>
-            <a:off x="4937760" y="1417320"/>
+            <a:off x="4937760" y="1691640"/>
             <a:ext cx="3520440" cy="274320"/>
           </a:xfrm>
           <a:prstGeom prst="rect">
@@ -15387,13 +15354,13 @@
           <a:p>
             <a:pPr algn="l"/>
             <a:r>
-              <a:rPr sz="1000" b="1">
-                <a:solidFill>
-                  <a:srgbClr val="FFEE58"/>
+              <a:rPr sz="900" b="0">
+                <a:solidFill>
+                  <a:srgbClr val="FFFFFF"/>
                 </a:solidFill>
                 <a:latin typeface="Consolas"/>
               </a:rPr>
-              <a:t>Score = Σ wᵢ × MinMax(Featureᵢ)</a:t>
+              <a:t>0.18·pop + 0.18·lst + 0.18·vuln</a:t>
             </a:r>
           </a:p>
         </p:txBody>
@@ -15406,7 +15373,7 @@
         </p:nvSpPr>
         <p:spPr>
           <a:xfrm>
-            <a:off x="4937760" y="1691640"/>
+            <a:off x="4937760" y="1920240"/>
             <a:ext cx="3520440" cy="274320"/>
           </a:xfrm>
           <a:prstGeom prst="rect">
@@ -15428,7 +15395,7 @@
                 </a:solidFill>
                 <a:latin typeface="Consolas"/>
               </a:rPr>
-              <a:t>0.18·pop + 0.18·lst + 0.18·vuln</a:t>
+              <a:t>− 0.15·shade − 0.05·natural</a:t>
             </a:r>
           </a:p>
         </p:txBody>
@@ -15441,7 +15408,7 @@
         </p:nvSpPr>
         <p:spPr>
           <a:xfrm>
-            <a:off x="4937760" y="1920240"/>
+            <a:off x="4937760" y="2148840"/>
             <a:ext cx="3520440" cy="274320"/>
           </a:xfrm>
           <a:prstGeom prst="rect">
@@ -15463,7 +15430,7 @@
                 </a:solidFill>
                 <a:latin typeface="Consolas"/>
               </a:rPr>
-              <a:t>− 0.15·shade − 0.05·natural</a:t>
+              <a:t>+ 0.12·sv_deficit + 0.20·intersection</a:t>
             </a:r>
           </a:p>
         </p:txBody>
@@ -15476,7 +15443,7 @@
         </p:nvSpPr>
         <p:spPr>
           <a:xfrm>
-            <a:off x="4937760" y="2148840"/>
+            <a:off x="4937760" y="2423160"/>
             <a:ext cx="3520440" cy="274320"/>
           </a:xfrm>
           <a:prstGeom prst="rect">
@@ -15492,13 +15459,13 @@
           <a:p>
             <a:pPr algn="l"/>
             <a:r>
-              <a:rPr sz="900" b="0">
-                <a:solidFill>
-                  <a:srgbClr val="FFFFFF"/>
-                </a:solidFill>
-                <a:latin typeface="Consolas"/>
-              </a:rPr>
-              <a:t>+ 0.12·sv_deficit + 0.20·intersection</a:t>
+              <a:rPr sz="800" b="0">
+                <a:solidFill>
+                  <a:srgbClr val="CB7B26"/>
+                </a:solidFill>
+                <a:latin typeface="Noto Sans KR"/>
+              </a:rPr>
+              <a:t>(p23: 학습 가중치는 자동 튜닝 — Bayesian Opt)</a:t>
             </a:r>
           </a:p>
         </p:txBody>
@@ -15511,8 +15478,8 @@
         </p:nvSpPr>
         <p:spPr>
           <a:xfrm>
-            <a:off x="4937760" y="2423160"/>
-            <a:ext cx="3520440" cy="274320"/>
+            <a:off x="621792" y="3977639"/>
+            <a:ext cx="7909560" cy="731520"/>
           </a:xfrm>
           <a:prstGeom prst="rect">
             <a:avLst/>
@@ -15525,15 +15492,35 @@
           </a:bodyPr>
           <a:lstStyle/>
           <a:p>
-            <a:pPr algn="l"/>
-            <a:r>
-              <a:rPr sz="800" b="0">
-                <a:solidFill>
-                  <a:srgbClr val="CB7B26"/>
-                </a:solidFill>
-                <a:latin typeface="Noto Sans KR"/>
-              </a:rPr>
-              <a:t>(p23: 학습 가중치는 자동 튜닝 — Bayesian Opt)</a:t>
+            <a:pPr>
+              <a:spcAft>
+                <a:spcPts val="400"/>
+              </a:spcAft>
+            </a:pPr>
+            <a:r>
+              <a:rPr sz="900" b="0">
+                <a:solidFill>
+                  <a:srgbClr val="37352F"/>
+                </a:solidFill>
+                <a:latin typeface="Noto Sans KR"/>
+              </a:rPr>
+              <a:t>•  동작구 100m 격자 3,672 cells (EPSG:5179) · 보행로 + 건물 + 결집지 4단계 필터 → 330</a:t>
+            </a:r>
+          </a:p>
+          <a:p>
+            <a:pPr>
+              <a:spcAft>
+                <a:spcPts val="400"/>
+              </a:spcAft>
+            </a:pPr>
+            <a:r>
+              <a:rPr sz="900" b="0">
+                <a:solidFill>
+                  <a:srgbClr val="37352F"/>
+                </a:solidFill>
+                <a:latin typeface="Noto Sans KR"/>
+              </a:rPr>
+              <a:t>•  시나리오 6 (기본·고령자·폭염·유동인구·보행환경·교차로) → 강건 입지 식별</a:t>
             </a:r>
           </a:p>
         </p:txBody>
@@ -15546,8 +15533,8 @@
         </p:nvSpPr>
         <p:spPr>
           <a:xfrm>
-            <a:off x="621792" y="3977639"/>
-            <a:ext cx="7909560" cy="731520"/>
+            <a:off x="621792" y="4855464"/>
+            <a:ext cx="7909560" cy="210312"/>
           </a:xfrm>
           <a:prstGeom prst="rect">
             <a:avLst/>
@@ -15560,35 +15547,15 @@
           </a:bodyPr>
           <a:lstStyle/>
           <a:p>
-            <a:pPr>
-              <a:spcAft>
-                <a:spcPts val="400"/>
-              </a:spcAft>
-            </a:pPr>
+            <a:pPr algn="l"/>
             <a:r>
               <a:rPr sz="900" b="0">
                 <a:solidFill>
-                  <a:srgbClr val="37352F"/>
-                </a:solidFill>
-                <a:latin typeface="Noto Sans KR"/>
-              </a:rPr>
-              <a:t>•  동작구 100m 격자 3,672 cells (EPSG:5179) · 보행로 + 건물 + 결집지 4단계 필터 → 330</a:t>
-            </a:r>
-          </a:p>
-          <a:p>
-            <a:pPr>
-              <a:spcAft>
-                <a:spcPts val="400"/>
-              </a:spcAft>
-            </a:pPr>
-            <a:r>
-              <a:rPr sz="900" b="0">
-                <a:solidFill>
-                  <a:srgbClr val="37352F"/>
-                </a:solidFill>
-                <a:latin typeface="Noto Sans KR"/>
-              </a:rPr>
-              <a:t>•  시나리오 6 (기본·고령자·폭염·유동인구·보행환경·교차로) → 강건 입지 식별</a:t>
+                  <a:srgbClr val="9B9A97"/>
+                </a:solidFill>
+                <a:latin typeface="Noto Sans KR"/>
+              </a:rPr>
+              <a:t>동작구 그늘막 입지 분석 · 데이터기반 도시설계</a:t>
             </a:r>
           </a:p>
         </p:txBody>
@@ -15596,41 +15563,6 @@
       <p:sp>
         <p:nvSpPr>
           <p:cNvPr id="16" name="TextBox 15"/>
-          <p:cNvSpPr txBox="1"/>
-          <p:nvPr/>
-        </p:nvSpPr>
-        <p:spPr>
-          <a:xfrm>
-            <a:off x="621792" y="4855464"/>
-            <a:ext cx="7909560" cy="210312"/>
-          </a:xfrm>
-          <a:prstGeom prst="rect">
-            <a:avLst/>
-          </a:prstGeom>
-          <a:noFill/>
-        </p:spPr>
-        <p:txBody>
-          <a:bodyPr wrap="square" lIns="0" tIns="0">
-            <a:spAutoFit/>
-          </a:bodyPr>
-          <a:lstStyle/>
-          <a:p>
-            <a:pPr algn="l"/>
-            <a:r>
-              <a:rPr sz="900" b="0">
-                <a:solidFill>
-                  <a:srgbClr val="9B9A97"/>
-                </a:solidFill>
-                <a:latin typeface="Noto Sans KR"/>
-              </a:rPr>
-              <a:t>동작구 그늘막 입지 분석 · 데이터기반 도시설계</a:t>
-            </a:r>
-          </a:p>
-        </p:txBody>
-      </p:sp>
-      <p:sp>
-        <p:nvSpPr>
-          <p:cNvPr id="17" name="TextBox 16"/>
           <p:cNvSpPr txBox="1"/>
           <p:nvPr/>
         </p:nvSpPr>
@@ -16155,7 +16087,7 @@
       <p:grpSpPr/>
       <p:sp>
         <p:nvSpPr>
-          <p:cNvPr id="3" name="Rectangle 2"/>
+          <p:cNvPr id="2" name="Rectangle 1"/>
           <p:cNvSpPr/>
           <p:nvPr/>
         </p:nvSpPr>
@@ -16198,19 +16130,37 @@
       </p:sp>
       <p:sp>
         <p:nvSpPr>
-          <p:cNvPr id="2" name="Title 1"/>
-          <p:cNvSpPr>
-            <a:spLocks noGrp="1"/>
-          </p:cNvSpPr>
-          <p:nvPr>
-            <p:ph type="title"/>
-          </p:nvPr>
-        </p:nvSpPr>
-        <p:spPr/>
-        <p:txBody>
-          <a:bodyPr/>
-          <a:lstStyle/>
-          <a:p/>
+          <p:cNvPr id="3" name="TextBox 2"/>
+          <p:cNvSpPr txBox="1"/>
+          <p:nvPr/>
+        </p:nvSpPr>
+        <p:spPr>
+          <a:xfrm>
+            <a:off x="621792" y="429768"/>
+            <a:ext cx="7909560" cy="219456"/>
+          </a:xfrm>
+          <a:prstGeom prst="rect">
+            <a:avLst/>
+          </a:prstGeom>
+          <a:noFill/>
+        </p:spPr>
+        <p:txBody>
+          <a:bodyPr wrap="square" lIns="0" tIns="0">
+            <a:spAutoFit/>
+          </a:bodyPr>
+          <a:lstStyle/>
+          <a:p>
+            <a:pPr algn="l"/>
+            <a:r>
+              <a:rPr sz="1000" b="0">
+                <a:solidFill>
+                  <a:srgbClr val="787774"/>
+                </a:solidFill>
+                <a:latin typeface="Noto Sans KR"/>
+              </a:rPr>
+              <a:t>공간 필터링 + 컴퓨터비전</a:t>
+            </a:r>
+          </a:p>
         </p:txBody>
       </p:sp>
       <p:sp>
@@ -16221,8 +16171,8 @@
         </p:nvSpPr>
         <p:spPr>
           <a:xfrm>
-            <a:off x="621792" y="429768"/>
-            <a:ext cx="7909560" cy="219456"/>
+            <a:off x="621792" y="658368"/>
+            <a:ext cx="7909560" cy="411480"/>
           </a:xfrm>
           <a:prstGeom prst="rect">
             <a:avLst/>
@@ -16237,41 +16187,6 @@
           <a:p>
             <a:pPr algn="l"/>
             <a:r>
-              <a:rPr sz="1000" b="0">
-                <a:solidFill>
-                  <a:srgbClr val="787774"/>
-                </a:solidFill>
-                <a:latin typeface="Noto Sans KR"/>
-              </a:rPr>
-              <a:t>공간 필터링 + 컴퓨터비전</a:t>
-            </a:r>
-          </a:p>
-        </p:txBody>
-      </p:sp>
-      <p:sp>
-        <p:nvSpPr>
-          <p:cNvPr id="5" name="TextBox 4"/>
-          <p:cNvSpPr txBox="1"/>
-          <p:nvPr/>
-        </p:nvSpPr>
-        <p:spPr>
-          <a:xfrm>
-            <a:off x="621792" y="658368"/>
-            <a:ext cx="7909560" cy="411480"/>
-          </a:xfrm>
-          <a:prstGeom prst="rect">
-            <a:avLst/>
-          </a:prstGeom>
-          <a:noFill/>
-        </p:spPr>
-        <p:txBody>
-          <a:bodyPr wrap="square" lIns="0" tIns="0">
-            <a:spAutoFit/>
-          </a:bodyPr>
-          <a:lstStyle/>
-          <a:p>
-            <a:pPr algn="l"/>
-            <a:r>
               <a:rPr sz="2000" b="1">
                 <a:solidFill>
                   <a:srgbClr val="37352F"/>
@@ -16285,7 +16200,7 @@
       </p:sp>
       <p:sp>
         <p:nvSpPr>
-          <p:cNvPr id="6" name="Rectangle 5"/>
+          <p:cNvPr id="5" name="Rectangle 4"/>
           <p:cNvSpPr/>
           <p:nvPr/>
         </p:nvSpPr>
@@ -16328,7 +16243,7 @@
       </p:sp>
       <p:sp>
         <p:nvSpPr>
-          <p:cNvPr id="7" name="Rounded Rectangle 6"/>
+          <p:cNvPr id="6" name="Rounded Rectangle 5"/>
           <p:cNvSpPr/>
           <p:nvPr/>
         </p:nvSpPr>
@@ -16395,7 +16310,7 @@
       </p:sp>
       <p:sp>
         <p:nvSpPr>
-          <p:cNvPr id="8" name="Rounded Rectangle 7"/>
+          <p:cNvPr id="7" name="Rounded Rectangle 6"/>
           <p:cNvSpPr/>
           <p:nvPr/>
         </p:nvSpPr>
@@ -16462,7 +16377,7 @@
       </p:sp>
       <p:sp>
         <p:nvSpPr>
-          <p:cNvPr id="9" name="Rounded Rectangle 8"/>
+          <p:cNvPr id="8" name="Rounded Rectangle 7"/>
           <p:cNvSpPr/>
           <p:nvPr/>
         </p:nvSpPr>
@@ -16529,7 +16444,7 @@
       </p:sp>
       <p:sp>
         <p:nvSpPr>
-          <p:cNvPr id="10" name="Rounded Rectangle 9"/>
+          <p:cNvPr id="9" name="Rounded Rectangle 8"/>
           <p:cNvSpPr/>
           <p:nvPr/>
         </p:nvSpPr>
@@ -16596,7 +16511,7 @@
       </p:sp>
       <p:sp>
         <p:nvSpPr>
-          <p:cNvPr id="11" name="Rounded Rectangle 10"/>
+          <p:cNvPr id="10" name="Rounded Rectangle 9"/>
           <p:cNvSpPr/>
           <p:nvPr/>
         </p:nvSpPr>
@@ -16663,7 +16578,7 @@
       </p:sp>
       <p:sp>
         <p:nvSpPr>
-          <p:cNvPr id="12" name="Rounded Rectangle 11"/>
+          <p:cNvPr id="11" name="Rounded Rectangle 10"/>
           <p:cNvSpPr/>
           <p:nvPr/>
         </p:nvSpPr>
@@ -16711,14 +16626,49 @@
       </p:sp>
       <p:sp>
         <p:nvSpPr>
+          <p:cNvPr id="12" name="TextBox 11"/>
+          <p:cNvSpPr txBox="1"/>
+          <p:nvPr/>
+        </p:nvSpPr>
+        <p:spPr>
+          <a:xfrm>
+            <a:off x="777240" y="2697480"/>
+            <a:ext cx="3657600" cy="274320"/>
+          </a:xfrm>
+          <a:prstGeom prst="rect">
+            <a:avLst/>
+          </a:prstGeom>
+          <a:noFill/>
+        </p:spPr>
+        <p:txBody>
+          <a:bodyPr wrap="square" lIns="0" tIns="0">
+            <a:spAutoFit/>
+          </a:bodyPr>
+          <a:lstStyle/>
+          <a:p>
+            <a:pPr algn="l"/>
+            <a:r>
+              <a:rPr sz="1100" b="1">
+                <a:solidFill>
+                  <a:srgbClr val="2383E2"/>
+                </a:solidFill>
+                <a:latin typeface="Noto Sans KR"/>
+              </a:rPr>
+              <a:t>CV-A · 항공 + Mobile-SAM</a:t>
+            </a:r>
+          </a:p>
+        </p:txBody>
+      </p:sp>
+      <p:sp>
+        <p:nvSpPr>
           <p:cNvPr id="13" name="TextBox 12"/>
           <p:cNvSpPr txBox="1"/>
           <p:nvPr/>
         </p:nvSpPr>
         <p:spPr>
           <a:xfrm>
-            <a:off x="777240" y="2697480"/>
-            <a:ext cx="3657600" cy="274320"/>
+            <a:off x="777240" y="2971800"/>
+            <a:ext cx="3657600" cy="1828800"/>
           </a:xfrm>
           <a:prstGeom prst="rect">
             <a:avLst/>
@@ -16731,41 +16681,6 @@
           </a:bodyPr>
           <a:lstStyle/>
           <a:p>
-            <a:pPr algn="l"/>
-            <a:r>
-              <a:rPr sz="1100" b="1">
-                <a:solidFill>
-                  <a:srgbClr val="2383E2"/>
-                </a:solidFill>
-                <a:latin typeface="Noto Sans KR"/>
-              </a:rPr>
-              <a:t>CV-A · 항공 + Mobile-SAM</a:t>
-            </a:r>
-          </a:p>
-        </p:txBody>
-      </p:sp>
-      <p:sp>
-        <p:nvSpPr>
-          <p:cNvPr id="14" name="TextBox 13"/>
-          <p:cNvSpPr txBox="1"/>
-          <p:nvPr/>
-        </p:nvSpPr>
-        <p:spPr>
-          <a:xfrm>
-            <a:off x="777240" y="2971800"/>
-            <a:ext cx="3657600" cy="1828800"/>
-          </a:xfrm>
-          <a:prstGeom prst="rect">
-            <a:avLst/>
-          </a:prstGeom>
-          <a:noFill/>
-        </p:spPr>
-        <p:txBody>
-          <a:bodyPr wrap="square" lIns="0" tIns="0">
-            <a:spAutoFit/>
-          </a:bodyPr>
-          <a:lstStyle/>
-          <a:p>
             <a:pPr>
               <a:spcAft>
                 <a:spcPts val="400"/>
@@ -16833,7 +16748,7 @@
       </p:sp>
       <p:sp>
         <p:nvSpPr>
-          <p:cNvPr id="15" name="Rounded Rectangle 14"/>
+          <p:cNvPr id="14" name="Rounded Rectangle 13"/>
           <p:cNvSpPr/>
           <p:nvPr/>
         </p:nvSpPr>
@@ -16881,14 +16796,49 @@
       </p:sp>
       <p:sp>
         <p:nvSpPr>
+          <p:cNvPr id="15" name="TextBox 14"/>
+          <p:cNvSpPr txBox="1"/>
+          <p:nvPr/>
+        </p:nvSpPr>
+        <p:spPr>
+          <a:xfrm>
+            <a:off x="4800600" y="2697480"/>
+            <a:ext cx="3657600" cy="274320"/>
+          </a:xfrm>
+          <a:prstGeom prst="rect">
+            <a:avLst/>
+          </a:prstGeom>
+          <a:noFill/>
+        </p:spPr>
+        <p:txBody>
+          <a:bodyPr wrap="square" lIns="0" tIns="0">
+            <a:spAutoFit/>
+          </a:bodyPr>
+          <a:lstStyle/>
+          <a:p>
+            <a:pPr algn="l"/>
+            <a:r>
+              <a:rPr sz="1100" b="1">
+                <a:solidFill>
+                  <a:srgbClr val="2383E2"/>
+                </a:solidFill>
+                <a:latin typeface="Noto Sans KR"/>
+              </a:rPr>
+              <a:t>CV-B · 거리뷰 + SegFormer</a:t>
+            </a:r>
+          </a:p>
+        </p:txBody>
+      </p:sp>
+      <p:sp>
+        <p:nvSpPr>
           <p:cNvPr id="16" name="TextBox 15"/>
           <p:cNvSpPr txBox="1"/>
           <p:nvPr/>
         </p:nvSpPr>
         <p:spPr>
           <a:xfrm>
-            <a:off x="4800600" y="2697480"/>
-            <a:ext cx="3657600" cy="274320"/>
+            <a:off x="4800600" y="2971800"/>
+            <a:ext cx="3657600" cy="1828800"/>
           </a:xfrm>
           <a:prstGeom prst="rect">
             <a:avLst/>
@@ -16901,15 +16851,67 @@
           </a:bodyPr>
           <a:lstStyle/>
           <a:p>
-            <a:pPr algn="l"/>
-            <a:r>
-              <a:rPr sz="1100" b="1">
-                <a:solidFill>
-                  <a:srgbClr val="2383E2"/>
-                </a:solidFill>
-                <a:latin typeface="Noto Sans KR"/>
-              </a:rPr>
-              <a:t>CV-B · 거리뷰 + SegFormer</a:t>
+            <a:pPr>
+              <a:spcAft>
+                <a:spcPts val="400"/>
+              </a:spcAft>
+            </a:pPr>
+            <a:r>
+              <a:rPr sz="800" b="0">
+                <a:solidFill>
+                  <a:srgbClr val="37352F"/>
+                </a:solidFill>
+                <a:latin typeface="Noto Sans KR"/>
+              </a:rPr>
+              <a:t>•  Mapillary 동작구 BBOX 4×4 → 1,302장</a:t>
+            </a:r>
+          </a:p>
+          <a:p>
+            <a:pPr>
+              <a:spcAft>
+                <a:spcPts val="400"/>
+              </a:spcAft>
+            </a:pPr>
+            <a:r>
+              <a:rPr sz="800" b="0">
+                <a:solidFill>
+                  <a:srgbClr val="37352F"/>
+                </a:solidFill>
+                <a:latin typeface="Noto Sans KR"/>
+              </a:rPr>
+              <a:t>•  SegFormer-b0 (CityScapes 19 classes pretrained)</a:t>
+            </a:r>
+          </a:p>
+          <a:p>
+            <a:pPr>
+              <a:spcAft>
+                <a:spcPts val="400"/>
+              </a:spcAft>
+            </a:pPr>
+            <a:r>
+              <a:rPr sz="800" b="0">
+                <a:solidFill>
+                  <a:srgbClr val="37352F"/>
+                </a:solidFill>
+                <a:latin typeface="Noto Sans KR"/>
+              </a:rPr>
+              <a:t>•  deficit = (도로+보도) × (1 − 건물 − 식생)</a:t>
+            </a:r>
+          </a:p>
+          <a:p>
+            <a:pPr>
+              <a:spcAft>
+                <a:spcPts val="400"/>
+              </a:spcAft>
+            </a:pPr>
+            <a:r>
+              <a:rPr sz="800" b="0">
+                <a:solidFill>
+                  <a:srgbClr val="37352F"/>
+                </a:solidFill>
+                <a:latin typeface="Noto Sans KR"/>
+              </a:rPr>
+              <a:t>•  TOP10 평균 deficit 0.153</a:t>
             </a:r>
           </a:p>
         </p:txBody>
@@ -16922,8 +16924,8 @@
         </p:nvSpPr>
         <p:spPr>
           <a:xfrm>
-            <a:off x="4800600" y="2971800"/>
-            <a:ext cx="3657600" cy="1828800"/>
+            <a:off x="621792" y="4855464"/>
+            <a:ext cx="7909560" cy="210312"/>
           </a:xfrm>
           <a:prstGeom prst="rect">
             <a:avLst/>
@@ -16936,67 +16938,15 @@
           </a:bodyPr>
           <a:lstStyle/>
           <a:p>
-            <a:pPr>
-              <a:spcAft>
-                <a:spcPts val="400"/>
-              </a:spcAft>
-            </a:pPr>
-            <a:r>
-              <a:rPr sz="800" b="0">
-                <a:solidFill>
-                  <a:srgbClr val="37352F"/>
-                </a:solidFill>
-                <a:latin typeface="Noto Sans KR"/>
-              </a:rPr>
-              <a:t>•  Mapillary 동작구 BBOX 4×4 → 1,302장</a:t>
-            </a:r>
-          </a:p>
-          <a:p>
-            <a:pPr>
-              <a:spcAft>
-                <a:spcPts val="400"/>
-              </a:spcAft>
-            </a:pPr>
-            <a:r>
-              <a:rPr sz="800" b="0">
-                <a:solidFill>
-                  <a:srgbClr val="37352F"/>
-                </a:solidFill>
-                <a:latin typeface="Noto Sans KR"/>
-              </a:rPr>
-              <a:t>•  SegFormer-b0 (CityScapes 19 classes pretrained)</a:t>
-            </a:r>
-          </a:p>
-          <a:p>
-            <a:pPr>
-              <a:spcAft>
-                <a:spcPts val="400"/>
-              </a:spcAft>
-            </a:pPr>
-            <a:r>
-              <a:rPr sz="800" b="0">
-                <a:solidFill>
-                  <a:srgbClr val="37352F"/>
-                </a:solidFill>
-                <a:latin typeface="Noto Sans KR"/>
-              </a:rPr>
-              <a:t>•  deficit = (도로+보도) × (1 − 건물 − 식생)</a:t>
-            </a:r>
-          </a:p>
-          <a:p>
-            <a:pPr>
-              <a:spcAft>
-                <a:spcPts val="400"/>
-              </a:spcAft>
-            </a:pPr>
-            <a:r>
-              <a:rPr sz="800" b="0">
-                <a:solidFill>
-                  <a:srgbClr val="37352F"/>
-                </a:solidFill>
-                <a:latin typeface="Noto Sans KR"/>
-              </a:rPr>
-              <a:t>•  TOP10 평균 deficit 0.153</a:t>
+            <a:pPr algn="l"/>
+            <a:r>
+              <a:rPr sz="900" b="0">
+                <a:solidFill>
+                  <a:srgbClr val="9B9A97"/>
+                </a:solidFill>
+                <a:latin typeface="Noto Sans KR"/>
+              </a:rPr>
+              <a:t>동작구 그늘막 입지 분석 · 데이터기반 도시설계</a:t>
             </a:r>
           </a:p>
         </p:txBody>
@@ -17004,41 +16954,6 @@
       <p:sp>
         <p:nvSpPr>
           <p:cNvPr id="18" name="TextBox 17"/>
-          <p:cNvSpPr txBox="1"/>
-          <p:nvPr/>
-        </p:nvSpPr>
-        <p:spPr>
-          <a:xfrm>
-            <a:off x="621792" y="4855464"/>
-            <a:ext cx="7909560" cy="210312"/>
-          </a:xfrm>
-          <a:prstGeom prst="rect">
-            <a:avLst/>
-          </a:prstGeom>
-          <a:noFill/>
-        </p:spPr>
-        <p:txBody>
-          <a:bodyPr wrap="square" lIns="0" tIns="0">
-            <a:spAutoFit/>
-          </a:bodyPr>
-          <a:lstStyle/>
-          <a:p>
-            <a:pPr algn="l"/>
-            <a:r>
-              <a:rPr sz="900" b="0">
-                <a:solidFill>
-                  <a:srgbClr val="9B9A97"/>
-                </a:solidFill>
-                <a:latin typeface="Noto Sans KR"/>
-              </a:rPr>
-              <a:t>동작구 그늘막 입지 분석 · 데이터기반 도시설계</a:t>
-            </a:r>
-          </a:p>
-        </p:txBody>
-      </p:sp>
-      <p:sp>
-        <p:nvSpPr>
-          <p:cNvPr id="19" name="TextBox 18"/>
           <p:cNvSpPr txBox="1"/>
           <p:nvPr/>
         </p:nvSpPr>
@@ -17091,7 +17006,7 @@
       <p:grpSpPr/>
       <p:sp>
         <p:nvSpPr>
-          <p:cNvPr id="3" name="Rectangle 2"/>
+          <p:cNvPr id="2" name="Rectangle 1"/>
           <p:cNvSpPr/>
           <p:nvPr/>
         </p:nvSpPr>
@@ -17134,19 +17049,37 @@
       </p:sp>
       <p:sp>
         <p:nvSpPr>
-          <p:cNvPr id="2" name="Title 1"/>
-          <p:cNvSpPr>
-            <a:spLocks noGrp="1"/>
-          </p:cNvSpPr>
-          <p:nvPr>
-            <p:ph type="title"/>
-          </p:nvPr>
-        </p:nvSpPr>
-        <p:spPr/>
-        <p:txBody>
-          <a:bodyPr/>
-          <a:lstStyle/>
-          <a:p/>
+          <p:cNvPr id="3" name="TextBox 2"/>
+          <p:cNvSpPr txBox="1"/>
+          <p:nvPr/>
+        </p:nvSpPr>
+        <p:spPr>
+          <a:xfrm>
+            <a:off x="621792" y="429768"/>
+            <a:ext cx="7909560" cy="219456"/>
+          </a:xfrm>
+          <a:prstGeom prst="rect">
+            <a:avLst/>
+          </a:prstGeom>
+          <a:noFill/>
+        </p:spPr>
+        <p:txBody>
+          <a:bodyPr wrap="square" lIns="0" tIns="0">
+            <a:spAutoFit/>
+          </a:bodyPr>
+          <a:lstStyle/>
+          <a:p>
+            <a:pPr algn="l"/>
+            <a:r>
+              <a:rPr sz="1000" b="0">
+                <a:solidFill>
+                  <a:srgbClr val="787774"/>
+                </a:solidFill>
+                <a:latin typeface="Noto Sans KR"/>
+              </a:rPr>
+              <a:t>CV-DSM · Self-consistency</a:t>
+            </a:r>
+          </a:p>
         </p:txBody>
       </p:sp>
       <p:sp>
@@ -17157,8 +17090,8 @@
         </p:nvSpPr>
         <p:spPr>
           <a:xfrm>
-            <a:off x="621792" y="429768"/>
-            <a:ext cx="7909560" cy="219456"/>
+            <a:off x="621792" y="658368"/>
+            <a:ext cx="7909560" cy="411480"/>
           </a:xfrm>
           <a:prstGeom prst="rect">
             <a:avLst/>
@@ -17173,41 +17106,6 @@
           <a:p>
             <a:pPr algn="l"/>
             <a:r>
-              <a:rPr sz="1000" b="0">
-                <a:solidFill>
-                  <a:srgbClr val="787774"/>
-                </a:solidFill>
-                <a:latin typeface="Noto Sans KR"/>
-              </a:rPr>
-              <a:t>CV-DSM · Self-consistency</a:t>
-            </a:r>
-          </a:p>
-        </p:txBody>
-      </p:sp>
-      <p:sp>
-        <p:nvSpPr>
-          <p:cNvPr id="5" name="TextBox 4"/>
-          <p:cNvSpPr txBox="1"/>
-          <p:nvPr/>
-        </p:nvSpPr>
-        <p:spPr>
-          <a:xfrm>
-            <a:off x="621792" y="658368"/>
-            <a:ext cx="7909560" cy="411480"/>
-          </a:xfrm>
-          <a:prstGeom prst="rect">
-            <a:avLst/>
-          </a:prstGeom>
-          <a:noFill/>
-        </p:spPr>
-        <p:txBody>
-          <a:bodyPr wrap="square" lIns="0" tIns="0">
-            <a:spAutoFit/>
-          </a:bodyPr>
-          <a:lstStyle/>
-          <a:p>
-            <a:pPr algn="l"/>
-            <a:r>
               <a:rPr sz="2000" b="1">
                 <a:solidFill>
                   <a:srgbClr val="37352F"/>
@@ -17221,7 +17119,7 @@
       </p:sp>
       <p:sp>
         <p:nvSpPr>
-          <p:cNvPr id="6" name="Rectangle 5"/>
+          <p:cNvPr id="5" name="Rectangle 4"/>
           <p:cNvSpPr/>
           <p:nvPr/>
         </p:nvSpPr>
@@ -17264,7 +17162,7 @@
       </p:sp>
       <p:sp>
         <p:nvSpPr>
-          <p:cNvPr id="7" name="TextBox 6"/>
+          <p:cNvPr id="6" name="TextBox 5"/>
           <p:cNvSpPr txBox="1"/>
           <p:nvPr/>
         </p:nvSpPr>
@@ -17351,7 +17249,7 @@
       </p:sp>
       <p:sp>
         <p:nvSpPr>
-          <p:cNvPr id="8" name="Rounded Rectangle 7"/>
+          <p:cNvPr id="7" name="Rounded Rectangle 6"/>
           <p:cNvSpPr/>
           <p:nvPr/>
         </p:nvSpPr>
@@ -17399,13 +17297,48 @@
       </p:sp>
       <p:sp>
         <p:nvSpPr>
+          <p:cNvPr id="8" name="TextBox 7"/>
+          <p:cNvSpPr txBox="1"/>
+          <p:nvPr/>
+        </p:nvSpPr>
+        <p:spPr>
+          <a:xfrm>
+            <a:off x="5349240" y="1417320"/>
+            <a:ext cx="3108960" cy="274320"/>
+          </a:xfrm>
+          <a:prstGeom prst="rect">
+            <a:avLst/>
+          </a:prstGeom>
+          <a:noFill/>
+        </p:spPr>
+        <p:txBody>
+          <a:bodyPr wrap="square" lIns="0" tIns="0">
+            <a:spAutoFit/>
+          </a:bodyPr>
+          <a:lstStyle/>
+          <a:p>
+            <a:pPr algn="l"/>
+            <a:r>
+              <a:rPr sz="1100" b="1">
+                <a:solidFill>
+                  <a:srgbClr val="2383E2"/>
+                </a:solidFill>
+                <a:latin typeface="Noto Sans KR"/>
+              </a:rPr>
+              <a:t>Self-consistency 5회 (NEW)</a:t>
+            </a:r>
+          </a:p>
+        </p:txBody>
+      </p:sp>
+      <p:sp>
+        <p:nvSpPr>
           <p:cNvPr id="9" name="TextBox 8"/>
           <p:cNvSpPr txBox="1"/>
           <p:nvPr/>
         </p:nvSpPr>
         <p:spPr>
           <a:xfrm>
-            <a:off x="5349240" y="1417320"/>
+            <a:off x="5349240" y="1691640"/>
             <a:ext cx="3108960" cy="274320"/>
           </a:xfrm>
           <a:prstGeom prst="rect">
@@ -17421,13 +17354,13 @@
           <a:p>
             <a:pPr algn="l"/>
             <a:r>
-              <a:rPr sz="1100" b="1">
-                <a:solidFill>
-                  <a:srgbClr val="2383E2"/>
-                </a:solidFill>
-                <a:latin typeface="Noto Sans KR"/>
-              </a:rPr>
-              <a:t>Self-consistency 5회 (NEW)</a:t>
+              <a:rPr sz="900" b="0">
+                <a:solidFill>
+                  <a:srgbClr val="787774"/>
+                </a:solidFill>
+                <a:latin typeface="Noto Sans KR"/>
+              </a:rPr>
+              <a:t>강의 40p 권장 — 5회 반복 평균</a:t>
             </a:r>
           </a:p>
         </p:txBody>
@@ -17440,8 +17373,8 @@
         </p:nvSpPr>
         <p:spPr>
           <a:xfrm>
-            <a:off x="5349240" y="1691640"/>
-            <a:ext cx="3108960" cy="274320"/>
+            <a:off x="5349240" y="1965960"/>
+            <a:ext cx="3108960" cy="2560320"/>
           </a:xfrm>
           <a:prstGeom prst="rect">
             <a:avLst/>
@@ -17454,41 +17387,6 @@
           </a:bodyPr>
           <a:lstStyle/>
           <a:p>
-            <a:pPr algn="l"/>
-            <a:r>
-              <a:rPr sz="900" b="0">
-                <a:solidFill>
-                  <a:srgbClr val="787774"/>
-                </a:solidFill>
-                <a:latin typeface="Noto Sans KR"/>
-              </a:rPr>
-              <a:t>강의 40p 권장 — 5회 반복 평균</a:t>
-            </a:r>
-          </a:p>
-        </p:txBody>
-      </p:sp>
-      <p:sp>
-        <p:nvSpPr>
-          <p:cNvPr id="11" name="TextBox 10"/>
-          <p:cNvSpPr txBox="1"/>
-          <p:nvPr/>
-        </p:nvSpPr>
-        <p:spPr>
-          <a:xfrm>
-            <a:off x="5349240" y="1965960"/>
-            <a:ext cx="3108960" cy="2560320"/>
-          </a:xfrm>
-          <a:prstGeom prst="rect">
-            <a:avLst/>
-          </a:prstGeom>
-          <a:noFill/>
-        </p:spPr>
-        <p:txBody>
-          <a:bodyPr wrap="square" lIns="0" tIns="0">
-            <a:spAutoFit/>
-          </a:bodyPr>
-          <a:lstStyle/>
-          <a:p>
             <a:pPr>
               <a:spcAft>
                 <a:spcPts val="400"/>
@@ -17588,7 +17486,7 @@
       </p:sp>
       <p:sp>
         <p:nvSpPr>
-          <p:cNvPr id="12" name="Rounded Rectangle 11"/>
+          <p:cNvPr id="11" name="Rounded Rectangle 10"/>
           <p:cNvSpPr/>
           <p:nvPr/>
         </p:nvSpPr>
@@ -17636,14 +17534,49 @@
       </p:sp>
       <p:sp>
         <p:nvSpPr>
+          <p:cNvPr id="12" name="TextBox 11"/>
+          <p:cNvSpPr txBox="1"/>
+          <p:nvPr/>
+        </p:nvSpPr>
+        <p:spPr>
+          <a:xfrm>
+            <a:off x="777240" y="3337560"/>
+            <a:ext cx="4206240" cy="274320"/>
+          </a:xfrm>
+          <a:prstGeom prst="rect">
+            <a:avLst/>
+          </a:prstGeom>
+          <a:noFill/>
+        </p:spPr>
+        <p:txBody>
+          <a:bodyPr wrap="square" lIns="0" tIns="0">
+            <a:spAutoFit/>
+          </a:bodyPr>
+          <a:lstStyle/>
+          <a:p>
+            <a:pPr algn="l"/>
+            <a:r>
+              <a:rPr sz="1000" b="1">
+                <a:solidFill>
+                  <a:srgbClr val="2383E2"/>
+                </a:solidFill>
+                <a:latin typeface="Noto Sans KR"/>
+              </a:rPr>
+              <a:t>📁 산출물</a:t>
+            </a:r>
+          </a:p>
+        </p:txBody>
+      </p:sp>
+      <p:sp>
+        <p:nvSpPr>
           <p:cNvPr id="13" name="TextBox 12"/>
           <p:cNvSpPr txBox="1"/>
           <p:nvPr/>
         </p:nvSpPr>
         <p:spPr>
           <a:xfrm>
-            <a:off x="777240" y="3337560"/>
-            <a:ext cx="4206240" cy="274320"/>
+            <a:off x="777240" y="3611880"/>
+            <a:ext cx="4206240" cy="1097280"/>
           </a:xfrm>
           <a:prstGeom prst="rect">
             <a:avLst/>
@@ -17656,15 +17589,51 @@
           </a:bodyPr>
           <a:lstStyle/>
           <a:p>
-            <a:pPr algn="l"/>
-            <a:r>
-              <a:rPr sz="1000" b="1">
-                <a:solidFill>
-                  <a:srgbClr val="2383E2"/>
-                </a:solidFill>
-                <a:latin typeface="Noto Sans KR"/>
-              </a:rPr>
-              <a:t>📁 산출물</a:t>
+            <a:pPr>
+              <a:spcAft>
+                <a:spcPts val="400"/>
+              </a:spcAft>
+            </a:pPr>
+            <a:r>
+              <a:rPr sz="800" b="0">
+                <a:solidFill>
+                  <a:srgbClr val="37352F"/>
+                </a:solidFill>
+                <a:latin typeface="Noto Sans KR"/>
+              </a:rPr>
+              <a:t>•  heukseok_shadow_accum.tif (누적 그림자 래스터)</a:t>
+            </a:r>
+          </a:p>
+          <a:p>
+            <a:pPr>
+              <a:spcAft>
+                <a:spcPts val="400"/>
+              </a:spcAft>
+            </a:pPr>
+            <a:r>
+              <a:rPr sz="800" b="0">
+                <a:solidFill>
+                  <a:srgbClr val="37352F"/>
+                </a:solidFill>
+                <a:latin typeface="Noto Sans KR"/>
+              </a:rPr>
+              <a:t>•  grid_heukseok_consistency.csv (격자별 mean/std/ci95)</a:t>
+            </a:r>
+          </a:p>
+          <a:p>
+            <a:pPr>
+              <a:spcAft>
+                <a:spcPts val="400"/>
+              </a:spcAft>
+            </a:pPr>
+            <a:r>
+              <a:rPr sz="800" b="0">
+                <a:solidFill>
+                  <a:srgbClr val="37352F"/>
+                </a:solidFill>
+                <a:latin typeface="Noto Sans KR"/>
+              </a:rPr>
+              <a:t>•  흑석동 focus map v8 — 그림자 std 레이어 토글</a:t>
             </a:r>
           </a:p>
         </p:txBody>
@@ -17677,8 +17646,8 @@
         </p:nvSpPr>
         <p:spPr>
           <a:xfrm>
-            <a:off x="777240" y="3611880"/>
-            <a:ext cx="4206240" cy="1097280"/>
+            <a:off x="621792" y="4855464"/>
+            <a:ext cx="7909560" cy="210312"/>
           </a:xfrm>
           <a:prstGeom prst="rect">
             <a:avLst/>
@@ -17691,51 +17660,15 @@
           </a:bodyPr>
           <a:lstStyle/>
           <a:p>
-            <a:pPr>
-              <a:spcAft>
-                <a:spcPts val="400"/>
-              </a:spcAft>
-            </a:pPr>
-            <a:r>
-              <a:rPr sz="800" b="0">
-                <a:solidFill>
-                  <a:srgbClr val="37352F"/>
-                </a:solidFill>
-                <a:latin typeface="Noto Sans KR"/>
-              </a:rPr>
-              <a:t>•  heukseok_shadow_accum.tif (누적 그림자 래스터)</a:t>
-            </a:r>
-          </a:p>
-          <a:p>
-            <a:pPr>
-              <a:spcAft>
-                <a:spcPts val="400"/>
-              </a:spcAft>
-            </a:pPr>
-            <a:r>
-              <a:rPr sz="800" b="0">
-                <a:solidFill>
-                  <a:srgbClr val="37352F"/>
-                </a:solidFill>
-                <a:latin typeface="Noto Sans KR"/>
-              </a:rPr>
-              <a:t>•  grid_heukseok_consistency.csv (격자별 mean/std/ci95)</a:t>
-            </a:r>
-          </a:p>
-          <a:p>
-            <a:pPr>
-              <a:spcAft>
-                <a:spcPts val="400"/>
-              </a:spcAft>
-            </a:pPr>
-            <a:r>
-              <a:rPr sz="800" b="0">
-                <a:solidFill>
-                  <a:srgbClr val="37352F"/>
-                </a:solidFill>
-                <a:latin typeface="Noto Sans KR"/>
-              </a:rPr>
-              <a:t>•  흑석동 focus map v8 — 그림자 std 레이어 토글</a:t>
+            <a:pPr algn="l"/>
+            <a:r>
+              <a:rPr sz="900" b="0">
+                <a:solidFill>
+                  <a:srgbClr val="9B9A97"/>
+                </a:solidFill>
+                <a:latin typeface="Noto Sans KR"/>
+              </a:rPr>
+              <a:t>동작구 그늘막 입지 분석 · 데이터기반 도시설계</a:t>
             </a:r>
           </a:p>
         </p:txBody>
@@ -17743,41 +17676,6 @@
       <p:sp>
         <p:nvSpPr>
           <p:cNvPr id="15" name="TextBox 14"/>
-          <p:cNvSpPr txBox="1"/>
-          <p:nvPr/>
-        </p:nvSpPr>
-        <p:spPr>
-          <a:xfrm>
-            <a:off x="621792" y="4855464"/>
-            <a:ext cx="7909560" cy="210312"/>
-          </a:xfrm>
-          <a:prstGeom prst="rect">
-            <a:avLst/>
-          </a:prstGeom>
-          <a:noFill/>
-        </p:spPr>
-        <p:txBody>
-          <a:bodyPr wrap="square" lIns="0" tIns="0">
-            <a:spAutoFit/>
-          </a:bodyPr>
-          <a:lstStyle/>
-          <a:p>
-            <a:pPr algn="l"/>
-            <a:r>
-              <a:rPr sz="900" b="0">
-                <a:solidFill>
-                  <a:srgbClr val="9B9A97"/>
-                </a:solidFill>
-                <a:latin typeface="Noto Sans KR"/>
-              </a:rPr>
-              <a:t>동작구 그늘막 입지 분석 · 데이터기반 도시설계</a:t>
-            </a:r>
-          </a:p>
-        </p:txBody>
-      </p:sp>
-      <p:sp>
-        <p:nvSpPr>
-          <p:cNvPr id="16" name="TextBox 15"/>
           <p:cNvSpPr txBox="1"/>
           <p:nvPr/>
         </p:nvSpPr>
@@ -17830,7 +17728,7 @@
       <p:grpSpPr/>
       <p:sp>
         <p:nvSpPr>
-          <p:cNvPr id="3" name="Rectangle 2"/>
+          <p:cNvPr id="2" name="Rectangle 1"/>
           <p:cNvSpPr/>
           <p:nvPr/>
         </p:nvSpPr>
@@ -17873,19 +17771,37 @@
       </p:sp>
       <p:sp>
         <p:nvSpPr>
-          <p:cNvPr id="2" name="Title 1"/>
-          <p:cNvSpPr>
-            <a:spLocks noGrp="1"/>
-          </p:cNvSpPr>
-          <p:nvPr>
-            <p:ph type="title"/>
-          </p:nvPr>
-        </p:nvSpPr>
-        <p:spPr/>
-        <p:txBody>
-          <a:bodyPr/>
-          <a:lstStyle/>
-          <a:p/>
+          <p:cNvPr id="3" name="TextBox 2"/>
+          <p:cNvSpPr txBox="1"/>
+          <p:nvPr/>
+        </p:nvSpPr>
+        <p:spPr>
+          <a:xfrm>
+            <a:off x="621792" y="429768"/>
+            <a:ext cx="7909560" cy="219456"/>
+          </a:xfrm>
+          <a:prstGeom prst="rect">
+            <a:avLst/>
+          </a:prstGeom>
+          <a:noFill/>
+        </p:spPr>
+        <p:txBody>
+          <a:bodyPr wrap="square" lIns="0" tIns="0">
+            <a:spAutoFit/>
+          </a:bodyPr>
+          <a:lstStyle/>
+          <a:p>
+            <a:pPr algn="l"/>
+            <a:r>
+              <a:rPr sz="1000" b="0">
+                <a:solidFill>
+                  <a:srgbClr val="787774"/>
+                </a:solidFill>
+                <a:latin typeface="Noto Sans KR"/>
+              </a:rPr>
+              <a:t>흑석동 정밀 분석</a:t>
+            </a:r>
+          </a:p>
         </p:txBody>
       </p:sp>
       <p:sp>
@@ -17896,8 +17812,8 @@
         </p:nvSpPr>
         <p:spPr>
           <a:xfrm>
-            <a:off x="621792" y="429768"/>
-            <a:ext cx="7909560" cy="219456"/>
+            <a:off x="621792" y="658368"/>
+            <a:ext cx="7909560" cy="411480"/>
           </a:xfrm>
           <a:prstGeom prst="rect">
             <a:avLst/>
@@ -17912,41 +17828,6 @@
           <a:p>
             <a:pPr algn="l"/>
             <a:r>
-              <a:rPr sz="1000" b="0">
-                <a:solidFill>
-                  <a:srgbClr val="787774"/>
-                </a:solidFill>
-                <a:latin typeface="Noto Sans KR"/>
-              </a:rPr>
-              <a:t>흑석동 정밀 분석</a:t>
-            </a:r>
-          </a:p>
-        </p:txBody>
-      </p:sp>
-      <p:sp>
-        <p:nvSpPr>
-          <p:cNvPr id="5" name="TextBox 4"/>
-          <p:cNvSpPr txBox="1"/>
-          <p:nvPr/>
-        </p:nvSpPr>
-        <p:spPr>
-          <a:xfrm>
-            <a:off x="621792" y="658368"/>
-            <a:ext cx="7909560" cy="411480"/>
-          </a:xfrm>
-          <a:prstGeom prst="rect">
-            <a:avLst/>
-          </a:prstGeom>
-          <a:noFill/>
-        </p:spPr>
-        <p:txBody>
-          <a:bodyPr wrap="square" lIns="0" tIns="0">
-            <a:spAutoFit/>
-          </a:bodyPr>
-          <a:lstStyle/>
-          <a:p>
-            <a:pPr algn="l"/>
-            <a:r>
               <a:rPr sz="2000" b="1">
                 <a:solidFill>
                   <a:srgbClr val="37352F"/>
@@ -17960,7 +17841,7 @@
       </p:sp>
       <p:sp>
         <p:nvSpPr>
-          <p:cNvPr id="6" name="Rectangle 5"/>
+          <p:cNvPr id="5" name="Rectangle 4"/>
           <p:cNvSpPr/>
           <p:nvPr/>
         </p:nvSpPr>
@@ -18003,7 +17884,7 @@
       </p:sp>
       <p:graphicFrame>
         <p:nvGraphicFramePr>
-          <p:cNvPr id="7" name="Table 6"/>
+          <p:cNvPr id="6" name="Table 5"/>
           <p:cNvGraphicFramePr>
             <a:graphicFrameLocks noGrp="1"/>
           </p:cNvGraphicFramePr>
@@ -18921,7 +18802,7 @@
       </p:graphicFrame>
       <p:sp>
         <p:nvSpPr>
-          <p:cNvPr id="8" name="Rounded Rectangle 7"/>
+          <p:cNvPr id="7" name="Rounded Rectangle 6"/>
           <p:cNvSpPr/>
           <p:nvPr/>
         </p:nvSpPr>
@@ -18969,14 +18850,49 @@
       </p:sp>
       <p:sp>
         <p:nvSpPr>
+          <p:cNvPr id="8" name="TextBox 7"/>
+          <p:cNvSpPr txBox="1"/>
+          <p:nvPr/>
+        </p:nvSpPr>
+        <p:spPr>
+          <a:xfrm>
+            <a:off x="4434840" y="1417320"/>
+            <a:ext cx="4023360" cy="274320"/>
+          </a:xfrm>
+          <a:prstGeom prst="rect">
+            <a:avLst/>
+          </a:prstGeom>
+          <a:noFill/>
+        </p:spPr>
+        <p:txBody>
+          <a:bodyPr wrap="square" lIns="0" tIns="0">
+            <a:spAutoFit/>
+          </a:bodyPr>
+          <a:lstStyle/>
+          <a:p>
+            <a:pPr algn="l"/>
+            <a:r>
+              <a:rPr sz="1100" b="1">
+                <a:solidFill>
+                  <a:srgbClr val="CB7B26"/>
+                </a:solidFill>
+                <a:latin typeface="Noto Sans KR"/>
+              </a:rPr>
+              <a:t>⭐ 사각지대 4곳 — 정책 어필 1순위</a:t>
+            </a:r>
+          </a:p>
+        </p:txBody>
+      </p:sp>
+      <p:sp>
+        <p:nvSpPr>
           <p:cNvPr id="9" name="TextBox 8"/>
           <p:cNvSpPr txBox="1"/>
           <p:nvPr/>
         </p:nvSpPr>
         <p:spPr>
           <a:xfrm>
-            <a:off x="4434840" y="1417320"/>
-            <a:ext cx="4023360" cy="274320"/>
+            <a:off x="4434840" y="1691640"/>
+            <a:ext cx="4023360" cy="1463040"/>
           </a:xfrm>
           <a:prstGeom prst="rect">
             <a:avLst/>
@@ -18989,41 +18905,6 @@
           </a:bodyPr>
           <a:lstStyle/>
           <a:p>
-            <a:pPr algn="l"/>
-            <a:r>
-              <a:rPr sz="1100" b="1">
-                <a:solidFill>
-                  <a:srgbClr val="CB7B26"/>
-                </a:solidFill>
-                <a:latin typeface="Noto Sans KR"/>
-              </a:rPr>
-              <a:t>⭐ 사각지대 4곳 — 정책 어필 1순위</a:t>
-            </a:r>
-          </a:p>
-        </p:txBody>
-      </p:sp>
-      <p:sp>
-        <p:nvSpPr>
-          <p:cNvPr id="10" name="TextBox 9"/>
-          <p:cNvSpPr txBox="1"/>
-          <p:nvPr/>
-        </p:nvSpPr>
-        <p:spPr>
-          <a:xfrm>
-            <a:off x="4434840" y="1691640"/>
-            <a:ext cx="4023360" cy="1463040"/>
-          </a:xfrm>
-          <a:prstGeom prst="rect">
-            <a:avLst/>
-          </a:prstGeom>
-          <a:noFill/>
-        </p:spPr>
-        <p:txBody>
-          <a:bodyPr wrap="square" lIns="0" tIns="0">
-            <a:spAutoFit/>
-          </a:bodyPr>
-          <a:lstStyle/>
-          <a:p>
             <a:pPr>
               <a:spcAft>
                 <a:spcPts val="400"/>
@@ -19091,7 +18972,7 @@
       </p:sp>
       <p:sp>
         <p:nvSpPr>
-          <p:cNvPr id="11" name="Rounded Rectangle 10"/>
+          <p:cNvPr id="10" name="Rounded Rectangle 9"/>
           <p:cNvSpPr/>
           <p:nvPr/>
         </p:nvSpPr>
@@ -19139,14 +19020,49 @@
       </p:sp>
       <p:sp>
         <p:nvSpPr>
+          <p:cNvPr id="11" name="TextBox 10"/>
+          <p:cNvSpPr txBox="1"/>
+          <p:nvPr/>
+        </p:nvSpPr>
+        <p:spPr>
+          <a:xfrm>
+            <a:off x="4434840" y="3383280"/>
+            <a:ext cx="4023360" cy="274320"/>
+          </a:xfrm>
+          <a:prstGeom prst="rect">
+            <a:avLst/>
+          </a:prstGeom>
+          <a:noFill/>
+        </p:spPr>
+        <p:txBody>
+          <a:bodyPr wrap="square" lIns="0" tIns="0">
+            <a:spAutoFit/>
+          </a:bodyPr>
+          <a:lstStyle/>
+          <a:p>
+            <a:pPr algn="l"/>
+            <a:r>
+              <a:rPr sz="1100" b="1">
+                <a:solidFill>
+                  <a:srgbClr val="2383E2"/>
+                </a:solidFill>
+                <a:latin typeface="Noto Sans KR"/>
+              </a:rPr>
+              <a:t>흑석동 데이터</a:t>
+            </a:r>
+          </a:p>
+        </p:txBody>
+      </p:sp>
+      <p:sp>
+        <p:nvSpPr>
           <p:cNvPr id="12" name="TextBox 11"/>
           <p:cNvSpPr txBox="1"/>
           <p:nvPr/>
         </p:nvSpPr>
         <p:spPr>
           <a:xfrm>
-            <a:off x="4434840" y="3383280"/>
-            <a:ext cx="4023360" cy="274320"/>
+            <a:off x="4434840" y="3657600"/>
+            <a:ext cx="4023360" cy="914400"/>
           </a:xfrm>
           <a:prstGeom prst="rect">
             <a:avLst/>
@@ -19159,15 +19075,51 @@
           </a:bodyPr>
           <a:lstStyle/>
           <a:p>
-            <a:pPr algn="l"/>
-            <a:r>
-              <a:rPr sz="1100" b="1">
-                <a:solidFill>
-                  <a:srgbClr val="2383E2"/>
-                </a:solidFill>
-                <a:latin typeface="Noto Sans KR"/>
-              </a:rPr>
-              <a:t>흑석동 데이터</a:t>
+            <a:pPr>
+              <a:spcAft>
+                <a:spcPts val="400"/>
+              </a:spcAft>
+            </a:pPr>
+            <a:r>
+              <a:rPr sz="800" b="0">
+                <a:solidFill>
+                  <a:srgbClr val="37352F"/>
+                </a:solidFill>
+                <a:latin typeface="Noto Sans KR"/>
+              </a:rPr>
+              <a:t>•  실측 그늘막 18개 (고정형 13 + 스마트형 5)</a:t>
+            </a:r>
+          </a:p>
+          <a:p>
+            <a:pPr>
+              <a:spcAft>
+                <a:spcPts val="400"/>
+              </a:spcAft>
+            </a:pPr>
+            <a:r>
+              <a:rPr sz="800" b="0">
+                <a:solidFill>
+                  <a:srgbClr val="37352F"/>
+                </a:solidFill>
+                <a:latin typeface="Noto Sans KR"/>
+              </a:rPr>
+              <a:t>•  NGII 건물 3,775동 (층수·HEGT) + DSM 4시점 누적</a:t>
+            </a:r>
+          </a:p>
+          <a:p>
+            <a:pPr>
+              <a:spcAft>
+                <a:spcPts val="400"/>
+              </a:spcAft>
+            </a:pPr>
+            <a:r>
+              <a:rPr sz="800" b="0">
+                <a:solidFill>
+                  <a:srgbClr val="37352F"/>
+                </a:solidFill>
+                <a:latin typeface="Noto Sans KR"/>
+              </a:rPr>
+              <a:t>•  그늘막 75% 영역 커버 → 정책: 다른 동 우선</a:t>
             </a:r>
           </a:p>
         </p:txBody>
@@ -19180,8 +19132,8 @@
         </p:nvSpPr>
         <p:spPr>
           <a:xfrm>
-            <a:off x="4434840" y="3657600"/>
-            <a:ext cx="4023360" cy="914400"/>
+            <a:off x="621792" y="4855464"/>
+            <a:ext cx="7909560" cy="210312"/>
           </a:xfrm>
           <a:prstGeom prst="rect">
             <a:avLst/>
@@ -19194,51 +19146,15 @@
           </a:bodyPr>
           <a:lstStyle/>
           <a:p>
-            <a:pPr>
-              <a:spcAft>
-                <a:spcPts val="400"/>
-              </a:spcAft>
-            </a:pPr>
-            <a:r>
-              <a:rPr sz="800" b="0">
-                <a:solidFill>
-                  <a:srgbClr val="37352F"/>
-                </a:solidFill>
-                <a:latin typeface="Noto Sans KR"/>
-              </a:rPr>
-              <a:t>•  실측 그늘막 18개 (고정형 13 + 스마트형 5)</a:t>
-            </a:r>
-          </a:p>
-          <a:p>
-            <a:pPr>
-              <a:spcAft>
-                <a:spcPts val="400"/>
-              </a:spcAft>
-            </a:pPr>
-            <a:r>
-              <a:rPr sz="800" b="0">
-                <a:solidFill>
-                  <a:srgbClr val="37352F"/>
-                </a:solidFill>
-                <a:latin typeface="Noto Sans KR"/>
-              </a:rPr>
-              <a:t>•  NGII 건물 3,775동 (층수·HEGT) + DSM 4시점 누적</a:t>
-            </a:r>
-          </a:p>
-          <a:p>
-            <a:pPr>
-              <a:spcAft>
-                <a:spcPts val="400"/>
-              </a:spcAft>
-            </a:pPr>
-            <a:r>
-              <a:rPr sz="800" b="0">
-                <a:solidFill>
-                  <a:srgbClr val="37352F"/>
-                </a:solidFill>
-                <a:latin typeface="Noto Sans KR"/>
-              </a:rPr>
-              <a:t>•  그늘막 75% 영역 커버 → 정책: 다른 동 우선</a:t>
+            <a:pPr algn="l"/>
+            <a:r>
+              <a:rPr sz="900" b="0">
+                <a:solidFill>
+                  <a:srgbClr val="9B9A97"/>
+                </a:solidFill>
+                <a:latin typeface="Noto Sans KR"/>
+              </a:rPr>
+              <a:t>동작구 그늘막 입지 분석 · 데이터기반 도시설계</a:t>
             </a:r>
           </a:p>
         </p:txBody>
@@ -19246,41 +19162,6 @@
       <p:sp>
         <p:nvSpPr>
           <p:cNvPr id="14" name="TextBox 13"/>
-          <p:cNvSpPr txBox="1"/>
-          <p:nvPr/>
-        </p:nvSpPr>
-        <p:spPr>
-          <a:xfrm>
-            <a:off x="621792" y="4855464"/>
-            <a:ext cx="7909560" cy="210312"/>
-          </a:xfrm>
-          <a:prstGeom prst="rect">
-            <a:avLst/>
-          </a:prstGeom>
-          <a:noFill/>
-        </p:spPr>
-        <p:txBody>
-          <a:bodyPr wrap="square" lIns="0" tIns="0">
-            <a:spAutoFit/>
-          </a:bodyPr>
-          <a:lstStyle/>
-          <a:p>
-            <a:pPr algn="l"/>
-            <a:r>
-              <a:rPr sz="900" b="0">
-                <a:solidFill>
-                  <a:srgbClr val="9B9A97"/>
-                </a:solidFill>
-                <a:latin typeface="Noto Sans KR"/>
-              </a:rPr>
-              <a:t>동작구 그늘막 입지 분석 · 데이터기반 도시설계</a:t>
-            </a:r>
-          </a:p>
-        </p:txBody>
-      </p:sp>
-      <p:sp>
-        <p:nvSpPr>
-          <p:cNvPr id="15" name="TextBox 14"/>
           <p:cNvSpPr txBox="1"/>
           <p:nvPr/>
         </p:nvSpPr>
@@ -19333,7 +19214,7 @@
       <p:grpSpPr/>
       <p:sp>
         <p:nvSpPr>
-          <p:cNvPr id="3" name="Rectangle 2"/>
+          <p:cNvPr id="2" name="Rectangle 1"/>
           <p:cNvSpPr/>
           <p:nvPr/>
         </p:nvSpPr>
@@ -19376,19 +19257,37 @@
       </p:sp>
       <p:sp>
         <p:nvSpPr>
-          <p:cNvPr id="2" name="Title 1"/>
-          <p:cNvSpPr>
-            <a:spLocks noGrp="1"/>
-          </p:cNvSpPr>
-          <p:nvPr>
-            <p:ph type="title"/>
-          </p:nvPr>
-        </p:nvSpPr>
-        <p:spPr/>
-        <p:txBody>
-          <a:bodyPr/>
-          <a:lstStyle/>
-          <a:p/>
+          <p:cNvPr id="3" name="TextBox 2"/>
+          <p:cNvSpPr txBox="1"/>
+          <p:nvPr/>
+        </p:nvSpPr>
+        <p:spPr>
+          <a:xfrm>
+            <a:off x="621792" y="429768"/>
+            <a:ext cx="7909560" cy="219456"/>
+          </a:xfrm>
+          <a:prstGeom prst="rect">
+            <a:avLst/>
+          </a:prstGeom>
+          <a:noFill/>
+        </p:spPr>
+        <p:txBody>
+          <a:bodyPr wrap="square" lIns="0" tIns="0">
+            <a:spAutoFit/>
+          </a:bodyPr>
+          <a:lstStyle/>
+          <a:p>
+            <a:pPr algn="l"/>
+            <a:r>
+              <a:rPr sz="1000" b="0">
+                <a:solidFill>
+                  <a:srgbClr val="787774"/>
+                </a:solidFill>
+                <a:latin typeface="Noto Sans KR"/>
+              </a:rPr>
+              <a:t>가중치 자동 튜닝</a:t>
+            </a:r>
+          </a:p>
         </p:txBody>
       </p:sp>
       <p:sp>
@@ -19399,8 +19298,8 @@
         </p:nvSpPr>
         <p:spPr>
           <a:xfrm>
-            <a:off x="621792" y="429768"/>
-            <a:ext cx="7909560" cy="219456"/>
+            <a:off x="621792" y="658368"/>
+            <a:ext cx="7909560" cy="411480"/>
           </a:xfrm>
           <a:prstGeom prst="rect">
             <a:avLst/>
@@ -19415,41 +19314,6 @@
           <a:p>
             <a:pPr algn="l"/>
             <a:r>
-              <a:rPr sz="1000" b="0">
-                <a:solidFill>
-                  <a:srgbClr val="787774"/>
-                </a:solidFill>
-                <a:latin typeface="Noto Sans KR"/>
-              </a:rPr>
-              <a:t>가중치 자동 튜닝</a:t>
-            </a:r>
-          </a:p>
-        </p:txBody>
-      </p:sp>
-      <p:sp>
-        <p:nvSpPr>
-          <p:cNvPr id="5" name="TextBox 4"/>
-          <p:cNvSpPr txBox="1"/>
-          <p:nvPr/>
-        </p:nvSpPr>
-        <p:spPr>
-          <a:xfrm>
-            <a:off x="621792" y="658368"/>
-            <a:ext cx="7909560" cy="411480"/>
-          </a:xfrm>
-          <a:prstGeom prst="rect">
-            <a:avLst/>
-          </a:prstGeom>
-          <a:noFill/>
-        </p:spPr>
-        <p:txBody>
-          <a:bodyPr wrap="square" lIns="0" tIns="0">
-            <a:spAutoFit/>
-          </a:bodyPr>
-          <a:lstStyle/>
-          <a:p>
-            <a:pPr algn="l"/>
-            <a:r>
               <a:rPr sz="2000" b="1">
                 <a:solidFill>
                   <a:srgbClr val="37352F"/>
@@ -19463,7 +19327,7 @@
       </p:sp>
       <p:sp>
         <p:nvSpPr>
-          <p:cNvPr id="6" name="Rectangle 5"/>
+          <p:cNvPr id="5" name="Rectangle 4"/>
           <p:cNvSpPr/>
           <p:nvPr/>
         </p:nvSpPr>
@@ -19506,7 +19370,7 @@
       </p:sp>
       <p:sp>
         <p:nvSpPr>
-          <p:cNvPr id="7" name="Rounded Rectangle 6"/>
+          <p:cNvPr id="6" name="Rounded Rectangle 5"/>
           <p:cNvSpPr/>
           <p:nvPr/>
         </p:nvSpPr>
@@ -19554,13 +19418,48 @@
       </p:sp>
       <p:sp>
         <p:nvSpPr>
+          <p:cNvPr id="7" name="TextBox 6"/>
+          <p:cNvSpPr txBox="1"/>
+          <p:nvPr/>
+        </p:nvSpPr>
+        <p:spPr>
+          <a:xfrm>
+            <a:off x="777240" y="1417320"/>
+            <a:ext cx="7589520" cy="274320"/>
+          </a:xfrm>
+          <a:prstGeom prst="rect">
+            <a:avLst/>
+          </a:prstGeom>
+          <a:noFill/>
+        </p:spPr>
+        <p:txBody>
+          <a:bodyPr wrap="square" lIns="0" tIns="0">
+            <a:spAutoFit/>
+          </a:bodyPr>
+          <a:lstStyle/>
+          <a:p>
+            <a:pPr algn="l"/>
+            <a:r>
+              <a:rPr sz="1000" b="1">
+                <a:solidFill>
+                  <a:srgbClr val="2383E2"/>
+                </a:solidFill>
+                <a:latin typeface="Noto Sans KR"/>
+              </a:rPr>
+              <a:t>가설: 이미 그늘막이 설치된 위치는 score 가 낮아야 한다 (이미 충분히 커버됨)</a:t>
+            </a:r>
+          </a:p>
+        </p:txBody>
+      </p:sp>
+      <p:sp>
+        <p:nvSpPr>
           <p:cNvPr id="8" name="TextBox 7"/>
           <p:cNvSpPr txBox="1"/>
           <p:nvPr/>
         </p:nvSpPr>
         <p:spPr>
           <a:xfrm>
-            <a:off x="777240" y="1417320"/>
+            <a:off x="777240" y="1691640"/>
             <a:ext cx="7589520" cy="274320"/>
           </a:xfrm>
           <a:prstGeom prst="rect">
@@ -19576,41 +19475,6 @@
           <a:p>
             <a:pPr algn="l"/>
             <a:r>
-              <a:rPr sz="1000" b="1">
-                <a:solidFill>
-                  <a:srgbClr val="2383E2"/>
-                </a:solidFill>
-                <a:latin typeface="Noto Sans KR"/>
-              </a:rPr>
-              <a:t>가설: 이미 그늘막이 설치된 위치는 score 가 낮아야 한다 (이미 충분히 커버됨)</a:t>
-            </a:r>
-          </a:p>
-        </p:txBody>
-      </p:sp>
-      <p:sp>
-        <p:nvSpPr>
-          <p:cNvPr id="9" name="TextBox 8"/>
-          <p:cNvSpPr txBox="1"/>
-          <p:nvPr/>
-        </p:nvSpPr>
-        <p:spPr>
-          <a:xfrm>
-            <a:off x="777240" y="1691640"/>
-            <a:ext cx="7589520" cy="274320"/>
-          </a:xfrm>
-          <a:prstGeom prst="rect">
-            <a:avLst/>
-          </a:prstGeom>
-          <a:noFill/>
-        </p:spPr>
-        <p:txBody>
-          <a:bodyPr wrap="square" lIns="0" tIns="0">
-            <a:spAutoFit/>
-          </a:bodyPr>
-          <a:lstStyle/>
-          <a:p>
-            <a:pPr algn="l"/>
-            <a:r>
               <a:rPr sz="900" b="0">
                 <a:solidFill>
                   <a:srgbClr val="37352F"/>
@@ -19624,7 +19488,7 @@
       </p:sp>
       <p:graphicFrame>
         <p:nvGraphicFramePr>
-          <p:cNvPr id="10" name="Table 9"/>
+          <p:cNvPr id="9" name="Table 8"/>
           <p:cNvGraphicFramePr>
             <a:graphicFrameLocks noGrp="1"/>
           </p:cNvGraphicFramePr>
@@ -20296,7 +20160,7 @@
       </p:graphicFrame>
       <p:sp>
         <p:nvSpPr>
-          <p:cNvPr id="11" name="Rounded Rectangle 10"/>
+          <p:cNvPr id="10" name="Rounded Rectangle 9"/>
           <p:cNvSpPr/>
           <p:nvPr/>
         </p:nvSpPr>
@@ -20342,14 +20206,49 @@
       </p:sp>
       <p:sp>
         <p:nvSpPr>
+          <p:cNvPr id="11" name="TextBox 10"/>
+          <p:cNvSpPr txBox="1"/>
+          <p:nvPr/>
+        </p:nvSpPr>
+        <p:spPr>
+          <a:xfrm>
+            <a:off x="777240" y="4498848"/>
+            <a:ext cx="7589520" cy="274320"/>
+          </a:xfrm>
+          <a:prstGeom prst="rect">
+            <a:avLst/>
+          </a:prstGeom>
+          <a:noFill/>
+        </p:spPr>
+        <p:txBody>
+          <a:bodyPr wrap="square" lIns="0" tIns="0">
+            <a:spAutoFit/>
+          </a:bodyPr>
+          <a:lstStyle/>
+          <a:p>
+            <a:pPr algn="l"/>
+            <a:r>
+              <a:rPr sz="900" b="1">
+                <a:solidFill>
+                  <a:srgbClr val="FFEE58"/>
+                </a:solidFill>
+                <a:latin typeface="Noto Sans KR"/>
+              </a:rPr>
+              <a:t>검증: 실측 위치 평균 score   0.087 (수동) → −0.122 (학습)   Δ −0.21 — 학습이 실측 위치를 덜 추천 = 가설 부합</a:t>
+            </a:r>
+          </a:p>
+        </p:txBody>
+      </p:sp>
+      <p:sp>
+        <p:nvSpPr>
           <p:cNvPr id="12" name="TextBox 11"/>
           <p:cNvSpPr txBox="1"/>
           <p:nvPr/>
         </p:nvSpPr>
         <p:spPr>
           <a:xfrm>
-            <a:off x="777240" y="4498848"/>
-            <a:ext cx="7589520" cy="274320"/>
+            <a:off x="621792" y="4855464"/>
+            <a:ext cx="7909560" cy="210312"/>
           </a:xfrm>
           <a:prstGeom prst="rect">
             <a:avLst/>
@@ -20364,13 +20263,13 @@
           <a:p>
             <a:pPr algn="l"/>
             <a:r>
-              <a:rPr sz="900" b="1">
-                <a:solidFill>
-                  <a:srgbClr val="FFEE58"/>
-                </a:solidFill>
-                <a:latin typeface="Noto Sans KR"/>
-              </a:rPr>
-              <a:t>검증: 실측 위치 평균 score   0.087 (수동) → −0.122 (학습)   Δ −0.21 — 학습이 실측 위치를 덜 추천 = 가설 부합</a:t>
+              <a:rPr sz="900" b="0">
+                <a:solidFill>
+                  <a:srgbClr val="9B9A97"/>
+                </a:solidFill>
+                <a:latin typeface="Noto Sans KR"/>
+              </a:rPr>
+              <a:t>동작구 그늘막 입지 분석 · 데이터기반 도시설계</a:t>
             </a:r>
           </a:p>
         </p:txBody>
@@ -20378,41 +20277,6 @@
       <p:sp>
         <p:nvSpPr>
           <p:cNvPr id="13" name="TextBox 12"/>
-          <p:cNvSpPr txBox="1"/>
-          <p:nvPr/>
-        </p:nvSpPr>
-        <p:spPr>
-          <a:xfrm>
-            <a:off x="621792" y="4855464"/>
-            <a:ext cx="7909560" cy="210312"/>
-          </a:xfrm>
-          <a:prstGeom prst="rect">
-            <a:avLst/>
-          </a:prstGeom>
-          <a:noFill/>
-        </p:spPr>
-        <p:txBody>
-          <a:bodyPr wrap="square" lIns="0" tIns="0">
-            <a:spAutoFit/>
-          </a:bodyPr>
-          <a:lstStyle/>
-          <a:p>
-            <a:pPr algn="l"/>
-            <a:r>
-              <a:rPr sz="900" b="0">
-                <a:solidFill>
-                  <a:srgbClr val="9B9A97"/>
-                </a:solidFill>
-                <a:latin typeface="Noto Sans KR"/>
-              </a:rPr>
-              <a:t>동작구 그늘막 입지 분석 · 데이터기반 도시설계</a:t>
-            </a:r>
-          </a:p>
-        </p:txBody>
-      </p:sp>
-      <p:sp>
-        <p:nvSpPr>
-          <p:cNvPr id="14" name="TextBox 13"/>
           <p:cNvSpPr txBox="1"/>
           <p:nvPr/>
         </p:nvSpPr>
@@ -20465,7 +20329,7 @@
       <p:grpSpPr/>
       <p:sp>
         <p:nvSpPr>
-          <p:cNvPr id="3" name="Rectangle 2"/>
+          <p:cNvPr id="2" name="Rectangle 1"/>
           <p:cNvSpPr/>
           <p:nvPr/>
         </p:nvSpPr>
@@ -20508,19 +20372,37 @@
       </p:sp>
       <p:sp>
         <p:nvSpPr>
-          <p:cNvPr id="2" name="Title 1"/>
-          <p:cNvSpPr>
-            <a:spLocks noGrp="1"/>
-          </p:cNvSpPr>
-          <p:nvPr>
-            <p:ph type="title"/>
-          </p:nvPr>
-        </p:nvSpPr>
-        <p:spPr/>
-        <p:txBody>
-          <a:bodyPr/>
-          <a:lstStyle/>
-          <a:p/>
+          <p:cNvPr id="3" name="TextBox 2"/>
+          <p:cNvSpPr txBox="1"/>
+          <p:nvPr/>
+        </p:nvSpPr>
+        <p:spPr>
+          <a:xfrm>
+            <a:off x="621792" y="429768"/>
+            <a:ext cx="7909560" cy="219456"/>
+          </a:xfrm>
+          <a:prstGeom prst="rect">
+            <a:avLst/>
+          </a:prstGeom>
+          <a:noFill/>
+        </p:spPr>
+        <p:txBody>
+          <a:bodyPr wrap="square" lIns="0" tIns="0">
+            <a:spAutoFit/>
+          </a:bodyPr>
+          <a:lstStyle/>
+          <a:p>
+            <a:pPr algn="l"/>
+            <a:r>
+              <a:rPr sz="1000" b="0">
+                <a:solidFill>
+                  <a:srgbClr val="787774"/>
+                </a:solidFill>
+                <a:latin typeface="Noto Sans KR"/>
+              </a:rPr>
+              <a:t>OSMnx · 시나리오 · 강건 입지</a:t>
+            </a:r>
+          </a:p>
         </p:txBody>
       </p:sp>
       <p:sp>
@@ -20531,8 +20413,8 @@
         </p:nvSpPr>
         <p:spPr>
           <a:xfrm>
-            <a:off x="621792" y="429768"/>
-            <a:ext cx="7909560" cy="219456"/>
+            <a:off x="621792" y="658368"/>
+            <a:ext cx="7909560" cy="411480"/>
           </a:xfrm>
           <a:prstGeom prst="rect">
             <a:avLst/>
@@ -20547,41 +20429,6 @@
           <a:p>
             <a:pPr algn="l"/>
             <a:r>
-              <a:rPr sz="1000" b="0">
-                <a:solidFill>
-                  <a:srgbClr val="787774"/>
-                </a:solidFill>
-                <a:latin typeface="Noto Sans KR"/>
-              </a:rPr>
-              <a:t>OSMnx · 시나리오 · 강건 입지</a:t>
-            </a:r>
-          </a:p>
-        </p:txBody>
-      </p:sp>
-      <p:sp>
-        <p:nvSpPr>
-          <p:cNvPr id="5" name="TextBox 4"/>
-          <p:cNvSpPr txBox="1"/>
-          <p:nvPr/>
-        </p:nvSpPr>
-        <p:spPr>
-          <a:xfrm>
-            <a:off x="621792" y="658368"/>
-            <a:ext cx="7909560" cy="411480"/>
-          </a:xfrm>
-          <a:prstGeom prst="rect">
-            <a:avLst/>
-          </a:prstGeom>
-          <a:noFill/>
-        </p:spPr>
-        <p:txBody>
-          <a:bodyPr wrap="square" lIns="0" tIns="0">
-            <a:spAutoFit/>
-          </a:bodyPr>
-          <a:lstStyle/>
-          <a:p>
-            <a:pPr algn="l"/>
-            <a:r>
               <a:rPr sz="2000" b="1">
                 <a:solidFill>
                   <a:srgbClr val="37352F"/>
@@ -20595,7 +20442,7 @@
       </p:sp>
       <p:sp>
         <p:nvSpPr>
-          <p:cNvPr id="6" name="Rectangle 5"/>
+          <p:cNvPr id="5" name="Rectangle 4"/>
           <p:cNvSpPr/>
           <p:nvPr/>
         </p:nvSpPr>
@@ -20638,7 +20485,7 @@
       </p:sp>
       <p:sp>
         <p:nvSpPr>
-          <p:cNvPr id="7" name="Rounded Rectangle 6"/>
+          <p:cNvPr id="6" name="Rounded Rectangle 5"/>
           <p:cNvSpPr/>
           <p:nvPr/>
         </p:nvSpPr>
@@ -20686,14 +20533,49 @@
       </p:sp>
       <p:sp>
         <p:nvSpPr>
+          <p:cNvPr id="7" name="TextBox 6"/>
+          <p:cNvSpPr txBox="1"/>
+          <p:nvPr/>
+        </p:nvSpPr>
+        <p:spPr>
+          <a:xfrm>
+            <a:off x="777240" y="1417320"/>
+            <a:ext cx="3657600" cy="274320"/>
+          </a:xfrm>
+          <a:prstGeom prst="rect">
+            <a:avLst/>
+          </a:prstGeom>
+          <a:noFill/>
+        </p:spPr>
+        <p:txBody>
+          <a:bodyPr wrap="square" lIns="0" tIns="0">
+            <a:spAutoFit/>
+          </a:bodyPr>
+          <a:lstStyle/>
+          <a:p>
+            <a:pPr algn="l"/>
+            <a:r>
+              <a:rPr sz="1100" b="1">
+                <a:solidFill>
+                  <a:srgbClr val="2383E2"/>
+                </a:solidFill>
+                <a:latin typeface="Noto Sans KR"/>
+              </a:rPr>
+              <a:t>OSMnx (보행자 결집 지점)</a:t>
+            </a:r>
+          </a:p>
+        </p:txBody>
+      </p:sp>
+      <p:sp>
+        <p:nvSpPr>
           <p:cNvPr id="8" name="TextBox 7"/>
           <p:cNvSpPr txBox="1"/>
           <p:nvPr/>
         </p:nvSpPr>
         <p:spPr>
           <a:xfrm>
-            <a:off x="777240" y="1417320"/>
-            <a:ext cx="3657600" cy="274320"/>
+            <a:off x="777240" y="1691640"/>
+            <a:ext cx="3657600" cy="1280160"/>
           </a:xfrm>
           <a:prstGeom prst="rect">
             <a:avLst/>
@@ -20706,41 +20588,6 @@
           </a:bodyPr>
           <a:lstStyle/>
           <a:p>
-            <a:pPr algn="l"/>
-            <a:r>
-              <a:rPr sz="1100" b="1">
-                <a:solidFill>
-                  <a:srgbClr val="2383E2"/>
-                </a:solidFill>
-                <a:latin typeface="Noto Sans KR"/>
-              </a:rPr>
-              <a:t>OSMnx (보행자 결집 지점)</a:t>
-            </a:r>
-          </a:p>
-        </p:txBody>
-      </p:sp>
-      <p:sp>
-        <p:nvSpPr>
-          <p:cNvPr id="9" name="TextBox 8"/>
-          <p:cNvSpPr txBox="1"/>
-          <p:nvPr/>
-        </p:nvSpPr>
-        <p:spPr>
-          <a:xfrm>
-            <a:off x="777240" y="1691640"/>
-            <a:ext cx="3657600" cy="1280160"/>
-          </a:xfrm>
-          <a:prstGeom prst="rect">
-            <a:avLst/>
-          </a:prstGeom>
-          <a:noFill/>
-        </p:spPr>
-        <p:txBody>
-          <a:bodyPr wrap="square" lIns="0" tIns="0">
-            <a:spAutoFit/>
-          </a:bodyPr>
-          <a:lstStyle/>
-          <a:p>
             <a:pPr>
               <a:spcAft>
                 <a:spcPts val="400"/>
@@ -20808,7 +20655,7 @@
       </p:sp>
       <p:graphicFrame>
         <p:nvGraphicFramePr>
-          <p:cNvPr id="10" name="Table 9"/>
+          <p:cNvPr id="9" name="Table 8"/>
           <p:cNvGraphicFramePr>
             <a:graphicFrameLocks noGrp="1"/>
           </p:cNvGraphicFramePr>
@@ -21391,7 +21238,7 @@
       </p:graphicFrame>
       <p:sp>
         <p:nvSpPr>
-          <p:cNvPr id="11" name="Rounded Rectangle 10"/>
+          <p:cNvPr id="10" name="Rounded Rectangle 9"/>
           <p:cNvSpPr/>
           <p:nvPr/>
         </p:nvSpPr>
@@ -21439,14 +21286,49 @@
       </p:sp>
       <p:sp>
         <p:nvSpPr>
+          <p:cNvPr id="11" name="TextBox 10"/>
+          <p:cNvSpPr txBox="1"/>
+          <p:nvPr/>
+        </p:nvSpPr>
+        <p:spPr>
+          <a:xfrm>
+            <a:off x="777240" y="3291840"/>
+            <a:ext cx="7589520" cy="274320"/>
+          </a:xfrm>
+          <a:prstGeom prst="rect">
+            <a:avLst/>
+          </a:prstGeom>
+          <a:noFill/>
+        </p:spPr>
+        <p:txBody>
+          <a:bodyPr wrap="square" lIns="0" tIns="0">
+            <a:spAutoFit/>
+          </a:bodyPr>
+          <a:lstStyle/>
+          <a:p>
+            <a:pPr algn="l"/>
+            <a:r>
+              <a:rPr sz="1100" b="1">
+                <a:solidFill>
+                  <a:srgbClr val="E03E3E"/>
+                </a:solidFill>
+                <a:latin typeface="Noto Sans KR"/>
+              </a:rPr>
+              <a:t>⭐ 강건 입지 — 6 시나리오 모두 공통 추천 (정책 관점 불변)</a:t>
+            </a:r>
+          </a:p>
+        </p:txBody>
+      </p:sp>
+      <p:sp>
+        <p:nvSpPr>
           <p:cNvPr id="12" name="TextBox 11"/>
           <p:cNvSpPr txBox="1"/>
           <p:nvPr/>
         </p:nvSpPr>
         <p:spPr>
           <a:xfrm>
-            <a:off x="777240" y="3291840"/>
-            <a:ext cx="7589520" cy="274320"/>
+            <a:off x="777240" y="3611880"/>
+            <a:ext cx="7589520" cy="365760"/>
           </a:xfrm>
           <a:prstGeom prst="rect">
             <a:avLst/>
@@ -21461,13 +21343,13 @@
           <a:p>
             <a:pPr algn="l"/>
             <a:r>
-              <a:rPr sz="1100" b="1">
-                <a:solidFill>
-                  <a:srgbClr val="E03E3E"/>
-                </a:solidFill>
-                <a:latin typeface="Noto Sans KR"/>
-              </a:rPr>
-              <a:t>⭐ 강건 입지 — 6 시나리오 모두 공통 추천 (정책 관점 불변)</a:t>
+              <a:rPr sz="1400" b="1">
+                <a:solidFill>
+                  <a:srgbClr val="37352F"/>
+                </a:solidFill>
+                <a:latin typeface="Noto Sans KR"/>
+              </a:rPr>
+              <a:t>#1  37.4907, 126.9647   동작대로 사당-이수 축</a:t>
             </a:r>
           </a:p>
         </p:txBody>
@@ -21480,7 +21362,7 @@
         </p:nvSpPr>
         <p:spPr>
           <a:xfrm>
-            <a:off x="777240" y="3611880"/>
+            <a:off x="777240" y="3977639"/>
             <a:ext cx="7589520" cy="365760"/>
           </a:xfrm>
           <a:prstGeom prst="rect">
@@ -21502,7 +21384,7 @@
                 </a:solidFill>
                 <a:latin typeface="Noto Sans KR"/>
               </a:rPr>
-              <a:t>#1  37.4907, 126.9647   동작대로 사당-이수 축</a:t>
+              <a:t>#2  37.4898, 126.9670   동작대로 사당역 인근</a:t>
             </a:r>
           </a:p>
         </p:txBody>
@@ -21515,8 +21397,8 @@
         </p:nvSpPr>
         <p:spPr>
           <a:xfrm>
-            <a:off x="777240" y="3977639"/>
-            <a:ext cx="7589520" cy="365760"/>
+            <a:off x="777240" y="4434840"/>
+            <a:ext cx="7589520" cy="274320"/>
           </a:xfrm>
           <a:prstGeom prst="rect">
             <a:avLst/>
@@ -21531,13 +21413,13 @@
           <a:p>
             <a:pPr algn="l"/>
             <a:r>
-              <a:rPr sz="1400" b="1">
-                <a:solidFill>
-                  <a:srgbClr val="37352F"/>
-                </a:solidFill>
-                <a:latin typeface="Noto Sans KR"/>
-              </a:rPr>
-              <a:t>#2  37.4898, 126.9670   동작대로 사당역 인근</a:t>
+              <a:rPr sz="900" b="0">
+                <a:solidFill>
+                  <a:srgbClr val="787774"/>
+                </a:solidFill>
+                <a:latin typeface="Noto Sans KR"/>
+              </a:rPr>
+              <a:t>→ 예산 제약 시 최우선 설치 대상</a:t>
             </a:r>
           </a:p>
         </p:txBody>
@@ -21550,8 +21432,8 @@
         </p:nvSpPr>
         <p:spPr>
           <a:xfrm>
-            <a:off x="777240" y="4434840"/>
-            <a:ext cx="7589520" cy="274320"/>
+            <a:off x="621792" y="4855464"/>
+            <a:ext cx="7909560" cy="210312"/>
           </a:xfrm>
           <a:prstGeom prst="rect">
             <a:avLst/>
@@ -21568,11 +21450,11 @@
             <a:r>
               <a:rPr sz="900" b="0">
                 <a:solidFill>
-                  <a:srgbClr val="787774"/>
-                </a:solidFill>
-                <a:latin typeface="Noto Sans KR"/>
-              </a:rPr>
-              <a:t>→ 예산 제약 시 최우선 설치 대상</a:t>
+                  <a:srgbClr val="9B9A97"/>
+                </a:solidFill>
+                <a:latin typeface="Noto Sans KR"/>
+              </a:rPr>
+              <a:t>동작구 그늘막 입지 분석 · 데이터기반 도시설계</a:t>
             </a:r>
           </a:p>
         </p:txBody>
@@ -21580,41 +21462,6 @@
       <p:sp>
         <p:nvSpPr>
           <p:cNvPr id="16" name="TextBox 15"/>
-          <p:cNvSpPr txBox="1"/>
-          <p:nvPr/>
-        </p:nvSpPr>
-        <p:spPr>
-          <a:xfrm>
-            <a:off x="621792" y="4855464"/>
-            <a:ext cx="7909560" cy="210312"/>
-          </a:xfrm>
-          <a:prstGeom prst="rect">
-            <a:avLst/>
-          </a:prstGeom>
-          <a:noFill/>
-        </p:spPr>
-        <p:txBody>
-          <a:bodyPr wrap="square" lIns="0" tIns="0">
-            <a:spAutoFit/>
-          </a:bodyPr>
-          <a:lstStyle/>
-          <a:p>
-            <a:pPr algn="l"/>
-            <a:r>
-              <a:rPr sz="900" b="0">
-                <a:solidFill>
-                  <a:srgbClr val="9B9A97"/>
-                </a:solidFill>
-                <a:latin typeface="Noto Sans KR"/>
-              </a:rPr>
-              <a:t>동작구 그늘막 입지 분석 · 데이터기반 도시설계</a:t>
-            </a:r>
-          </a:p>
-        </p:txBody>
-      </p:sp>
-      <p:sp>
-        <p:nvSpPr>
-          <p:cNvPr id="17" name="TextBox 16"/>
           <p:cNvSpPr txBox="1"/>
           <p:nvPr/>
         </p:nvSpPr>
@@ -21667,7 +21514,7 @@
       <p:grpSpPr/>
       <p:sp>
         <p:nvSpPr>
-          <p:cNvPr id="3" name="Rectangle 2"/>
+          <p:cNvPr id="2" name="Rectangle 1"/>
           <p:cNvSpPr/>
           <p:nvPr/>
         </p:nvSpPr>
@@ -21710,19 +21557,37 @@
       </p:sp>
       <p:sp>
         <p:nvSpPr>
-          <p:cNvPr id="2" name="Title 1"/>
-          <p:cNvSpPr>
-            <a:spLocks noGrp="1"/>
-          </p:cNvSpPr>
-          <p:nvPr>
-            <p:ph type="title"/>
-          </p:nvPr>
-        </p:nvSpPr>
-        <p:spPr/>
-        <p:txBody>
-          <a:bodyPr/>
-          <a:lstStyle/>
-          <a:p/>
+          <p:cNvPr id="3" name="TextBox 2"/>
+          <p:cNvSpPr txBox="1"/>
+          <p:nvPr/>
+        </p:nvSpPr>
+        <p:spPr>
+          <a:xfrm>
+            <a:off x="621792" y="429768"/>
+            <a:ext cx="7909560" cy="219456"/>
+          </a:xfrm>
+          <a:prstGeom prst="rect">
+            <a:avLst/>
+          </a:prstGeom>
+          <a:noFill/>
+        </p:spPr>
+        <p:txBody>
+          <a:bodyPr wrap="square" lIns="0" tIns="0">
+            <a:spAutoFit/>
+          </a:bodyPr>
+          <a:lstStyle/>
+          <a:p>
+            <a:pPr algn="l"/>
+            <a:r>
+              <a:rPr sz="1000" b="0">
+                <a:solidFill>
+                  <a:srgbClr val="787774"/>
+                </a:solidFill>
+                <a:latin typeface="Noto Sans KR"/>
+              </a:rPr>
+              <a:t>사각지대 + 예산 최적화</a:t>
+            </a:r>
+          </a:p>
         </p:txBody>
       </p:sp>
       <p:sp>
@@ -21733,8 +21598,8 @@
         </p:nvSpPr>
         <p:spPr>
           <a:xfrm>
-            <a:off x="621792" y="429768"/>
-            <a:ext cx="7909560" cy="219456"/>
+            <a:off x="621792" y="658368"/>
+            <a:ext cx="7909560" cy="411480"/>
           </a:xfrm>
           <a:prstGeom prst="rect">
             <a:avLst/>
@@ -21749,41 +21614,6 @@
           <a:p>
             <a:pPr algn="l"/>
             <a:r>
-              <a:rPr sz="1000" b="0">
-                <a:solidFill>
-                  <a:srgbClr val="787774"/>
-                </a:solidFill>
-                <a:latin typeface="Noto Sans KR"/>
-              </a:rPr>
-              <a:t>사각지대 + 예산 최적화</a:t>
-            </a:r>
-          </a:p>
-        </p:txBody>
-      </p:sp>
-      <p:sp>
-        <p:nvSpPr>
-          <p:cNvPr id="5" name="TextBox 4"/>
-          <p:cNvSpPr txBox="1"/>
-          <p:nvPr/>
-        </p:nvSpPr>
-        <p:spPr>
-          <a:xfrm>
-            <a:off x="621792" y="658368"/>
-            <a:ext cx="7909560" cy="411480"/>
-          </a:xfrm>
-          <a:prstGeom prst="rect">
-            <a:avLst/>
-          </a:prstGeom>
-          <a:noFill/>
-        </p:spPr>
-        <p:txBody>
-          <a:bodyPr wrap="square" lIns="0" tIns="0">
-            <a:spAutoFit/>
-          </a:bodyPr>
-          <a:lstStyle/>
-          <a:p>
-            <a:pPr algn="l"/>
-            <a:r>
               <a:rPr sz="2000" b="1">
                 <a:solidFill>
                   <a:srgbClr val="37352F"/>
@@ -21797,7 +21627,7 @@
       </p:sp>
       <p:sp>
         <p:nvSpPr>
-          <p:cNvPr id="6" name="Rectangle 5"/>
+          <p:cNvPr id="5" name="Rectangle 4"/>
           <p:cNvSpPr/>
           <p:nvPr/>
         </p:nvSpPr>
@@ -21840,7 +21670,7 @@
       </p:sp>
       <p:sp>
         <p:nvSpPr>
-          <p:cNvPr id="7" name="Rounded Rectangle 6"/>
+          <p:cNvPr id="6" name="Rounded Rectangle 5"/>
           <p:cNvSpPr/>
           <p:nvPr/>
         </p:nvSpPr>
@@ -21888,14 +21718,49 @@
       </p:sp>
       <p:sp>
         <p:nvSpPr>
+          <p:cNvPr id="7" name="TextBox 6"/>
+          <p:cNvSpPr txBox="1"/>
+          <p:nvPr/>
+        </p:nvSpPr>
+        <p:spPr>
+          <a:xfrm>
+            <a:off x="777240" y="1417320"/>
+            <a:ext cx="3657600" cy="274320"/>
+          </a:xfrm>
+          <a:prstGeom prst="rect">
+            <a:avLst/>
+          </a:prstGeom>
+          <a:noFill/>
+        </p:spPr>
+        <p:txBody>
+          <a:bodyPr wrap="square" lIns="0" tIns="0">
+            <a:spAutoFit/>
+          </a:bodyPr>
+          <a:lstStyle/>
+          <a:p>
+            <a:pPr algn="l"/>
+            <a:r>
+              <a:rPr sz="1100" b="1">
+                <a:solidFill>
+                  <a:srgbClr val="CB7B26"/>
+                </a:solidFill>
+                <a:latin typeface="Noto Sans KR"/>
+              </a:rPr>
+              <a:t>흑석동 사각지대 TOP 4</a:t>
+            </a:r>
+          </a:p>
+        </p:txBody>
+      </p:sp>
+      <p:sp>
+        <p:nvSpPr>
           <p:cNvPr id="8" name="TextBox 7"/>
           <p:cNvSpPr txBox="1"/>
           <p:nvPr/>
         </p:nvSpPr>
         <p:spPr>
           <a:xfrm>
-            <a:off x="777240" y="1417320"/>
-            <a:ext cx="3657600" cy="274320"/>
+            <a:off x="777240" y="1691640"/>
+            <a:ext cx="3657600" cy="2103120"/>
           </a:xfrm>
           <a:prstGeom prst="rect">
             <a:avLst/>
@@ -21908,41 +21773,6 @@
           </a:bodyPr>
           <a:lstStyle/>
           <a:p>
-            <a:pPr algn="l"/>
-            <a:r>
-              <a:rPr sz="1100" b="1">
-                <a:solidFill>
-                  <a:srgbClr val="CB7B26"/>
-                </a:solidFill>
-                <a:latin typeface="Noto Sans KR"/>
-              </a:rPr>
-              <a:t>흑석동 사각지대 TOP 4</a:t>
-            </a:r>
-          </a:p>
-        </p:txBody>
-      </p:sp>
-      <p:sp>
-        <p:nvSpPr>
-          <p:cNvPr id="9" name="TextBox 8"/>
-          <p:cNvSpPr txBox="1"/>
-          <p:nvPr/>
-        </p:nvSpPr>
-        <p:spPr>
-          <a:xfrm>
-            <a:off x="777240" y="1691640"/>
-            <a:ext cx="3657600" cy="2103120"/>
-          </a:xfrm>
-          <a:prstGeom prst="rect">
-            <a:avLst/>
-          </a:prstGeom>
-          <a:noFill/>
-        </p:spPr>
-        <p:txBody>
-          <a:bodyPr wrap="square" lIns="0" tIns="0">
-            <a:spAutoFit/>
-          </a:bodyPr>
-          <a:lstStyle/>
-          <a:p>
             <a:pPr>
               <a:spcAft>
                 <a:spcPts val="400"/>
@@ -22026,7 +21856,7 @@
       </p:sp>
       <p:sp>
         <p:nvSpPr>
-          <p:cNvPr id="10" name="Rounded Rectangle 9"/>
+          <p:cNvPr id="9" name="Rounded Rectangle 8"/>
           <p:cNvSpPr/>
           <p:nvPr/>
         </p:nvSpPr>
@@ -22074,13 +21904,48 @@
       </p:sp>
       <p:sp>
         <p:nvSpPr>
+          <p:cNvPr id="10" name="TextBox 9"/>
+          <p:cNvSpPr txBox="1"/>
+          <p:nvPr/>
+        </p:nvSpPr>
+        <p:spPr>
+          <a:xfrm>
+            <a:off x="5349240" y="1417320"/>
+            <a:ext cx="3108960" cy="274320"/>
+          </a:xfrm>
+          <a:prstGeom prst="rect">
+            <a:avLst/>
+          </a:prstGeom>
+          <a:noFill/>
+        </p:spPr>
+        <p:txBody>
+          <a:bodyPr wrap="square" lIns="0" tIns="0">
+            <a:spAutoFit/>
+          </a:bodyPr>
+          <a:lstStyle/>
+          <a:p>
+            <a:pPr algn="l"/>
+            <a:r>
+              <a:rPr sz="1100" b="1">
+                <a:solidFill>
+                  <a:srgbClr val="2383E2"/>
+                </a:solidFill>
+                <a:latin typeface="Noto Sans KR"/>
+              </a:rPr>
+              <a:t>예산 4천만원 최적 배치</a:t>
+            </a:r>
+          </a:p>
+        </p:txBody>
+      </p:sp>
+      <p:sp>
+        <p:nvSpPr>
           <p:cNvPr id="11" name="TextBox 10"/>
           <p:cNvSpPr txBox="1"/>
           <p:nvPr/>
         </p:nvSpPr>
         <p:spPr>
           <a:xfrm>
-            <a:off x="5349240" y="1417320"/>
+            <a:off x="5349240" y="1691640"/>
             <a:ext cx="3108960" cy="274320"/>
           </a:xfrm>
           <a:prstGeom prst="rect">
@@ -22096,13 +21961,13 @@
           <a:p>
             <a:pPr algn="l"/>
             <a:r>
-              <a:rPr sz="1100" b="1">
-                <a:solidFill>
-                  <a:srgbClr val="2383E2"/>
-                </a:solidFill>
-                <a:latin typeface="Noto Sans KR"/>
-              </a:rPr>
-              <a:t>예산 4천만원 최적 배치</a:t>
+              <a:rPr sz="800" b="0">
+                <a:solidFill>
+                  <a:srgbClr val="787774"/>
+                </a:solidFill>
+                <a:latin typeface="Noto Sans KR"/>
+              </a:rPr>
+              <a:t>PuLP 정수 선형계획법 (CBC, Optimal)</a:t>
             </a:r>
           </a:p>
         </p:txBody>
@@ -22115,8 +21980,8 @@
         </p:nvSpPr>
         <p:spPr>
           <a:xfrm>
-            <a:off x="5349240" y="1691640"/>
-            <a:ext cx="3108960" cy="274320"/>
+            <a:off x="5349240" y="1965960"/>
+            <a:ext cx="3108960" cy="1828800"/>
           </a:xfrm>
           <a:prstGeom prst="rect">
             <a:avLst/>
@@ -22129,40 +21994,21 @@
           </a:bodyPr>
           <a:lstStyle/>
           <a:p>
-            <a:pPr algn="l"/>
+            <a:pPr>
+              <a:spcAft>
+                <a:spcPts val="400"/>
+              </a:spcAft>
+            </a:pPr>
             <a:r>
               <a:rPr sz="800" b="0">
                 <a:solidFill>
-                  <a:srgbClr val="787774"/>
-                </a:solidFill>
-                <a:latin typeface="Noto Sans KR"/>
-              </a:rPr>
-              <a:t>PuLP 정수 선형계획법 (CBC, Optimal)</a:t>
-            </a:r>
-          </a:p>
-        </p:txBody>
-      </p:sp>
-      <p:sp>
-        <p:nvSpPr>
-          <p:cNvPr id="13" name="TextBox 12"/>
-          <p:cNvSpPr txBox="1"/>
-          <p:nvPr/>
-        </p:nvSpPr>
-        <p:spPr>
-          <a:xfrm>
-            <a:off x="5349240" y="1965960"/>
-            <a:ext cx="3108960" cy="1828800"/>
-          </a:xfrm>
-          <a:prstGeom prst="rect">
-            <a:avLst/>
-          </a:prstGeom>
-          <a:noFill/>
-        </p:spPr>
-        <p:txBody>
-          <a:bodyPr wrap="square" lIns="0" tIns="0">
-            <a:spAutoFit/>
-          </a:bodyPr>
-          <a:lstStyle/>
+                  <a:srgbClr val="37352F"/>
+                </a:solidFill>
+                <a:latin typeface="Noto Sans KR"/>
+              </a:rPr>
+              <a:t>•  단가 800만원/개 → 최대 5개</a:t>
+            </a:r>
+          </a:p>
           <a:p>
             <a:pPr>
               <a:spcAft>
@@ -22176,7 +22022,7 @@
                 </a:solidFill>
                 <a:latin typeface="Noto Sans KR"/>
               </a:rPr>
-              <a:t>•  단가 800만원/개 → 최대 5개</a:t>
+              <a:t>•  공간 분산 ≥ 200m (29쌍 제약)</a:t>
             </a:r>
           </a:p>
           <a:p>
@@ -22192,7 +22038,7 @@
                 </a:solidFill>
                 <a:latin typeface="Noto Sans KR"/>
               </a:rPr>
-              <a:t>•  공간 분산 ≥ 200m (29쌍 제약)</a:t>
+              <a:t>•  선정 5: 이수역·이수북·사당동·사당남·노량진</a:t>
             </a:r>
           </a:p>
           <a:p>
@@ -22208,22 +22054,6 @@
                 </a:solidFill>
                 <a:latin typeface="Noto Sans KR"/>
               </a:rPr>
-              <a:t>•  선정 5: 이수역·이수북·사당동·사당남·노량진</a:t>
-            </a:r>
-          </a:p>
-          <a:p>
-            <a:pPr>
-              <a:spcAft>
-                <a:spcPts val="400"/>
-              </a:spcAft>
-            </a:pPr>
-            <a:r>
-              <a:rPr sz="800" b="0">
-                <a:solidFill>
-                  <a:srgbClr val="37352F"/>
-                </a:solidFill>
-                <a:latin typeface="Noto Sans KR"/>
-              </a:rPr>
               <a:t>•  총 score 1.852, 예산 100% 사용</a:t>
             </a:r>
           </a:p>
@@ -22231,7 +22061,7 @@
       </p:sp>
       <p:sp>
         <p:nvSpPr>
-          <p:cNvPr id="14" name="Rounded Rectangle 13"/>
+          <p:cNvPr id="13" name="Rounded Rectangle 12"/>
           <p:cNvSpPr/>
           <p:nvPr/>
         </p:nvSpPr>
@@ -22277,13 +22107,48 @@
       </p:sp>
       <p:sp>
         <p:nvSpPr>
+          <p:cNvPr id="14" name="TextBox 13"/>
+          <p:cNvSpPr txBox="1"/>
+          <p:nvPr/>
+        </p:nvSpPr>
+        <p:spPr>
+          <a:xfrm>
+            <a:off x="777240" y="4023360"/>
+            <a:ext cx="7589520" cy="274320"/>
+          </a:xfrm>
+          <a:prstGeom prst="rect">
+            <a:avLst/>
+          </a:prstGeom>
+          <a:noFill/>
+        </p:spPr>
+        <p:txBody>
+          <a:bodyPr wrap="square" lIns="0" tIns="0">
+            <a:spAutoFit/>
+          </a:bodyPr>
+          <a:lstStyle/>
+          <a:p>
+            <a:pPr algn="l"/>
+            <a:r>
+              <a:rPr sz="1000" b="1">
+                <a:solidFill>
+                  <a:srgbClr val="FFEE58"/>
+                </a:solidFill>
+                <a:latin typeface="Noto Sans KR"/>
+              </a:rPr>
+              <a:t>TOP10 단순 정렬 vs 배낭 최적화 — 200m 분산 제약으로 같은 곳 몰림 방지</a:t>
+            </a:r>
+          </a:p>
+        </p:txBody>
+      </p:sp>
+      <p:sp>
+        <p:nvSpPr>
           <p:cNvPr id="15" name="TextBox 14"/>
           <p:cNvSpPr txBox="1"/>
           <p:nvPr/>
         </p:nvSpPr>
         <p:spPr>
           <a:xfrm>
-            <a:off x="777240" y="4023360"/>
+            <a:off x="777240" y="4297680"/>
             <a:ext cx="7589520" cy="274320"/>
           </a:xfrm>
           <a:prstGeom prst="rect">
@@ -22299,13 +22164,13 @@
           <a:p>
             <a:pPr algn="l"/>
             <a:r>
-              <a:rPr sz="1000" b="1">
-                <a:solidFill>
-                  <a:srgbClr val="FFEE58"/>
-                </a:solidFill>
-                <a:latin typeface="Noto Sans KR"/>
-              </a:rPr>
-              <a:t>TOP10 단순 정렬 vs 배낭 최적화 — 200m 분산 제약으로 같은 곳 몰림 방지</a:t>
+              <a:rPr sz="900" b="0">
+                <a:solidFill>
+                  <a:srgbClr val="FFFFFF"/>
+                </a:solidFill>
+                <a:latin typeface="Noto Sans KR"/>
+              </a:rPr>
+              <a:t>→ 노량진역이 자동 포함되며 정책 효용 ↑</a:t>
             </a:r>
           </a:p>
         </p:txBody>
@@ -22318,8 +22183,8 @@
         </p:nvSpPr>
         <p:spPr>
           <a:xfrm>
-            <a:off x="777240" y="4297680"/>
-            <a:ext cx="7589520" cy="274320"/>
+            <a:off x="621792" y="4855464"/>
+            <a:ext cx="7909560" cy="210312"/>
           </a:xfrm>
           <a:prstGeom prst="rect">
             <a:avLst/>
@@ -22336,11 +22201,11 @@
             <a:r>
               <a:rPr sz="900" b="0">
                 <a:solidFill>
-                  <a:srgbClr val="FFFFFF"/>
-                </a:solidFill>
-                <a:latin typeface="Noto Sans KR"/>
-              </a:rPr>
-              <a:t>→ 노량진역이 자동 포함되며 정책 효용 ↑</a:t>
+                  <a:srgbClr val="9B9A97"/>
+                </a:solidFill>
+                <a:latin typeface="Noto Sans KR"/>
+              </a:rPr>
+              <a:t>동작구 그늘막 입지 분석 · 데이터기반 도시설계</a:t>
             </a:r>
           </a:p>
         </p:txBody>
@@ -22348,41 +22213,6 @@
       <p:sp>
         <p:nvSpPr>
           <p:cNvPr id="17" name="TextBox 16"/>
-          <p:cNvSpPr txBox="1"/>
-          <p:nvPr/>
-        </p:nvSpPr>
-        <p:spPr>
-          <a:xfrm>
-            <a:off x="621792" y="4855464"/>
-            <a:ext cx="7909560" cy="210312"/>
-          </a:xfrm>
-          <a:prstGeom prst="rect">
-            <a:avLst/>
-          </a:prstGeom>
-          <a:noFill/>
-        </p:spPr>
-        <p:txBody>
-          <a:bodyPr wrap="square" lIns="0" tIns="0">
-            <a:spAutoFit/>
-          </a:bodyPr>
-          <a:lstStyle/>
-          <a:p>
-            <a:pPr algn="l"/>
-            <a:r>
-              <a:rPr sz="900" b="0">
-                <a:solidFill>
-                  <a:srgbClr val="9B9A97"/>
-                </a:solidFill>
-                <a:latin typeface="Noto Sans KR"/>
-              </a:rPr>
-              <a:t>동작구 그늘막 입지 분석 · 데이터기반 도시설계</a:t>
-            </a:r>
-          </a:p>
-        </p:txBody>
-      </p:sp>
-      <p:sp>
-        <p:nvSpPr>
-          <p:cNvPr id="18" name="TextBox 17"/>
           <p:cNvSpPr txBox="1"/>
           <p:nvPr/>
         </p:nvSpPr>
@@ -22435,7 +22265,7 @@
       <p:grpSpPr/>
       <p:sp>
         <p:nvSpPr>
-          <p:cNvPr id="3" name="Rectangle 2"/>
+          <p:cNvPr id="2" name="Rectangle 1"/>
           <p:cNvSpPr/>
           <p:nvPr/>
         </p:nvSpPr>
@@ -22478,19 +22308,37 @@
       </p:sp>
       <p:sp>
         <p:nvSpPr>
-          <p:cNvPr id="2" name="Title 1"/>
-          <p:cNvSpPr>
-            <a:spLocks noGrp="1"/>
-          </p:cNvSpPr>
-          <p:nvPr>
-            <p:ph type="title"/>
-          </p:nvPr>
-        </p:nvSpPr>
-        <p:spPr/>
-        <p:txBody>
-          <a:bodyPr/>
-          <a:lstStyle/>
-          <a:p/>
+          <p:cNvPr id="3" name="TextBox 2"/>
+          <p:cNvSpPr txBox="1"/>
+          <p:nvPr/>
+        </p:nvSpPr>
+        <p:spPr>
+          <a:xfrm>
+            <a:off x="621792" y="429768"/>
+            <a:ext cx="7909560" cy="219456"/>
+          </a:xfrm>
+          <a:prstGeom prst="rect">
+            <a:avLst/>
+          </a:prstGeom>
+          <a:noFill/>
+        </p:spPr>
+        <p:txBody>
+          <a:bodyPr wrap="square" lIns="0" tIns="0">
+            <a:spAutoFit/>
+          </a:bodyPr>
+          <a:lstStyle/>
+          <a:p>
+            <a:pPr algn="l"/>
+            <a:r>
+              <a:rPr sz="1000" b="0">
+                <a:solidFill>
+                  <a:srgbClr val="787774"/>
+                </a:solidFill>
+                <a:latin typeface="Noto Sans KR"/>
+              </a:rPr>
+              <a:t>결론 · 다음 단계</a:t>
+            </a:r>
+          </a:p>
         </p:txBody>
       </p:sp>
       <p:sp>
@@ -22501,8 +22349,8 @@
         </p:nvSpPr>
         <p:spPr>
           <a:xfrm>
-            <a:off x="621792" y="429768"/>
-            <a:ext cx="7909560" cy="219456"/>
+            <a:off x="621792" y="658368"/>
+            <a:ext cx="7909560" cy="411480"/>
           </a:xfrm>
           <a:prstGeom prst="rect">
             <a:avLst/>
@@ -22517,41 +22365,6 @@
           <a:p>
             <a:pPr algn="l"/>
             <a:r>
-              <a:rPr sz="1000" b="0">
-                <a:solidFill>
-                  <a:srgbClr val="787774"/>
-                </a:solidFill>
-                <a:latin typeface="Noto Sans KR"/>
-              </a:rPr>
-              <a:t>결론 · 다음 단계</a:t>
-            </a:r>
-          </a:p>
-        </p:txBody>
-      </p:sp>
-      <p:sp>
-        <p:nvSpPr>
-          <p:cNvPr id="5" name="TextBox 4"/>
-          <p:cNvSpPr txBox="1"/>
-          <p:nvPr/>
-        </p:nvSpPr>
-        <p:spPr>
-          <a:xfrm>
-            <a:off x="621792" y="658368"/>
-            <a:ext cx="7909560" cy="411480"/>
-          </a:xfrm>
-          <a:prstGeom prst="rect">
-            <a:avLst/>
-          </a:prstGeom>
-          <a:noFill/>
-        </p:spPr>
-        <p:txBody>
-          <a:bodyPr wrap="square" lIns="0" tIns="0">
-            <a:spAutoFit/>
-          </a:bodyPr>
-          <a:lstStyle/>
-          <a:p>
-            <a:pPr algn="l"/>
-            <a:r>
               <a:rPr sz="2000" b="1">
                 <a:solidFill>
                   <a:srgbClr val="37352F"/>
@@ -22565,7 +22378,7 @@
       </p:sp>
       <p:sp>
         <p:nvSpPr>
-          <p:cNvPr id="6" name="Rectangle 5"/>
+          <p:cNvPr id="5" name="Rectangle 4"/>
           <p:cNvSpPr/>
           <p:nvPr/>
         </p:nvSpPr>
@@ -22608,14 +22421,49 @@
       </p:sp>
       <p:sp>
         <p:nvSpPr>
+          <p:cNvPr id="6" name="TextBox 5"/>
+          <p:cNvSpPr txBox="1"/>
+          <p:nvPr/>
+        </p:nvSpPr>
+        <p:spPr>
+          <a:xfrm>
+            <a:off x="621792" y="1325880"/>
+            <a:ext cx="3931920" cy="274320"/>
+          </a:xfrm>
+          <a:prstGeom prst="rect">
+            <a:avLst/>
+          </a:prstGeom>
+          <a:noFill/>
+        </p:spPr>
+        <p:txBody>
+          <a:bodyPr wrap="square" lIns="0" tIns="0">
+            <a:spAutoFit/>
+          </a:bodyPr>
+          <a:lstStyle/>
+          <a:p>
+            <a:pPr algn="l"/>
+            <a:r>
+              <a:rPr sz="1100" b="1">
+                <a:solidFill>
+                  <a:srgbClr val="E03E3E"/>
+                </a:solidFill>
+                <a:latin typeface="Noto Sans KR"/>
+              </a:rPr>
+              <a:t>현재 한계</a:t>
+            </a:r>
+          </a:p>
+        </p:txBody>
+      </p:sp>
+      <p:sp>
+        <p:nvSpPr>
           <p:cNvPr id="7" name="TextBox 6"/>
           <p:cNvSpPr txBox="1"/>
           <p:nvPr/>
         </p:nvSpPr>
         <p:spPr>
           <a:xfrm>
-            <a:off x="621792" y="1325880"/>
-            <a:ext cx="3931920" cy="274320"/>
+            <a:off x="621792" y="1600200"/>
+            <a:ext cx="3931920" cy="1645920"/>
           </a:xfrm>
           <a:prstGeom prst="rect">
             <a:avLst/>
@@ -22628,15 +22476,67 @@
           </a:bodyPr>
           <a:lstStyle/>
           <a:p>
-            <a:pPr algn="l"/>
-            <a:r>
-              <a:rPr sz="1100" b="1">
-                <a:solidFill>
-                  <a:srgbClr val="E03E3E"/>
-                </a:solidFill>
-                <a:latin typeface="Noto Sans KR"/>
-              </a:rPr>
-              <a:t>현재 한계</a:t>
+            <a:pPr>
+              <a:spcAft>
+                <a:spcPts val="400"/>
+              </a:spcAft>
+            </a:pPr>
+            <a:r>
+              <a:rPr sz="900" b="0">
+                <a:solidFill>
+                  <a:srgbClr val="37352F"/>
+                </a:solidFill>
+                <a:latin typeface="Noto Sans KR"/>
+              </a:rPr>
+              <a:t>•  5종 기본 데이터 중 4종 더미</a:t>
+            </a:r>
+          </a:p>
+          <a:p>
+            <a:pPr>
+              <a:spcAft>
+                <a:spcPts val="400"/>
+              </a:spcAft>
+            </a:pPr>
+            <a:r>
+              <a:rPr sz="900" b="0">
+                <a:solidFill>
+                  <a:srgbClr val="37352F"/>
+                </a:solidFill>
+                <a:latin typeface="Noto Sans KR"/>
+              </a:rPr>
+              <a:t>•  LST 래스터 직접 파싱 미연결</a:t>
+            </a:r>
+          </a:p>
+          <a:p>
+            <a:pPr>
+              <a:spcAft>
+                <a:spcPts val="400"/>
+              </a:spcAft>
+            </a:pPr>
+            <a:r>
+              <a:rPr sz="900" b="0">
+                <a:solidFill>
+                  <a:srgbClr val="37352F"/>
+                </a:solidFill>
+                <a:latin typeface="Noto Sans KR"/>
+              </a:rPr>
+              <a:t>•  SAM 추출 건물 추정 높이 (NGII는 실측)</a:t>
+            </a:r>
+          </a:p>
+          <a:p>
+            <a:pPr>
+              <a:spcAft>
+                <a:spcPts val="400"/>
+              </a:spcAft>
+            </a:pPr>
+            <a:r>
+              <a:rPr sz="900" b="0">
+                <a:solidFill>
+                  <a:srgbClr val="37352F"/>
+                </a:solidFill>
+                <a:latin typeface="Noto Sans KR"/>
+              </a:rPr>
+              <a:t>•  예산 단가 800만원/개 가정 (실 단가 확보 시 교체)</a:t>
             </a:r>
           </a:p>
         </p:txBody>
@@ -22649,8 +22549,8 @@
         </p:nvSpPr>
         <p:spPr>
           <a:xfrm>
-            <a:off x="621792" y="1600200"/>
-            <a:ext cx="3931920" cy="1645920"/>
+            <a:off x="4617720" y="1325880"/>
+            <a:ext cx="3931920" cy="274320"/>
           </a:xfrm>
           <a:prstGeom prst="rect">
             <a:avLst/>
@@ -22663,67 +22563,15 @@
           </a:bodyPr>
           <a:lstStyle/>
           <a:p>
-            <a:pPr>
-              <a:spcAft>
-                <a:spcPts val="400"/>
-              </a:spcAft>
-            </a:pPr>
-            <a:r>
-              <a:rPr sz="900" b="0">
-                <a:solidFill>
-                  <a:srgbClr val="37352F"/>
-                </a:solidFill>
-                <a:latin typeface="Noto Sans KR"/>
-              </a:rPr>
-              <a:t>•  5종 기본 데이터 중 4종 더미</a:t>
-            </a:r>
-          </a:p>
-          <a:p>
-            <a:pPr>
-              <a:spcAft>
-                <a:spcPts val="400"/>
-              </a:spcAft>
-            </a:pPr>
-            <a:r>
-              <a:rPr sz="900" b="0">
-                <a:solidFill>
-                  <a:srgbClr val="37352F"/>
-                </a:solidFill>
-                <a:latin typeface="Noto Sans KR"/>
-              </a:rPr>
-              <a:t>•  LST 래스터 직접 파싱 미연결</a:t>
-            </a:r>
-          </a:p>
-          <a:p>
-            <a:pPr>
-              <a:spcAft>
-                <a:spcPts val="400"/>
-              </a:spcAft>
-            </a:pPr>
-            <a:r>
-              <a:rPr sz="900" b="0">
-                <a:solidFill>
-                  <a:srgbClr val="37352F"/>
-                </a:solidFill>
-                <a:latin typeface="Noto Sans KR"/>
-              </a:rPr>
-              <a:t>•  SAM 추출 건물 추정 높이 (NGII는 실측)</a:t>
-            </a:r>
-          </a:p>
-          <a:p>
-            <a:pPr>
-              <a:spcAft>
-                <a:spcPts val="400"/>
-              </a:spcAft>
-            </a:pPr>
-            <a:r>
-              <a:rPr sz="900" b="0">
-                <a:solidFill>
-                  <a:srgbClr val="37352F"/>
-                </a:solidFill>
-                <a:latin typeface="Noto Sans KR"/>
-              </a:rPr>
-              <a:t>•  예산 단가 800만원/개 가정 (실 단가 확보 시 교체)</a:t>
+            <a:pPr algn="l"/>
+            <a:r>
+              <a:rPr sz="1100" b="1">
+                <a:solidFill>
+                  <a:srgbClr val="2383E2"/>
+                </a:solidFill>
+                <a:latin typeface="Noto Sans KR"/>
+              </a:rPr>
+              <a:t>다음 단계</a:t>
             </a:r>
           </a:p>
         </p:txBody>
@@ -22736,8 +22584,8 @@
         </p:nvSpPr>
         <p:spPr>
           <a:xfrm>
-            <a:off x="4617720" y="1325880"/>
-            <a:ext cx="3931920" cy="274320"/>
+            <a:off x="4617720" y="1600200"/>
+            <a:ext cx="3931920" cy="1645920"/>
           </a:xfrm>
           <a:prstGeom prst="rect">
             <a:avLst/>
@@ -22750,41 +22598,6 @@
           </a:bodyPr>
           <a:lstStyle/>
           <a:p>
-            <a:pPr algn="l"/>
-            <a:r>
-              <a:rPr sz="1100" b="1">
-                <a:solidFill>
-                  <a:srgbClr val="2383E2"/>
-                </a:solidFill>
-                <a:latin typeface="Noto Sans KR"/>
-              </a:rPr>
-              <a:t>다음 단계</a:t>
-            </a:r>
-          </a:p>
-        </p:txBody>
-      </p:sp>
-      <p:sp>
-        <p:nvSpPr>
-          <p:cNvPr id="10" name="TextBox 9"/>
-          <p:cNvSpPr txBox="1"/>
-          <p:nvPr/>
-        </p:nvSpPr>
-        <p:spPr>
-          <a:xfrm>
-            <a:off x="4617720" y="1600200"/>
-            <a:ext cx="3931920" cy="1645920"/>
-          </a:xfrm>
-          <a:prstGeom prst="rect">
-            <a:avLst/>
-          </a:prstGeom>
-          <a:noFill/>
-        </p:spPr>
-        <p:txBody>
-          <a:bodyPr wrap="square" lIns="0" tIns="0">
-            <a:spAutoFit/>
-          </a:bodyPr>
-          <a:lstStyle/>
-          <a:p>
             <a:pPr>
               <a:spcAft>
                 <a:spcPts val="400"/>
@@ -22852,7 +22665,7 @@
       </p:sp>
       <p:sp>
         <p:nvSpPr>
-          <p:cNvPr id="11" name="Rounded Rectangle 10"/>
+          <p:cNvPr id="10" name="Rounded Rectangle 9"/>
           <p:cNvSpPr/>
           <p:nvPr/>
         </p:nvSpPr>
@@ -22898,13 +22711,48 @@
       </p:sp>
       <p:sp>
         <p:nvSpPr>
+          <p:cNvPr id="11" name="TextBox 10"/>
+          <p:cNvSpPr txBox="1"/>
+          <p:nvPr/>
+        </p:nvSpPr>
+        <p:spPr>
+          <a:xfrm>
+            <a:off x="777240" y="3611880"/>
+            <a:ext cx="7589520" cy="365760"/>
+          </a:xfrm>
+          <a:prstGeom prst="rect">
+            <a:avLst/>
+          </a:prstGeom>
+          <a:noFill/>
+        </p:spPr>
+        <p:txBody>
+          <a:bodyPr wrap="square" lIns="0" tIns="0">
+            <a:spAutoFit/>
+          </a:bodyPr>
+          <a:lstStyle/>
+          <a:p>
+            <a:pPr algn="l"/>
+            <a:r>
+              <a:rPr sz="1200" b="1">
+                <a:solidFill>
+                  <a:srgbClr val="FFEE58"/>
+                </a:solidFill>
+                <a:latin typeface="Noto Sans KR"/>
+              </a:rPr>
+              <a:t>DSM → DEM Converter 의 자산 (DSM·SAM3·GDAL) 을 재활용해</a:t>
+            </a:r>
+          </a:p>
+        </p:txBody>
+      </p:sp>
+      <p:sp>
+        <p:nvSpPr>
           <p:cNvPr id="12" name="TextBox 11"/>
           <p:cNvSpPr txBox="1"/>
           <p:nvPr/>
         </p:nvSpPr>
         <p:spPr>
           <a:xfrm>
-            <a:off x="777240" y="3611880"/>
+            <a:off x="777240" y="3931920"/>
             <a:ext cx="7589520" cy="365760"/>
           </a:xfrm>
           <a:prstGeom prst="rect">
@@ -22920,13 +22768,13 @@
           <a:p>
             <a:pPr algn="l"/>
             <a:r>
-              <a:rPr sz="1200" b="1">
-                <a:solidFill>
-                  <a:srgbClr val="FFEE58"/>
-                </a:solidFill>
-                <a:latin typeface="Noto Sans KR"/>
-              </a:rPr>
-              <a:t>DSM → DEM Converter 의 자산 (DSM·SAM3·GDAL) 을 재활용해</a:t>
+              <a:rPr sz="1100" b="1">
+                <a:solidFill>
+                  <a:srgbClr val="FFFFFF"/>
+                </a:solidFill>
+                <a:latin typeface="Noto Sans KR"/>
+              </a:rPr>
+              <a:t>그늘막 입지를 MCDA + CV + Self-consistency + Bayesian Opt + 배낭 최적화로 도출</a:t>
             </a:r>
           </a:p>
         </p:txBody>
@@ -22939,8 +22787,8 @@
         </p:nvSpPr>
         <p:spPr>
           <a:xfrm>
-            <a:off x="777240" y="3931920"/>
-            <a:ext cx="7589520" cy="365760"/>
+            <a:off x="777240" y="4297680"/>
+            <a:ext cx="7589520" cy="274320"/>
           </a:xfrm>
           <a:prstGeom prst="rect">
             <a:avLst/>
@@ -22955,13 +22803,13 @@
           <a:p>
             <a:pPr algn="l"/>
             <a:r>
-              <a:rPr sz="1100" b="1">
-                <a:solidFill>
-                  <a:srgbClr val="FFFFFF"/>
-                </a:solidFill>
-                <a:latin typeface="Noto Sans KR"/>
-              </a:rPr>
-              <a:t>그늘막 입지를 MCDA + CV + Self-consistency + Bayesian Opt + 배낭 최적화로 도출</a:t>
+              <a:rPr sz="1000" b="0">
+                <a:solidFill>
+                  <a:srgbClr val="CCCCCC"/>
+                </a:solidFill>
+                <a:latin typeface="Noto Sans KR"/>
+              </a:rPr>
+              <a:t>→ 강건 입지 2 + 흑석동 사각지대 4 + 예산 4천만원 최적 배치 5</a:t>
             </a:r>
           </a:p>
         </p:txBody>
@@ -22974,8 +22822,8 @@
         </p:nvSpPr>
         <p:spPr>
           <a:xfrm>
-            <a:off x="777240" y="4297680"/>
-            <a:ext cx="7589520" cy="274320"/>
+            <a:off x="621792" y="4855464"/>
+            <a:ext cx="7909560" cy="210312"/>
           </a:xfrm>
           <a:prstGeom prst="rect">
             <a:avLst/>
@@ -22990,13 +22838,13 @@
           <a:p>
             <a:pPr algn="l"/>
             <a:r>
-              <a:rPr sz="1000" b="0">
-                <a:solidFill>
-                  <a:srgbClr val="CCCCCC"/>
-                </a:solidFill>
-                <a:latin typeface="Noto Sans KR"/>
-              </a:rPr>
-              <a:t>→ 강건 입지 2 + 흑석동 사각지대 4 + 예산 4천만원 최적 배치 5</a:t>
+              <a:rPr sz="900" b="0">
+                <a:solidFill>
+                  <a:srgbClr val="9B9A97"/>
+                </a:solidFill>
+                <a:latin typeface="Noto Sans KR"/>
+              </a:rPr>
+              <a:t>동작구 그늘막 입지 분석 · 데이터기반 도시설계</a:t>
             </a:r>
           </a:p>
         </p:txBody>
@@ -23004,41 +22852,6 @@
       <p:sp>
         <p:nvSpPr>
           <p:cNvPr id="15" name="TextBox 14"/>
-          <p:cNvSpPr txBox="1"/>
-          <p:nvPr/>
-        </p:nvSpPr>
-        <p:spPr>
-          <a:xfrm>
-            <a:off x="621792" y="4855464"/>
-            <a:ext cx="7909560" cy="210312"/>
-          </a:xfrm>
-          <a:prstGeom prst="rect">
-            <a:avLst/>
-          </a:prstGeom>
-          <a:noFill/>
-        </p:spPr>
-        <p:txBody>
-          <a:bodyPr wrap="square" lIns="0" tIns="0">
-            <a:spAutoFit/>
-          </a:bodyPr>
-          <a:lstStyle/>
-          <a:p>
-            <a:pPr algn="l"/>
-            <a:r>
-              <a:rPr sz="900" b="0">
-                <a:solidFill>
-                  <a:srgbClr val="9B9A97"/>
-                </a:solidFill>
-                <a:latin typeface="Noto Sans KR"/>
-              </a:rPr>
-              <a:t>동작구 그늘막 입지 분석 · 데이터기반 도시설계</a:t>
-            </a:r>
-          </a:p>
-        </p:txBody>
-      </p:sp>
-      <p:sp>
-        <p:nvSpPr>
-          <p:cNvPr id="16" name="TextBox 15"/>
           <p:cNvSpPr txBox="1"/>
           <p:nvPr/>
         </p:nvSpPr>

--- a/presentation/데이터기반_도시설계_기말_통합발표.pptx
+++ b/presentation/데이터기반_도시설계_기말_통합발표.pptx
@@ -34,6 +34,7 @@
     <p:sldId id="279" r:id="rId32"/>
     <p:sldId id="280" r:id="rId33"/>
     <p:sldId id="281" r:id="rId34"/>
+    <p:sldId id="282" r:id="rId35"/>
   </p:sldIdLst>
   <p:sldSz cy="5143500" cx="9144000"/>
   <p:notesSz cx="6858000" cy="9144000"/>
@@ -1411,6 +1412,444 @@
 </p:notes>
 </file>
 
+<file path=ppt/notesSlides/notesSlide16.xml><?xml version="1.0" encoding="utf-8"?>
+<p:notes xmlns:a="http://schemas.openxmlformats.org/drawingml/2006/main" xmlns:p="http://schemas.openxmlformats.org/presentationml/2006/main" xmlns:r="http://schemas.openxmlformats.org/officeDocument/2006/relationships">
+  <p:cSld>
+    <p:spTree>
+      <p:nvGrpSpPr>
+        <p:cNvPr id="1" name=""/>
+        <p:cNvGrpSpPr/>
+        <p:nvPr/>
+      </p:nvGrpSpPr>
+      <p:grpSpPr>
+        <a:xfrm>
+          <a:off x="0" y="0"/>
+          <a:ext cx="0" cy="0"/>
+          <a:chOff x="0" y="0"/>
+          <a:chExt cx="0" cy="0"/>
+        </a:xfrm>
+      </p:grpSpPr>
+      <p:sp>
+        <p:nvSpPr>
+          <p:cNvPr id="2" name="Slide Image Placeholder 1"/>
+          <p:cNvSpPr>
+            <a:spLocks noGrp="1"/>
+          </p:cNvSpPr>
+          <p:nvPr>
+            <p:ph type="sldImg" idx="2"/>
+          </p:nvPr>
+        </p:nvSpPr>
+        <p:spPr/>
+      </p:sp>
+      <p:sp>
+        <p:nvSpPr>
+          <p:cNvPr id="3" name="Notes Placeholder 2"/>
+          <p:cNvSpPr>
+            <a:spLocks noGrp="1"/>
+          </p:cNvSpPr>
+          <p:nvPr>
+            <p:ph type="body" idx="1"/>
+          </p:nvPr>
+        </p:nvSpPr>
+        <p:spPr/>
+        <p:txBody>
+          <a:bodyPr/>
+          <a:lstStyle/>
+          <a:p>
+            <a:r>
+              <a:t>[1p · 표지 · 60초]</a:t>
+            </a:r>
+          </a:p>
+          <a:p>
+            <a:r>
+              <a:t>- 안녕하세요. 인공지능융합대학원 한영재입니다.</a:t>
+            </a:r>
+          </a:p>
+          <a:p>
+            <a:r>
+              <a:t>- 본 프로젝트는 3인 팀 작업입니다:</a:t>
+            </a:r>
+          </a:p>
+          <a:p>
+            <a:r>
+              <a:t>  · 문치국 — GIS·측량·BIM 엔지니어 (NGII·DSM 자문)</a:t>
+            </a:r>
+          </a:p>
+          <a:p>
+            <a:r>
+              <a:t>  · 한영재 — 한화투자증권 채권트레이더 (그늘막 분석 전체)</a:t>
+            </a:r>
+          </a:p>
+          <a:p>
+            <a:r>
+              <a:t>  · 원우식 — SOCAR ML/AI Engineer (SAM3·DSM→DEM 파이프라인)</a:t>
+            </a:r>
+          </a:p>
+          <a:p>
+            <a:r>
+              <a:t>- 메인은 두 부분으로 구성됩니다:</a:t>
+            </a:r>
+          </a:p>
+          <a:p>
+            <a:r>
+              <a:t>  1) 2~16p: 친구들이 만든 DSM → DEM Converter (15장)</a:t>
+            </a:r>
+          </a:p>
+          <a:p>
+            <a:r>
+              <a:t>  2) 17p~: 같은 DSM 자산을 재활용한 그늘막 입지 분석 (10장)</a:t>
+            </a:r>
+          </a:p>
+          <a:p>
+            <a:r>
+              <a:t>- 학제간 협업의 결과물입니다.</a:t>
+            </a:r>
+          </a:p>
+        </p:txBody>
+      </p:sp>
+    </p:spTree>
+  </p:cSld>
+  <p:clrMapOvr>
+    <a:masterClrMapping/>
+  </p:clrMapOvr>
+</p:notes>
+</file>
+
+<file path=ppt/notesSlides/notesSlide17.xml><?xml version="1.0" encoding="utf-8"?>
+<p:notes xmlns:a="http://schemas.openxmlformats.org/drawingml/2006/main" xmlns:p="http://schemas.openxmlformats.org/presentationml/2006/main" xmlns:r="http://schemas.openxmlformats.org/officeDocument/2006/relationships">
+  <p:cSld>
+    <p:spTree>
+      <p:nvGrpSpPr>
+        <p:cNvPr id="1" name=""/>
+        <p:cNvGrpSpPr/>
+        <p:nvPr/>
+      </p:nvGrpSpPr>
+      <p:grpSpPr>
+        <a:xfrm>
+          <a:off x="0" y="0"/>
+          <a:ext cx="0" cy="0"/>
+          <a:chOff x="0" y="0"/>
+          <a:chExt cx="0" cy="0"/>
+        </a:xfrm>
+      </p:grpSpPr>
+      <p:sp>
+        <p:nvSpPr>
+          <p:cNvPr id="2" name="Slide Image Placeholder 1"/>
+          <p:cNvSpPr>
+            <a:spLocks noGrp="1"/>
+          </p:cNvSpPr>
+          <p:nvPr>
+            <p:ph type="sldImg" idx="2"/>
+          </p:nvPr>
+        </p:nvSpPr>
+        <p:spPr/>
+      </p:sp>
+      <p:sp>
+        <p:nvSpPr>
+          <p:cNvPr id="3" name="Notes Placeholder 2"/>
+          <p:cNvSpPr>
+            <a:spLocks noGrp="1"/>
+          </p:cNvSpPr>
+          <p:nvPr>
+            <p:ph type="body" idx="1"/>
+          </p:nvPr>
+        </p:nvSpPr>
+        <p:spPr/>
+        <p:txBody>
+          <a:bodyPr/>
+          <a:lstStyle/>
+          <a:p>
+            <a:r>
+              <a:t>[17p · 왜 DSM 기반인가 · 60초]</a:t>
+            </a:r>
+          </a:p>
+          <a:p>
+            <a:r>
+              <a:t>핵심 메시지: 친구들 작품 (DSM→DEM Converter) 의 DSM 자산을 우리가 재활용</a:t>
+            </a:r>
+          </a:p>
+          <a:p/>
+          <a:p>
+            <a:r>
+              <a:t>DEM vs DSM (가장 자주 받는 질문):</a:t>
+            </a:r>
+          </a:p>
+          <a:p>
+            <a:r>
+              <a:t>- DEM: 객체 제거된 순수 지표 → 침수 분석·토목 설계</a:t>
+            </a:r>
+          </a:p>
+          <a:p>
+            <a:r>
+              <a:t>- DSM: 건물·수목 포함 표면 → 그림자·일조 분석</a:t>
+            </a:r>
+          </a:p>
+          <a:p>
+            <a:r>
+              <a:t>- 그림자를 만드는 건 표면 객체의 꼭대기. DEM 으론 그림자가 안 생김</a:t>
+            </a:r>
+          </a:p>
+          <a:p>
+            <a:r>
+              <a:t>- nDSM = DSM − DEM = 객체 순높이 = ray-cast 입력</a:t>
+            </a:r>
+          </a:p>
+          <a:p/>
+          <a:p>
+            <a:r>
+              <a:t>연계 흐름:</a:t>
+            </a:r>
+          </a:p>
+          <a:p>
+            <a:r>
+              <a:t>- 친구 도구: 정사영상 → SAM3 객체 추출 → DSM 에서 제거 → GDAL 보간 → DEM</a:t>
+            </a:r>
+          </a:p>
+          <a:p>
+            <a:r>
+              <a:t>- 우리 도구: DSM 원본을 그대로 받아 → ray-cast 그림자 시뮬레이션 → 입지 추천</a:t>
+            </a:r>
+          </a:p>
+          <a:p/>
+          <a:p>
+            <a:r>
+              <a:t>교수님 13p 추천: Deep Umbra (GAN 일조 컴퓨테이션)</a:t>
+            </a:r>
+          </a:p>
+          <a:p>
+            <a:r>
+              <a:t>- 풀 GAN 학습 부담 → DSM + 4시점 ray-cast 로 단순 이식</a:t>
+            </a:r>
+          </a:p>
+          <a:p>
+            <a:r>
+              <a:t>- 핵심 정신(다시점 시간 누적) 은 유지</a:t>
+            </a:r>
+          </a:p>
+        </p:txBody>
+      </p:sp>
+    </p:spTree>
+  </p:cSld>
+  <p:clrMapOvr>
+    <a:masterClrMapping/>
+  </p:clrMapOvr>
+</p:notes>
+</file>
+
+<file path=ppt/notesSlides/notesSlide18.xml><?xml version="1.0" encoding="utf-8"?>
+<p:notes xmlns:a="http://schemas.openxmlformats.org/drawingml/2006/main" xmlns:p="http://schemas.openxmlformats.org/presentationml/2006/main" xmlns:r="http://schemas.openxmlformats.org/officeDocument/2006/relationships">
+  <p:cSld>
+    <p:spTree>
+      <p:nvGrpSpPr>
+        <p:cNvPr id="1" name=""/>
+        <p:cNvGrpSpPr/>
+        <p:nvPr/>
+      </p:nvGrpSpPr>
+      <p:grpSpPr>
+        <a:xfrm>
+          <a:off x="0" y="0"/>
+          <a:ext cx="0" cy="0"/>
+          <a:chOff x="0" y="0"/>
+          <a:chExt cx="0" cy="0"/>
+        </a:xfrm>
+      </p:grpSpPr>
+      <p:sp>
+        <p:nvSpPr>
+          <p:cNvPr id="2" name="Slide Image Placeholder 1"/>
+          <p:cNvSpPr>
+            <a:spLocks noGrp="1"/>
+          </p:cNvSpPr>
+          <p:nvPr>
+            <p:ph type="sldImg" idx="2"/>
+          </p:nvPr>
+        </p:nvSpPr>
+        <p:spPr/>
+      </p:sp>
+      <p:sp>
+        <p:nvSpPr>
+          <p:cNvPr id="3" name="Notes Placeholder 2"/>
+          <p:cNvSpPr>
+            <a:spLocks noGrp="1"/>
+          </p:cNvSpPr>
+          <p:nvPr>
+            <p:ph type="body" idx="1"/>
+          </p:nvPr>
+        </p:nvSpPr>
+        <p:spPr/>
+        <p:txBody>
+          <a:bodyPr/>
+          <a:lstStyle/>
+          <a:p>
+            <a:r>
+              <a:t>[18p · 보완 흐름 · 45초]</a:t>
+            </a:r>
+          </a:p>
+          <a:p>
+            <a:r>
+              <a:t>v1 (초기) → v2 (최종) 비교 9 항목:</a:t>
+            </a:r>
+          </a:p>
+          <a:p>
+            <a:r>
+              <a:t>- 건물 입력: 더미 19동 → 실측 30+3,775동 (SAM + NGII)</a:t>
+            </a:r>
+          </a:p>
+          <a:p>
+            <a:r>
+              <a:t>- 그림자: 단일 시점 → 4시점 ray-cast (Deep Umbra 영감)</a:t>
+            </a:r>
+          </a:p>
+          <a:p>
+            <a:r>
+              <a:t>- 안정성: 결정론적 1회 → Self-consistency 5회 평균 (NEW)</a:t>
+            </a:r>
+          </a:p>
+          <a:p>
+            <a:r>
+              <a:t>- 보행로: 더미 14라인 buffer 20m → OSMnx walkable 5m</a:t>
+            </a:r>
+          </a:p>
+          <a:p>
+            <a:r>
+              <a:t>- 건물 cut: 없음 → NGII 5m inset (건물 위 추천 방지)</a:t>
+            </a:r>
+          </a:p>
+          <a:p>
+            <a:r>
+              <a:t>- 결집지: 없음 → 교차로+횡단보도 50m 근접 (OSMnx)</a:t>
+            </a:r>
+          </a:p>
+          <a:p>
+            <a:r>
+              <a:t>- 가중치: 수동 → Bayesian Opt 자동 튜닝 (NEW, 실측 18개 라벨)</a:t>
+            </a:r>
+          </a:p>
+          <a:p>
+            <a:r>
+              <a:t>- 정책: TOP10 정렬 → 배낭 최적화 (예산+분산 제약)</a:t>
+            </a:r>
+          </a:p>
+          <a:p/>
+          <a:p>
+            <a:r>
+              <a:t>전체 메시지: 데이터 품질 + 시뮬레이션 정확도 + 정책 의사결정 3개 차원 동시 강화</a:t>
+            </a:r>
+          </a:p>
+        </p:txBody>
+      </p:sp>
+    </p:spTree>
+  </p:cSld>
+  <p:clrMapOvr>
+    <a:masterClrMapping/>
+  </p:clrMapOvr>
+</p:notes>
+</file>
+
+<file path=ppt/notesSlides/notesSlide19.xml><?xml version="1.0" encoding="utf-8"?>
+<p:notes xmlns:a="http://schemas.openxmlformats.org/drawingml/2006/main" xmlns:p="http://schemas.openxmlformats.org/presentationml/2006/main" xmlns:r="http://schemas.openxmlformats.org/officeDocument/2006/relationships">
+  <p:cSld>
+    <p:spTree>
+      <p:nvGrpSpPr>
+        <p:cNvPr id="1" name=""/>
+        <p:cNvGrpSpPr/>
+        <p:nvPr/>
+      </p:nvGrpSpPr>
+      <p:grpSpPr>
+        <a:xfrm>
+          <a:off x="0" y="0"/>
+          <a:ext cx="0" cy="0"/>
+          <a:chOff x="0" y="0"/>
+          <a:chExt cx="0" cy="0"/>
+        </a:xfrm>
+      </p:grpSpPr>
+      <p:sp>
+        <p:nvSpPr>
+          <p:cNvPr id="2" name="Slide Image Placeholder 1"/>
+          <p:cNvSpPr>
+            <a:spLocks noGrp="1"/>
+          </p:cNvSpPr>
+          <p:nvPr>
+            <p:ph type="sldImg" idx="2"/>
+          </p:nvPr>
+        </p:nvSpPr>
+        <p:spPr/>
+      </p:sp>
+      <p:sp>
+        <p:nvSpPr>
+          <p:cNvPr id="3" name="Notes Placeholder 2"/>
+          <p:cNvSpPr>
+            <a:spLocks noGrp="1"/>
+          </p:cNvSpPr>
+          <p:nvPr>
+            <p:ph type="body" idx="1"/>
+          </p:nvPr>
+        </p:nvSpPr>
+        <p:spPr/>
+        <p:txBody>
+          <a:bodyPr/>
+          <a:lstStyle/>
+          <a:p>
+            <a:r>
+              <a:t>[19p · 데이터 9종 + Score · 45초]</a:t>
+            </a:r>
+          </a:p>
+          <a:p>
+            <a:r>
+              <a:t>3 계층:</a:t>
+            </a:r>
+          </a:p>
+          <a:p>
+            <a:r>
+              <a:t>- 기본 5종 (현재 4종 더미, 실데이터 자동 전환 구조)</a:t>
+            </a:r>
+          </a:p>
+          <a:p>
+            <a:r>
+              <a:t>- CV 2종 (V-World 항공 + Mapillary 거리뷰)</a:t>
+            </a:r>
+          </a:p>
+          <a:p>
+            <a:r>
+              <a:t>- 외부 정밀 2종 (NGII 흑석동 + OSMnx 도로망)</a:t>
+            </a:r>
+          </a:p>
+          <a:p/>
+          <a:p>
+            <a:r>
+              <a:t>Score 식:</a:t>
+            </a:r>
+          </a:p>
+          <a:p>
+            <a:r>
+              <a:t>0.18·pop + 0.18·lst + 0.18·vuln − 0.15·shade − 0.05·natural</a:t>
+            </a:r>
+          </a:p>
+          <a:p>
+            <a:r>
+              <a:t>+ 0.12·sv_deficit + 0.20·intersection</a:t>
+            </a:r>
+          </a:p>
+          <a:p>
+            <a:r>
+              <a:t>→ 가중치는 다음 다음 슬라이드(23p) 에서 BayesOpt 로 자동 튜닝됨</a:t>
+            </a:r>
+          </a:p>
+          <a:p/>
+          <a:p>
+            <a:r>
+              <a:t>격자 3,672 → 4단계 필터 → 330 → 시나리오 6 × TOP10 → 강건 입지</a:t>
+            </a:r>
+          </a:p>
+        </p:txBody>
+      </p:sp>
+    </p:spTree>
+  </p:cSld>
+  <p:clrMapOvr>
+    <a:masterClrMapping/>
+  </p:clrMapOvr>
+</p:notes>
+</file>
+
 <file path=ppt/notesSlides/notesSlide2.xml><?xml version="1.0" encoding="utf-8"?>
 <p:notes xmlns:a="http://schemas.openxmlformats.org/drawingml/2006/main" xmlns:r="http://schemas.openxmlformats.org/officeDocument/2006/relationships" xmlns:mc="http://schemas.openxmlformats.org/markup-compatibility/2006" xmlns:mv="urn:schemas-microsoft-com:mac:vml" xmlns:p="http://schemas.openxmlformats.org/presentationml/2006/main" xmlns:c="http://schemas.openxmlformats.org/drawingml/2006/chart" xmlns:dgm="http://schemas.openxmlformats.org/drawingml/2006/diagram" xmlns:o="urn:schemas-microsoft-com:office:office" xmlns:v="urn:schemas-microsoft-com:vml" xmlns:pvml="urn:schemas-microsoft-com:office:powerpoint" xmlns:com="http://schemas.openxmlformats.org/drawingml/2006/compatibility" xmlns:p14="http://schemas.microsoft.com/office/powerpoint/2010/main" xmlns:p15="http://schemas.microsoft.com/office/powerpoint/2012/main" xmlns:ahyp="http://schemas.microsoft.com/office/drawing/2018/hyperlinkcolor" showMasterPhAnim="0" showMasterSp="0">
   <p:cSld>
@@ -1501,6 +1940,925 @@
             </a:pathLst>
           </a:custGeom>
         </p:spPr>
+      </p:sp>
+    </p:spTree>
+  </p:cSld>
+  <p:clrMapOvr>
+    <a:masterClrMapping/>
+  </p:clrMapOvr>
+</p:notes>
+</file>
+
+<file path=ppt/notesSlides/notesSlide20.xml><?xml version="1.0" encoding="utf-8"?>
+<p:notes xmlns:a="http://schemas.openxmlformats.org/drawingml/2006/main" xmlns:p="http://schemas.openxmlformats.org/presentationml/2006/main" xmlns:r="http://schemas.openxmlformats.org/officeDocument/2006/relationships">
+  <p:cSld>
+    <p:spTree>
+      <p:nvGrpSpPr>
+        <p:cNvPr id="1" name=""/>
+        <p:cNvGrpSpPr/>
+        <p:nvPr/>
+      </p:nvGrpSpPr>
+      <p:grpSpPr>
+        <a:xfrm>
+          <a:off x="0" y="0"/>
+          <a:ext cx="0" cy="0"/>
+          <a:chOff x="0" y="0"/>
+          <a:chExt cx="0" cy="0"/>
+        </a:xfrm>
+      </p:grpSpPr>
+      <p:sp>
+        <p:nvSpPr>
+          <p:cNvPr id="2" name="Slide Image Placeholder 1"/>
+          <p:cNvSpPr>
+            <a:spLocks noGrp="1"/>
+          </p:cNvSpPr>
+          <p:nvPr>
+            <p:ph type="sldImg" idx="2"/>
+          </p:nvPr>
+        </p:nvSpPr>
+        <p:spPr/>
+      </p:sp>
+      <p:sp>
+        <p:nvSpPr>
+          <p:cNvPr id="3" name="Notes Placeholder 2"/>
+          <p:cNvSpPr>
+            <a:spLocks noGrp="1"/>
+          </p:cNvSpPr>
+          <p:nvPr>
+            <p:ph type="body" idx="1"/>
+          </p:nvPr>
+        </p:nvSpPr>
+        <p:spPr/>
+        <p:txBody>
+          <a:bodyPr/>
+          <a:lstStyle/>
+          <a:p>
+            <a:r>
+              <a:t>[20p · 공간 필터링 + CV · 45초]</a:t>
+            </a:r>
+          </a:p>
+          <a:p>
+            <a:r>
+              <a:t>4단계 필터 (3,672 → 330, 9% 살아남음):</a:t>
+            </a:r>
+          </a:p>
+          <a:p>
+            <a:r>
+              <a:t>- 보행로 5m: OSMnx walkable edges</a:t>
+            </a:r>
+          </a:p>
+          <a:p>
+            <a:r>
+              <a:t>- 건물 컷: NGII 폴리곤 5m inset (건물 위 추천 차단)</a:t>
+            </a:r>
+          </a:p>
+          <a:p>
+            <a:r>
+              <a:t>- 결집지 50m: 교차로 + 횡단보도 근접</a:t>
+            </a:r>
+          </a:p>
+          <a:p/>
+          <a:p>
+            <a:r>
+              <a:t>CV-A · Mobile-SAM (Meta 2023):</a:t>
+            </a:r>
+          </a:p>
+          <a:p>
+            <a:r>
+              <a:t>- V-World 항공 z=15, 48 타일 합성</a:t>
+            </a:r>
+          </a:p>
+          <a:p>
+            <a:r>
+              <a:t>- zero-shot, 40MB CPU 추론, 학습 0건</a:t>
+            </a:r>
+          </a:p>
+          <a:p>
+            <a:r>
+              <a:t>- 건물 30동 자동 추출</a:t>
+            </a:r>
+          </a:p>
+          <a:p/>
+          <a:p>
+            <a:r>
+              <a:t>CV-B · SegFormer-b0 (NVIDIA CityScapes pretrained):</a:t>
+            </a:r>
+          </a:p>
+          <a:p>
+            <a:r>
+              <a:t>- Mapillary 거리뷰 1,302장 → 후보 19격자 매핑</a:t>
+            </a:r>
+          </a:p>
+          <a:p>
+            <a:r>
+              <a:t>- 19 classes 의미 분할 → 그늘 결핍 공식</a:t>
+            </a:r>
+          </a:p>
+          <a:p>
+            <a:r>
+              <a:t>- TOP10 평균 deficit 0.153</a:t>
+            </a:r>
+          </a:p>
+        </p:txBody>
+      </p:sp>
+    </p:spTree>
+  </p:cSld>
+  <p:clrMapOvr>
+    <a:masterClrMapping/>
+  </p:clrMapOvr>
+</p:notes>
+</file>
+
+<file path=ppt/notesSlides/notesSlide21.xml><?xml version="1.0" encoding="utf-8"?>
+<p:notes xmlns:a="http://schemas.openxmlformats.org/drawingml/2006/main" xmlns:p="http://schemas.openxmlformats.org/presentationml/2006/main" xmlns:r="http://schemas.openxmlformats.org/officeDocument/2006/relationships">
+  <p:cSld>
+    <p:spTree>
+      <p:nvGrpSpPr>
+        <p:cNvPr id="1" name=""/>
+        <p:cNvGrpSpPr/>
+        <p:nvPr/>
+      </p:nvGrpSpPr>
+      <p:grpSpPr>
+        <a:xfrm>
+          <a:off x="0" y="0"/>
+          <a:ext cx="0" cy="0"/>
+          <a:chOff x="0" y="0"/>
+          <a:chExt cx="0" cy="0"/>
+        </a:xfrm>
+      </p:grpSpPr>
+      <p:sp>
+        <p:nvSpPr>
+          <p:cNvPr id="2" name="Slide Image Placeholder 1"/>
+          <p:cNvSpPr>
+            <a:spLocks noGrp="1"/>
+          </p:cNvSpPr>
+          <p:nvPr>
+            <p:ph type="sldImg" idx="2"/>
+          </p:nvPr>
+        </p:nvSpPr>
+        <p:spPr/>
+      </p:sp>
+      <p:sp>
+        <p:nvSpPr>
+          <p:cNvPr id="3" name="Notes Placeholder 2"/>
+          <p:cNvSpPr>
+            <a:spLocks noGrp="1"/>
+          </p:cNvSpPr>
+          <p:nvPr>
+            <p:ph type="body" idx="1"/>
+          </p:nvPr>
+        </p:nvSpPr>
+        <p:spPr/>
+        <p:txBody>
+          <a:bodyPr/>
+          <a:lstStyle/>
+          <a:p>
+            <a:r>
+              <a:t>[21p · CV-DSM + Self-consistency · 60초 — NEW]</a:t>
+            </a:r>
+          </a:p>
+          <a:p>
+            <a:r>
+              <a:t>강의 13p + 40p 동시 반영:</a:t>
+            </a:r>
+          </a:p>
+          <a:p/>
+          <a:p>
+            <a:r>
+              <a:t>CV-DSM (Deep Umbra 영감):</a:t>
+            </a:r>
+          </a:p>
+          <a:p>
+            <a:r>
+              <a:t>- 흑석동 DSM − DEM = nDSM (객체 높이)</a:t>
+            </a:r>
+          </a:p>
+          <a:p>
+            <a:r>
+              <a:t>- 4시점 (10·12·14·16시) shadow union → 누적 비율</a:t>
+            </a:r>
+          </a:p>
+          <a:p>
+            <a:r>
+              <a:t>- 309 격자 평균 누적 0.157</a:t>
+            </a:r>
+          </a:p>
+          <a:p/>
+          <a:p>
+            <a:r>
+              <a:t>Self-consistency 5회 (NEW, 강의 40p 권장):</a:t>
+            </a:r>
+          </a:p>
+          <a:p>
+            <a:r>
+              <a:t>- 단일 ray-cast 는 태양위치 가정에 의존 → 신뢰구간 없음</a:t>
+            </a:r>
+          </a:p>
+          <a:p>
+            <a:r>
+              <a:t>- ±15분 시각, ±5° 방위 변동 5회 → 평균 + std</a:t>
+            </a:r>
+          </a:p>
+          <a:p>
+            <a:r>
+              <a:t>- 평균 std 0.021 (낮음 = 안정적, 결과 신뢰)</a:t>
+            </a:r>
+          </a:p>
+          <a:p>
+            <a:r>
+              <a:t>- 흑석동 focus map 에 std 레이어 토글 가능</a:t>
+            </a:r>
+          </a:p>
+          <a:p/>
+          <a:p>
+            <a:r>
+              <a:t>예상 질문: 왜 풀 GAN 안 썼나? → 학습 시간·데이터 부담. ray-cast 로 같은 메시지</a:t>
+            </a:r>
+          </a:p>
+        </p:txBody>
+      </p:sp>
+    </p:spTree>
+  </p:cSld>
+  <p:clrMapOvr>
+    <a:masterClrMapping/>
+  </p:clrMapOvr>
+</p:notes>
+</file>
+
+<file path=ppt/notesSlides/notesSlide22.xml><?xml version="1.0" encoding="utf-8"?>
+<p:notes xmlns:a="http://schemas.openxmlformats.org/drawingml/2006/main" xmlns:p="http://schemas.openxmlformats.org/presentationml/2006/main" xmlns:r="http://schemas.openxmlformats.org/officeDocument/2006/relationships">
+  <p:cSld>
+    <p:spTree>
+      <p:nvGrpSpPr>
+        <p:cNvPr id="1" name=""/>
+        <p:cNvGrpSpPr/>
+        <p:nvPr/>
+      </p:nvGrpSpPr>
+      <p:grpSpPr>
+        <a:xfrm>
+          <a:off x="0" y="0"/>
+          <a:ext cx="0" cy="0"/>
+          <a:chOff x="0" y="0"/>
+          <a:chExt cx="0" cy="0"/>
+        </a:xfrm>
+      </p:grpSpPr>
+      <p:sp>
+        <p:nvSpPr>
+          <p:cNvPr id="2" name="Slide Image Placeholder 1"/>
+          <p:cNvSpPr>
+            <a:spLocks noGrp="1"/>
+          </p:cNvSpPr>
+          <p:nvPr>
+            <p:ph type="sldImg" idx="2"/>
+          </p:nvPr>
+        </p:nvSpPr>
+        <p:spPr/>
+      </p:sp>
+      <p:sp>
+        <p:nvSpPr>
+          <p:cNvPr id="3" name="Notes Placeholder 2"/>
+          <p:cNvSpPr>
+            <a:spLocks noGrp="1"/>
+          </p:cNvSpPr>
+          <p:nvPr>
+            <p:ph type="body" idx="1"/>
+          </p:nvPr>
+        </p:nvSpPr>
+        <p:spPr/>
+        <p:txBody>
+          <a:bodyPr/>
+          <a:lstStyle/>
+          <a:p>
+            <a:r>
+              <a:t>[22p · 흑석동 정밀 분석 · 60초]</a:t>
+            </a:r>
+          </a:p>
+          <a:p>
+            <a:r>
+              <a:t>NGII 실측 3,775동 + 실측 그늘막 18개 (고정 13 + 스마트 5) + TOP10 분류</a:t>
+            </a:r>
+          </a:p>
+          <a:p/>
+          <a:p>
+            <a:r>
+              <a:t>TOP10 3 카테고리:</a:t>
+            </a:r>
+          </a:p>
+          <a:p>
+            <a:r>
+              <a:t>- ⭐사각지대 (&gt;150m): TOP3·4·5·8 (4곳) — 정책 어필 1순위</a:t>
+            </a:r>
+          </a:p>
+          <a:p>
+            <a:r>
+              <a:t>- ●보강 (&lt;60m): TOP1·2·7·10 (4곳) — 기존 강화</a:t>
+            </a:r>
+          </a:p>
+          <a:p>
+            <a:r>
+              <a:t>- ○중간 (60~150m): TOP6·9 (2곳)</a:t>
+            </a:r>
+          </a:p>
+          <a:p/>
+          <a:p>
+            <a:r>
+              <a:t>최대 사각지대: TOP4 (37.49786, 126.96129) — 359.6m</a:t>
+            </a:r>
+          </a:p>
+          <a:p>
+            <a:r>
+              <a:t>→ 흑석동 신규 설치 시 1순위 우선 후보</a:t>
+            </a:r>
+          </a:p>
+          <a:p/>
+          <a:p>
+            <a:r>
+              <a:t>정책 메시지: 흑석동은 그늘막 75% 영역 커버 → 다른 동 우선 / 흑석동 내부 추가는 사각지대 4곳</a:t>
+            </a:r>
+          </a:p>
+        </p:txBody>
+      </p:sp>
+    </p:spTree>
+  </p:cSld>
+  <p:clrMapOvr>
+    <a:masterClrMapping/>
+  </p:clrMapOvr>
+</p:notes>
+</file>
+
+<file path=ppt/notesSlides/notesSlide23.xml><?xml version="1.0" encoding="utf-8"?>
+<p:notes xmlns:a="http://schemas.openxmlformats.org/drawingml/2006/main" xmlns:p="http://schemas.openxmlformats.org/presentationml/2006/main" xmlns:r="http://schemas.openxmlformats.org/officeDocument/2006/relationships">
+  <p:cSld>
+    <p:spTree>
+      <p:nvGrpSpPr>
+        <p:cNvPr id="1" name=""/>
+        <p:cNvGrpSpPr/>
+        <p:nvPr/>
+      </p:nvGrpSpPr>
+      <p:grpSpPr>
+        <a:xfrm>
+          <a:off x="0" y="0"/>
+          <a:ext cx="0" cy="0"/>
+          <a:chOff x="0" y="0"/>
+          <a:chExt cx="0" cy="0"/>
+        </a:xfrm>
+      </p:grpSpPr>
+      <p:sp>
+        <p:nvSpPr>
+          <p:cNvPr id="2" name="Slide Image Placeholder 1"/>
+          <p:cNvSpPr>
+            <a:spLocks noGrp="1"/>
+          </p:cNvSpPr>
+          <p:nvPr>
+            <p:ph type="sldImg" idx="2"/>
+          </p:nvPr>
+        </p:nvSpPr>
+        <p:spPr/>
+      </p:sp>
+      <p:sp>
+        <p:nvSpPr>
+          <p:cNvPr id="3" name="Notes Placeholder 2"/>
+          <p:cNvSpPr>
+            <a:spLocks noGrp="1"/>
+          </p:cNvSpPr>
+          <p:nvPr>
+            <p:ph type="body" idx="1"/>
+          </p:nvPr>
+        </p:nvSpPr>
+        <p:spPr/>
+        <p:txBody>
+          <a:bodyPr/>
+          <a:lstStyle/>
+          <a:p>
+            <a:r>
+              <a:t>[23p · 가중치 자동 튜닝 · 75초 — NEW, 강의 40p 추천]</a:t>
+            </a:r>
+          </a:p>
+          <a:p>
+            <a:r>
+              <a:t>가설 (사용자 정정 반영):</a:t>
+            </a:r>
+          </a:p>
+          <a:p>
+            <a:r>
+              <a:t>- "이미 설치된 곳은 score 가 낮아야" → loss = mean(score(실측 18개 근접)) minimize</a:t>
+            </a:r>
+          </a:p>
+          <a:p/>
+          <a:p>
+            <a:r>
+              <a:t>Bayesian Optimization (skopt.gp_minimize, n=60):</a:t>
+            </a:r>
+          </a:p>
+          <a:p>
+            <a:r>
+              <a:t>- GP surrogate 로 7 피처 가중치 자동 탐색</a:t>
+            </a:r>
+          </a:p>
+          <a:p>
+            <a:r>
+              <a:t>- 강의 40p 권장의 "데이터 기반 검증" 정신 반영</a:t>
+            </a:r>
+          </a:p>
+          <a:p/>
+          <a:p>
+            <a:r>
+              <a:t>학습 결과 (수동 → 학습):</a:t>
+            </a:r>
+          </a:p>
+          <a:p>
+            <a:r>
+              <a:t>- shade −0.150 → −0.295  (페널티 2배 강화!)</a:t>
+            </a:r>
+          </a:p>
+          <a:p>
+            <a:r>
+              <a:t>- natural −0.050 → −0.178 (3.6배)</a:t>
+            </a:r>
+          </a:p>
+          <a:p>
+            <a:r>
+              <a:t>- lst +0.180 → +0.318 (폭염 우선)</a:t>
+            </a:r>
+          </a:p>
+          <a:p>
+            <a:r>
+              <a:t>- vuln +0.180 → +0.061 (흑석동 그늘막이 취약지에 집중되어 있어서 약화)</a:t>
+            </a:r>
+          </a:p>
+          <a:p/>
+          <a:p>
+            <a:r>
+              <a:t>검증: 실측 위치 평균 score 0.087 → −0.122 (Δ −0.21, 가설 부합)</a:t>
+            </a:r>
+          </a:p>
+          <a:p>
+            <a:r>
+              <a:t>→ 알고리즘이 데이터로부터 "기존 설치 = 이미 좋은 곳" 을 자동 학습</a:t>
+            </a:r>
+          </a:p>
+        </p:txBody>
+      </p:sp>
+    </p:spTree>
+  </p:cSld>
+  <p:clrMapOvr>
+    <a:masterClrMapping/>
+  </p:clrMapOvr>
+</p:notes>
+</file>
+
+<file path=ppt/notesSlides/notesSlide24.xml><?xml version="1.0" encoding="utf-8"?>
+<p:notes xmlns:a="http://schemas.openxmlformats.org/drawingml/2006/main" xmlns:p="http://schemas.openxmlformats.org/presentationml/2006/main" xmlns:r="http://schemas.openxmlformats.org/officeDocument/2006/relationships">
+  <p:cSld>
+    <p:spTree>
+      <p:nvGrpSpPr>
+        <p:cNvPr id="1" name=""/>
+        <p:cNvGrpSpPr/>
+        <p:nvPr/>
+      </p:nvGrpSpPr>
+      <p:grpSpPr>
+        <a:xfrm>
+          <a:off x="0" y="0"/>
+          <a:ext cx="0" cy="0"/>
+          <a:chOff x="0" y="0"/>
+          <a:chExt cx="0" cy="0"/>
+        </a:xfrm>
+      </p:grpSpPr>
+      <p:sp>
+        <p:nvSpPr>
+          <p:cNvPr id="2" name="Slide Image Placeholder 1"/>
+          <p:cNvSpPr>
+            <a:spLocks noGrp="1"/>
+          </p:cNvSpPr>
+          <p:nvPr>
+            <p:ph type="sldImg" idx="2"/>
+          </p:nvPr>
+        </p:nvSpPr>
+        <p:spPr/>
+      </p:sp>
+      <p:sp>
+        <p:nvSpPr>
+          <p:cNvPr id="3" name="Notes Placeholder 2"/>
+          <p:cNvSpPr>
+            <a:spLocks noGrp="1"/>
+          </p:cNvSpPr>
+          <p:nvPr>
+            <p:ph type="body" idx="1"/>
+          </p:nvPr>
+        </p:nvSpPr>
+        <p:spPr/>
+        <p:txBody>
+          <a:bodyPr/>
+          <a:lstStyle/>
+          <a:p>
+            <a:r>
+              <a:t>[24p · OSMnx + 시나리오 + 강건 입지 · 60초]</a:t>
+            </a:r>
+          </a:p>
+          <a:p>
+            <a:r>
+              <a:t>OSMnx (보행자 결집 지점):</a:t>
+            </a:r>
+          </a:p>
+          <a:p>
+            <a:r>
+              <a:t>- walkable highway edges (보행로 5m 필터 입력)</a:t>
+            </a:r>
+          </a:p>
+          <a:p>
+            <a:r>
+              <a:t>- 교차로 노드 (street_count ≥ 3)</a:t>
+            </a:r>
+          </a:p>
+          <a:p>
+            <a:r>
+              <a:t>- 횡단보도 306 (한국 OSM 은 footway=crossing 우세 → 3종 태그 통합)</a:t>
+            </a:r>
+          </a:p>
+          <a:p/>
+          <a:p>
+            <a:r>
+              <a:t>시나리오 6: 기본·고령자·폭염·유동인구·보행환경·교차로</a:t>
+            </a:r>
+          </a:p>
+          <a:p>
+            <a:r>
+              <a:t>- 가중치만 바꿔 재스코어 = 정책 민감도 분석</a:t>
+            </a:r>
+          </a:p>
+          <a:p>
+            <a:r>
+              <a:t>- 유동인구 최고 0.648, 3곳 독점</a:t>
+            </a:r>
+          </a:p>
+          <a:p/>
+          <a:p>
+            <a:r>
+              <a:t>⭐ 강건 입지 2곳 (6 시나리오 모두 공통):</a:t>
+            </a:r>
+          </a:p>
+          <a:p>
+            <a:r>
+              <a:t>- 37.4907, 126.9647 — 동작대로 사당-이수 축</a:t>
+            </a:r>
+          </a:p>
+          <a:p>
+            <a:r>
+              <a:t>- 37.4898, 126.9670 — 동작대로 사당역 인근</a:t>
+            </a:r>
+          </a:p>
+          <a:p>
+            <a:r>
+              <a:t>→ 예산 제약 시 최우선 설치 대상</a:t>
+            </a:r>
+          </a:p>
+        </p:txBody>
+      </p:sp>
+    </p:spTree>
+  </p:cSld>
+  <p:clrMapOvr>
+    <a:masterClrMapping/>
+  </p:clrMapOvr>
+</p:notes>
+</file>
+
+<file path=ppt/notesSlides/notesSlide25.xml><?xml version="1.0" encoding="utf-8"?>
+<p:notes xmlns:a="http://schemas.openxmlformats.org/drawingml/2006/main" xmlns:p="http://schemas.openxmlformats.org/presentationml/2006/main" xmlns:r="http://schemas.openxmlformats.org/officeDocument/2006/relationships">
+  <p:cSld>
+    <p:spTree>
+      <p:nvGrpSpPr>
+        <p:cNvPr id="1" name=""/>
+        <p:cNvGrpSpPr/>
+        <p:nvPr/>
+      </p:nvGrpSpPr>
+      <p:grpSpPr>
+        <a:xfrm>
+          <a:off x="0" y="0"/>
+          <a:ext cx="0" cy="0"/>
+          <a:chOff x="0" y="0"/>
+          <a:chExt cx="0" cy="0"/>
+        </a:xfrm>
+      </p:grpSpPr>
+      <p:sp>
+        <p:nvSpPr>
+          <p:cNvPr id="2" name="Slide Image Placeholder 1"/>
+          <p:cNvSpPr>
+            <a:spLocks noGrp="1"/>
+          </p:cNvSpPr>
+          <p:nvPr>
+            <p:ph type="sldImg" idx="2"/>
+          </p:nvPr>
+        </p:nvSpPr>
+        <p:spPr/>
+      </p:sp>
+      <p:sp>
+        <p:nvSpPr>
+          <p:cNvPr id="3" name="Notes Placeholder 2"/>
+          <p:cNvSpPr>
+            <a:spLocks noGrp="1"/>
+          </p:cNvSpPr>
+          <p:nvPr>
+            <p:ph type="body" idx="1"/>
+          </p:nvPr>
+        </p:nvSpPr>
+        <p:spPr/>
+        <p:txBody>
+          <a:bodyPr/>
+          <a:lstStyle/>
+          <a:p>
+            <a:r>
+              <a:t>[25p · 사각지대 + 예산 최적화 · 45초]</a:t>
+            </a:r>
+          </a:p>
+          <a:p>
+            <a:r>
+              <a:t>사각지대 4곳 (흑석동 한정, p22 참고):</a:t>
+            </a:r>
+          </a:p>
+          <a:p>
+            <a:r>
+              <a:t>- TOP4 359.6m (최대), TOP3 322.9m, TOP5 234.8m, TOP8 153.8m</a:t>
+            </a:r>
+          </a:p>
+          <a:p/>
+          <a:p>
+            <a:r>
+              <a:t>예산 4천만원 배낭 최적화 (PuLP CBC, Optimal):</a:t>
+            </a:r>
+          </a:p>
+          <a:p>
+            <a:r>
+              <a:t>- 단가 800만원/개 → 최대 5개</a:t>
+            </a:r>
+          </a:p>
+          <a:p>
+            <a:r>
+              <a:t>- 200m 공간 분산 제약 (29쌍 active)</a:t>
+            </a:r>
+          </a:p>
+          <a:p>
+            <a:r>
+              <a:t>- 선정 5: 이수역·이수북·사당동·사당남·노량진</a:t>
+            </a:r>
+          </a:p>
+          <a:p>
+            <a:r>
+              <a:t>- 총 score 1.852, 예산 100% 사용</a:t>
+            </a:r>
+          </a:p>
+          <a:p/>
+          <a:p>
+            <a:r>
+              <a:t>핵심 차이: TOP10 단순 정렬 vs 배낭 최적화</a:t>
+            </a:r>
+          </a:p>
+          <a:p>
+            <a:r>
+              <a:t>- 단순 정렬: 사당-이수에 7곳 몰림</a:t>
+            </a:r>
+          </a:p>
+          <a:p>
+            <a:r>
+              <a:t>- 배낭: 200m 분산으로 노량진역도 자동 포함</a:t>
+            </a:r>
+          </a:p>
+        </p:txBody>
+      </p:sp>
+    </p:spTree>
+  </p:cSld>
+  <p:clrMapOvr>
+    <a:masterClrMapping/>
+  </p:clrMapOvr>
+</p:notes>
+</file>
+
+<file path=ppt/notesSlides/notesSlide26.xml><?xml version="1.0" encoding="utf-8"?>
+<p:notes xmlns:a="http://schemas.openxmlformats.org/drawingml/2006/main" xmlns:p="http://schemas.openxmlformats.org/presentationml/2006/main" xmlns:r="http://schemas.openxmlformats.org/officeDocument/2006/relationships">
+  <p:cSld>
+    <p:spTree>
+      <p:nvGrpSpPr>
+        <p:cNvPr id="1" name=""/>
+        <p:cNvGrpSpPr/>
+        <p:nvPr/>
+      </p:nvGrpSpPr>
+      <p:grpSpPr>
+        <a:xfrm>
+          <a:off x="0" y="0"/>
+          <a:ext cx="0" cy="0"/>
+          <a:chOff x="0" y="0"/>
+          <a:chExt cx="0" cy="0"/>
+        </a:xfrm>
+      </p:grpSpPr>
+      <p:sp>
+        <p:nvSpPr>
+          <p:cNvPr id="2" name="Slide Image Placeholder 1"/>
+          <p:cNvSpPr>
+            <a:spLocks noGrp="1"/>
+          </p:cNvSpPr>
+          <p:nvPr>
+            <p:ph type="sldImg" idx="2"/>
+          </p:nvPr>
+        </p:nvSpPr>
+        <p:spPr/>
+      </p:sp>
+      <p:sp>
+        <p:nvSpPr>
+          <p:cNvPr id="3" name="Notes Placeholder 2"/>
+          <p:cNvSpPr>
+            <a:spLocks noGrp="1"/>
+          </p:cNvSpPr>
+          <p:nvPr>
+            <p:ph type="body" idx="1"/>
+          </p:nvPr>
+        </p:nvSpPr>
+        <p:spPr/>
+        <p:txBody>
+          <a:bodyPr/>
+          <a:lstStyle/>
+          <a:p>
+            <a:r>
+              <a:t>[26p · 결론 · 45초]</a:t>
+            </a:r>
+          </a:p>
+          <a:p>
+            <a:r>
+              <a:t>한 줄 요약:</a:t>
+            </a:r>
+          </a:p>
+          <a:p>
+            <a:r>
+              <a:t>"DSM → DEM Converter 자산을 재활용해 그늘막 입지를</a:t>
+            </a:r>
+          </a:p>
+          <a:p>
+            <a:r>
+              <a:t> MCDA + CV + Self-consistency + Bayesian Opt + 배낭 최적화로 도출 →</a:t>
+            </a:r>
+          </a:p>
+          <a:p>
+            <a:r>
+              <a:t> 강건 입지 2 + 흑석동 사각지대 4 + 예산 4천만원 최적 배치 5"</a:t>
+            </a:r>
+          </a:p>
+          <a:p/>
+          <a:p>
+            <a:r>
+              <a:t>다음 단계:</a:t>
+            </a:r>
+          </a:p>
+          <a:p>
+            <a:r>
+              <a:t>- 서울 열린데이터 API 연결 (P0)</a:t>
+            </a:r>
+          </a:p>
+          <a:p>
+            <a:r>
+              <a:t>- 동작구 전 동 실측 그늘막</a:t>
+            </a:r>
+          </a:p>
+          <a:p>
+            <a:r>
+              <a:t>- CV-D 멀티모달 VLM (강의 40~42p Reason-then-Estimate)</a:t>
+            </a:r>
+          </a:p>
+          <a:p>
+            <a:r>
+              <a:t>- 타 자치구 확장 (BBOX·NGII 교체)</a:t>
+            </a:r>
+          </a:p>
+          <a:p/>
+          <a:p>
+            <a:r>
+              <a:t>감사합니다. 질문 받겠습니다.</a:t>
+            </a:r>
+          </a:p>
+          <a:p/>
+          <a:p>
+            <a:r>
+              <a:t>예상 질문:</a:t>
+            </a:r>
+          </a:p>
+          <a:p>
+            <a:r>
+              <a:t>- 타 자치구 적용? → BBOX·NGII 교체. 가중치는 BayesOpt 로 재튜닝</a:t>
+            </a:r>
+          </a:p>
+          <a:p>
+            <a:r>
+              <a:t>- 코드? → github.com/thgtot92/project_1 (MIT)</a:t>
+            </a:r>
+          </a:p>
+        </p:txBody>
+      </p:sp>
+    </p:spTree>
+  </p:cSld>
+  <p:clrMapOvr>
+    <a:masterClrMapping/>
+  </p:clrMapOvr>
+</p:notes>
+</file>
+
+<file path=ppt/notesSlides/notesSlide27.xml><?xml version="1.0" encoding="utf-8"?>
+<p:notes xmlns:a="http://schemas.openxmlformats.org/drawingml/2006/main" xmlns:p="http://schemas.openxmlformats.org/presentationml/2006/main" xmlns:r="http://schemas.openxmlformats.org/officeDocument/2006/relationships">
+  <p:cSld>
+    <p:spTree>
+      <p:nvGrpSpPr>
+        <p:cNvPr id="1" name=""/>
+        <p:cNvGrpSpPr/>
+        <p:nvPr/>
+      </p:nvGrpSpPr>
+      <p:grpSpPr>
+        <a:xfrm>
+          <a:off x="0" y="0"/>
+          <a:ext cx="0" cy="0"/>
+          <a:chOff x="0" y="0"/>
+          <a:chExt cx="0" cy="0"/>
+        </a:xfrm>
+      </p:grpSpPr>
+      <p:sp>
+        <p:nvSpPr>
+          <p:cNvPr id="2" name="Slide Image Placeholder 1"/>
+          <p:cNvSpPr>
+            <a:spLocks noGrp="1"/>
+          </p:cNvSpPr>
+          <p:nvPr>
+            <p:ph type="sldImg" idx="2"/>
+          </p:nvPr>
+        </p:nvSpPr>
+        <p:spPr/>
+      </p:sp>
+      <p:sp>
+        <p:nvSpPr>
+          <p:cNvPr id="3" name="Notes Placeholder 2"/>
+          <p:cNvSpPr>
+            <a:spLocks noGrp="1"/>
+          </p:cNvSpPr>
+          <p:nvPr>
+            <p:ph type="body" idx="1"/>
+          </p:nvPr>
+        </p:nvSpPr>
+        <p:spPr/>
+        <p:txBody>
+          <a:bodyPr/>
+          <a:lstStyle/>
+          <a:p>
+            <a:r>
+              <a:t>[27p · 첨부 자료 · 30초]</a:t>
+            </a:r>
+          </a:p>
+          <a:p>
+            <a:r>
+              <a:t>- output/heukseok_focus.html — 흑석동 인터랙티브 지도 (브라우저)</a:t>
+            </a:r>
+          </a:p>
+          <a:p>
+            <a:r>
+              <a:t>- 같은 폴더에 동봉 / 더블클릭으로 열림</a:t>
+            </a:r>
+          </a:p>
+          <a:p/>
+          <a:p>
+            <a:r>
+              <a:t>지도 레이어 (토글 가능):</a:t>
+            </a:r>
+          </a:p>
+          <a:p>
+            <a:r>
+              <a:t>- OSMnx 보행 도로 + 교차로 + 횡단보도</a:t>
+            </a:r>
+          </a:p>
+          <a:p>
+            <a:r>
+              <a:t>- NGII 실측 건물 3,775동 (층수별 색)</a:t>
+            </a:r>
+          </a:p>
+          <a:p>
+            <a:r>
+              <a:t>- 기존 그늘막 18개 (검정 우산)</a:t>
+            </a:r>
+          </a:p>
+          <a:p>
+            <a:r>
+              <a:t>- 수동 가중치 TOP10 (분홍 원)</a:t>
+            </a:r>
+          </a:p>
+          <a:p>
+            <a:r>
+              <a:t>- 학습 가중치 TOP10 (파란 별, BayesOpt 결과)</a:t>
+            </a:r>
+          </a:p>
+          <a:p>
+            <a:r>
+              <a:t>- 그림자 표준편차 (Self-consistency 5회)</a:t>
+            </a:r>
+          </a:p>
+          <a:p/>
+          <a:p>
+            <a:r>
+              <a:t>심사위원이 직접 토글하면서 검토 가능</a:t>
+            </a:r>
+          </a:p>
+        </p:txBody>
       </p:sp>
     </p:spTree>
   </p:cSld>
@@ -22892,6 +24250,791 @@
 </p:sld>
 </file>
 
+<file path=ppt/slides/slide27.xml><?xml version="1.0" encoding="utf-8"?>
+<p:sld xmlns:a="http://schemas.openxmlformats.org/drawingml/2006/main" xmlns:p="http://schemas.openxmlformats.org/presentationml/2006/main" xmlns:r="http://schemas.openxmlformats.org/officeDocument/2006/relationships">
+  <p:cSld>
+    <p:spTree>
+      <p:nvGrpSpPr>
+        <p:cNvPr id="1" name=""/>
+        <p:cNvGrpSpPr/>
+        <p:nvPr/>
+      </p:nvGrpSpPr>
+      <p:grpSpPr/>
+      <p:sp>
+        <p:nvSpPr>
+          <p:cNvPr id="2" name="Rectangle 1"/>
+          <p:cNvSpPr/>
+          <p:nvPr/>
+        </p:nvSpPr>
+        <p:spPr>
+          <a:xfrm>
+            <a:off x="0" y="0"/>
+            <a:ext cx="9144000" cy="5143500"/>
+          </a:xfrm>
+          <a:prstGeom prst="rect">
+            <a:avLst/>
+          </a:prstGeom>
+          <a:solidFill>
+            <a:srgbClr val="FFFFFF"/>
+          </a:solidFill>
+          <a:ln>
+            <a:noFill/>
+          </a:ln>
+        </p:spPr>
+        <p:style>
+          <a:lnRef idx="1">
+            <a:schemeClr val="accent1"/>
+          </a:lnRef>
+          <a:fillRef idx="3">
+            <a:schemeClr val="accent1"/>
+          </a:fillRef>
+          <a:effectRef idx="2">
+            <a:schemeClr val="accent1"/>
+          </a:effectRef>
+          <a:fontRef idx="minor">
+            <a:schemeClr val="lt1"/>
+          </a:fontRef>
+        </p:style>
+        <p:txBody>
+          <a:bodyPr rtlCol="0" anchor="ctr"/>
+          <a:lstStyle/>
+          <a:p>
+            <a:pPr algn="ctr"/>
+          </a:p>
+        </p:txBody>
+      </p:sp>
+      <p:sp>
+        <p:nvSpPr>
+          <p:cNvPr id="3" name="TextBox 2"/>
+          <p:cNvSpPr txBox="1"/>
+          <p:nvPr/>
+        </p:nvSpPr>
+        <p:spPr>
+          <a:xfrm>
+            <a:off x="621792" y="429768"/>
+            <a:ext cx="7909560" cy="219456"/>
+          </a:xfrm>
+          <a:prstGeom prst="rect">
+            <a:avLst/>
+          </a:prstGeom>
+          <a:noFill/>
+        </p:spPr>
+        <p:txBody>
+          <a:bodyPr wrap="square" lIns="0" tIns="0">
+            <a:spAutoFit/>
+          </a:bodyPr>
+          <a:lstStyle/>
+          <a:p>
+            <a:pPr algn="l"/>
+            <a:r>
+              <a:rPr sz="1000" b="0">
+                <a:solidFill>
+                  <a:srgbClr val="787774"/>
+                </a:solidFill>
+                <a:latin typeface="Noto Sans KR"/>
+              </a:rPr>
+              <a:t>첨부 자료</a:t>
+            </a:r>
+          </a:p>
+        </p:txBody>
+      </p:sp>
+      <p:sp>
+        <p:nvSpPr>
+          <p:cNvPr id="4" name="TextBox 3"/>
+          <p:cNvSpPr txBox="1"/>
+          <p:nvPr/>
+        </p:nvSpPr>
+        <p:spPr>
+          <a:xfrm>
+            <a:off x="621792" y="658368"/>
+            <a:ext cx="7909560" cy="411480"/>
+          </a:xfrm>
+          <a:prstGeom prst="rect">
+            <a:avLst/>
+          </a:prstGeom>
+          <a:noFill/>
+        </p:spPr>
+        <p:txBody>
+          <a:bodyPr wrap="square" lIns="0" tIns="0">
+            <a:spAutoFit/>
+          </a:bodyPr>
+          <a:lstStyle/>
+          <a:p>
+            <a:pPr algn="l"/>
+            <a:r>
+              <a:rPr sz="2000" b="1">
+                <a:solidFill>
+                  <a:srgbClr val="37352F"/>
+                </a:solidFill>
+                <a:latin typeface="Noto Sans KR"/>
+              </a:rPr>
+              <a:t>흑석동 인터랙티브 지도 — output/heukseok_focus.html</a:t>
+            </a:r>
+          </a:p>
+        </p:txBody>
+      </p:sp>
+      <p:sp>
+        <p:nvSpPr>
+          <p:cNvPr id="5" name="Rectangle 4"/>
+          <p:cNvSpPr/>
+          <p:nvPr/>
+        </p:nvSpPr>
+        <p:spPr>
+          <a:xfrm>
+            <a:off x="621792" y="1115568"/>
+            <a:ext cx="7909560" cy="9525"/>
+          </a:xfrm>
+          <a:prstGeom prst="rect">
+            <a:avLst/>
+          </a:prstGeom>
+          <a:solidFill>
+            <a:srgbClr val="E9E9E7"/>
+          </a:solidFill>
+          <a:ln>
+            <a:noFill/>
+          </a:ln>
+        </p:spPr>
+        <p:style>
+          <a:lnRef idx="1">
+            <a:schemeClr val="accent1"/>
+          </a:lnRef>
+          <a:fillRef idx="3">
+            <a:schemeClr val="accent1"/>
+          </a:fillRef>
+          <a:effectRef idx="2">
+            <a:schemeClr val="accent1"/>
+          </a:effectRef>
+          <a:fontRef idx="minor">
+            <a:schemeClr val="lt1"/>
+          </a:fontRef>
+        </p:style>
+        <p:txBody>
+          <a:bodyPr rtlCol="0" anchor="ctr"/>
+          <a:lstStyle/>
+          <a:p>
+            <a:pPr algn="ctr"/>
+          </a:p>
+        </p:txBody>
+      </p:sp>
+      <p:sp>
+        <p:nvSpPr>
+          <p:cNvPr id="6" name="TextBox 5"/>
+          <p:cNvSpPr txBox="1"/>
+          <p:nvPr/>
+        </p:nvSpPr>
+        <p:spPr>
+          <a:xfrm>
+            <a:off x="621792" y="1325880"/>
+            <a:ext cx="7909560" cy="365760"/>
+          </a:xfrm>
+          <a:prstGeom prst="rect">
+            <a:avLst/>
+          </a:prstGeom>
+          <a:noFill/>
+        </p:spPr>
+        <p:txBody>
+          <a:bodyPr wrap="square" lIns="0" tIns="0">
+            <a:spAutoFit/>
+          </a:bodyPr>
+          <a:lstStyle/>
+          <a:p>
+            <a:pPr algn="l"/>
+            <a:r>
+              <a:rPr sz="1000" b="0">
+                <a:solidFill>
+                  <a:srgbClr val="787774"/>
+                </a:solidFill>
+                <a:latin typeface="Noto Sans KR"/>
+              </a:rPr>
+              <a:t>본 PPTX 와 함께 동봉된 HTML 파일을 브라우저에서 열면 심사위원이 직접 레이어를 토글하며 검토할 수 있습니다.</a:t>
+            </a:r>
+          </a:p>
+        </p:txBody>
+      </p:sp>
+      <p:sp>
+        <p:nvSpPr>
+          <p:cNvPr id="7" name="Rounded Rectangle 6"/>
+          <p:cNvSpPr/>
+          <p:nvPr/>
+        </p:nvSpPr>
+        <p:spPr>
+          <a:xfrm>
+            <a:off x="621792" y="1828800"/>
+            <a:ext cx="3931920" cy="1645920"/>
+          </a:xfrm>
+          <a:prstGeom prst="roundRect">
+            <a:avLst>
+              <a:gd name="adj" fmla="val 8000"/>
+            </a:avLst>
+          </a:prstGeom>
+          <a:solidFill>
+            <a:srgbClr val="37352F"/>
+          </a:solidFill>
+          <a:ln>
+            <a:noFill/>
+          </a:ln>
+          <a:effectLst/>
+        </p:spPr>
+        <p:style>
+          <a:lnRef idx="1">
+            <a:schemeClr val="accent1"/>
+          </a:lnRef>
+          <a:fillRef idx="3">
+            <a:schemeClr val="accent1"/>
+          </a:fillRef>
+          <a:effectRef idx="2">
+            <a:schemeClr val="accent1"/>
+          </a:effectRef>
+          <a:fontRef idx="minor">
+            <a:schemeClr val="lt1"/>
+          </a:fontRef>
+        </p:style>
+        <p:txBody>
+          <a:bodyPr rtlCol="0" anchor="ctr"/>
+          <a:lstStyle/>
+          <a:p>
+            <a:pPr algn="ctr"/>
+          </a:p>
+        </p:txBody>
+      </p:sp>
+      <p:sp>
+        <p:nvSpPr>
+          <p:cNvPr id="8" name="TextBox 7"/>
+          <p:cNvSpPr txBox="1"/>
+          <p:nvPr/>
+        </p:nvSpPr>
+        <p:spPr>
+          <a:xfrm>
+            <a:off x="777240" y="1965960"/>
+            <a:ext cx="3657600" cy="274320"/>
+          </a:xfrm>
+          <a:prstGeom prst="rect">
+            <a:avLst/>
+          </a:prstGeom>
+          <a:noFill/>
+        </p:spPr>
+        <p:txBody>
+          <a:bodyPr wrap="square" lIns="0" tIns="0">
+            <a:spAutoFit/>
+          </a:bodyPr>
+          <a:lstStyle/>
+          <a:p>
+            <a:pPr algn="l"/>
+            <a:r>
+              <a:rPr sz="1100" b="1">
+                <a:solidFill>
+                  <a:srgbClr val="FFEE58"/>
+                </a:solidFill>
+                <a:latin typeface="Noto Sans KR"/>
+              </a:rPr>
+              <a:t>📎 첨부 파일</a:t>
+            </a:r>
+          </a:p>
+        </p:txBody>
+      </p:sp>
+      <p:sp>
+        <p:nvSpPr>
+          <p:cNvPr id="9" name="TextBox 8"/>
+          <p:cNvSpPr txBox="1"/>
+          <p:nvPr/>
+        </p:nvSpPr>
+        <p:spPr>
+          <a:xfrm>
+            <a:off x="777240" y="2331720"/>
+            <a:ext cx="3657600" cy="365760"/>
+          </a:xfrm>
+          <a:prstGeom prst="rect">
+            <a:avLst/>
+          </a:prstGeom>
+          <a:noFill/>
+        </p:spPr>
+        <p:txBody>
+          <a:bodyPr wrap="square" lIns="0" tIns="0">
+            <a:spAutoFit/>
+          </a:bodyPr>
+          <a:lstStyle/>
+          <a:p>
+            <a:pPr algn="l"/>
+            <a:r>
+              <a:rPr sz="1200" b="1">
+                <a:solidFill>
+                  <a:srgbClr val="FFFFFF"/>
+                </a:solidFill>
+                <a:latin typeface="Consolas"/>
+              </a:rPr>
+              <a:t>output/heukseok_focus.html</a:t>
+            </a:r>
+          </a:p>
+        </p:txBody>
+      </p:sp>
+      <p:sp>
+        <p:nvSpPr>
+          <p:cNvPr id="10" name="TextBox 9"/>
+          <p:cNvSpPr txBox="1"/>
+          <p:nvPr/>
+        </p:nvSpPr>
+        <p:spPr>
+          <a:xfrm>
+            <a:off x="777240" y="2788920"/>
+            <a:ext cx="3657600" cy="365760"/>
+          </a:xfrm>
+          <a:prstGeom prst="rect">
+            <a:avLst/>
+          </a:prstGeom>
+          <a:noFill/>
+        </p:spPr>
+        <p:txBody>
+          <a:bodyPr wrap="square" lIns="0" tIns="0">
+            <a:spAutoFit/>
+          </a:bodyPr>
+          <a:lstStyle/>
+          <a:p>
+            <a:pPr algn="l"/>
+            <a:r>
+              <a:rPr sz="900" b="0">
+                <a:solidFill>
+                  <a:srgbClr val="CCCCCC"/>
+                </a:solidFill>
+                <a:latin typeface="Noto Sans KR"/>
+              </a:rPr>
+              <a:t>약 7 MB · 단일 HTML (의존성 없음)</a:t>
+            </a:r>
+          </a:p>
+        </p:txBody>
+      </p:sp>
+      <p:sp>
+        <p:nvSpPr>
+          <p:cNvPr id="11" name="TextBox 10"/>
+          <p:cNvSpPr txBox="1"/>
+          <p:nvPr/>
+        </p:nvSpPr>
+        <p:spPr>
+          <a:xfrm>
+            <a:off x="777240" y="3063240"/>
+            <a:ext cx="3657600" cy="365760"/>
+          </a:xfrm>
+          <a:prstGeom prst="rect">
+            <a:avLst/>
+          </a:prstGeom>
+          <a:noFill/>
+        </p:spPr>
+        <p:txBody>
+          <a:bodyPr wrap="square" lIns="0" tIns="0">
+            <a:spAutoFit/>
+          </a:bodyPr>
+          <a:lstStyle/>
+          <a:p>
+            <a:pPr algn="l"/>
+            <a:r>
+              <a:rPr sz="900" b="0">
+                <a:solidFill>
+                  <a:srgbClr val="CCCCCC"/>
+                </a:solidFill>
+                <a:latin typeface="Noto Sans KR"/>
+              </a:rPr>
+              <a:t>더블클릭 → 기본 브라우저로 자동 열림</a:t>
+            </a:r>
+          </a:p>
+        </p:txBody>
+      </p:sp>
+      <p:sp>
+        <p:nvSpPr>
+          <p:cNvPr id="12" name="Rounded Rectangle 11"/>
+          <p:cNvSpPr/>
+          <p:nvPr/>
+        </p:nvSpPr>
+        <p:spPr>
+          <a:xfrm>
+            <a:off x="4736592" y="1828800"/>
+            <a:ext cx="3794760" cy="2560320"/>
+          </a:xfrm>
+          <a:prstGeom prst="roundRect">
+            <a:avLst>
+              <a:gd name="adj" fmla="val 8000"/>
+            </a:avLst>
+          </a:prstGeom>
+          <a:solidFill>
+            <a:srgbClr val="F7F6F3"/>
+          </a:solidFill>
+          <a:ln w="15875">
+            <a:solidFill>
+              <a:srgbClr val="2383E2"/>
+            </a:solidFill>
+          </a:ln>
+          <a:effectLst/>
+        </p:spPr>
+        <p:style>
+          <a:lnRef idx="1">
+            <a:schemeClr val="accent1"/>
+          </a:lnRef>
+          <a:fillRef idx="3">
+            <a:schemeClr val="accent1"/>
+          </a:fillRef>
+          <a:effectRef idx="2">
+            <a:schemeClr val="accent1"/>
+          </a:effectRef>
+          <a:fontRef idx="minor">
+            <a:schemeClr val="lt1"/>
+          </a:fontRef>
+        </p:style>
+        <p:txBody>
+          <a:bodyPr rtlCol="0" anchor="ctr"/>
+          <a:lstStyle/>
+          <a:p>
+            <a:pPr algn="ctr"/>
+          </a:p>
+        </p:txBody>
+      </p:sp>
+      <p:sp>
+        <p:nvSpPr>
+          <p:cNvPr id="13" name="TextBox 12"/>
+          <p:cNvSpPr txBox="1"/>
+          <p:nvPr/>
+        </p:nvSpPr>
+        <p:spPr>
+          <a:xfrm>
+            <a:off x="4873752" y="1920240"/>
+            <a:ext cx="3657600" cy="274320"/>
+          </a:xfrm>
+          <a:prstGeom prst="rect">
+            <a:avLst/>
+          </a:prstGeom>
+          <a:noFill/>
+        </p:spPr>
+        <p:txBody>
+          <a:bodyPr wrap="square" lIns="0" tIns="0">
+            <a:spAutoFit/>
+          </a:bodyPr>
+          <a:lstStyle/>
+          <a:p>
+            <a:pPr algn="l"/>
+            <a:r>
+              <a:rPr sz="1100" b="1">
+                <a:solidFill>
+                  <a:srgbClr val="2383E2"/>
+                </a:solidFill>
+                <a:latin typeface="Noto Sans KR"/>
+              </a:rPr>
+              <a:t>지도 레이어 (토글 가능)</a:t>
+            </a:r>
+          </a:p>
+        </p:txBody>
+      </p:sp>
+      <p:sp>
+        <p:nvSpPr>
+          <p:cNvPr id="14" name="TextBox 13"/>
+          <p:cNvSpPr txBox="1"/>
+          <p:nvPr/>
+        </p:nvSpPr>
+        <p:spPr>
+          <a:xfrm>
+            <a:off x="4873752" y="2194560"/>
+            <a:ext cx="3657600" cy="2194560"/>
+          </a:xfrm>
+          <a:prstGeom prst="rect">
+            <a:avLst/>
+          </a:prstGeom>
+          <a:noFill/>
+        </p:spPr>
+        <p:txBody>
+          <a:bodyPr wrap="square" lIns="0" tIns="0">
+            <a:spAutoFit/>
+          </a:bodyPr>
+          <a:lstStyle/>
+          <a:p>
+            <a:pPr>
+              <a:spcAft>
+                <a:spcPts val="400"/>
+              </a:spcAft>
+            </a:pPr>
+            <a:r>
+              <a:rPr sz="800" b="0">
+                <a:solidFill>
+                  <a:srgbClr val="37352F"/>
+                </a:solidFill>
+                <a:latin typeface="Noto Sans KR"/>
+              </a:rPr>
+              <a:t>•  OSMnx 보행 도로 + 교차로 + 횡단보도</a:t>
+            </a:r>
+          </a:p>
+          <a:p>
+            <a:pPr>
+              <a:spcAft>
+                <a:spcPts val="400"/>
+              </a:spcAft>
+            </a:pPr>
+            <a:r>
+              <a:rPr sz="800" b="0">
+                <a:solidFill>
+                  <a:srgbClr val="37352F"/>
+                </a:solidFill>
+                <a:latin typeface="Noto Sans KR"/>
+              </a:rPr>
+              <a:t>•  NGII 실측 건물 3,775동 (층수별 색)</a:t>
+            </a:r>
+          </a:p>
+          <a:p>
+            <a:pPr>
+              <a:spcAft>
+                <a:spcPts val="400"/>
+              </a:spcAft>
+            </a:pPr>
+            <a:r>
+              <a:rPr sz="800" b="0">
+                <a:solidFill>
+                  <a:srgbClr val="37352F"/>
+                </a:solidFill>
+                <a:latin typeface="Noto Sans KR"/>
+              </a:rPr>
+              <a:t>•  기존 그늘막 18개 (검정/진청 우산)</a:t>
+            </a:r>
+          </a:p>
+          <a:p>
+            <a:pPr>
+              <a:spcAft>
+                <a:spcPts val="400"/>
+              </a:spcAft>
+            </a:pPr>
+            <a:r>
+              <a:rPr sz="800" b="0">
+                <a:solidFill>
+                  <a:srgbClr val="37352F"/>
+                </a:solidFill>
+                <a:latin typeface="Noto Sans KR"/>
+              </a:rPr>
+              <a:t>•  수동 가중치 TOP10 (분홍 원)</a:t>
+            </a:r>
+          </a:p>
+          <a:p>
+            <a:pPr>
+              <a:spcAft>
+                <a:spcPts val="400"/>
+              </a:spcAft>
+            </a:pPr>
+            <a:r>
+              <a:rPr sz="800" b="0">
+                <a:solidFill>
+                  <a:srgbClr val="37352F"/>
+                </a:solidFill>
+                <a:latin typeface="Noto Sans KR"/>
+              </a:rPr>
+              <a:t>•  학습 가중치 TOP10 (파란 별, BayesOpt)</a:t>
+            </a:r>
+          </a:p>
+          <a:p>
+            <a:pPr>
+              <a:spcAft>
+                <a:spcPts val="400"/>
+              </a:spcAft>
+            </a:pPr>
+            <a:r>
+              <a:rPr sz="800" b="0">
+                <a:solidFill>
+                  <a:srgbClr val="37352F"/>
+                </a:solidFill>
+                <a:latin typeface="Noto Sans KR"/>
+              </a:rPr>
+              <a:t>•  그림자 표준편차 (Self-consistency 5회)</a:t>
+            </a:r>
+          </a:p>
+        </p:txBody>
+      </p:sp>
+      <p:sp>
+        <p:nvSpPr>
+          <p:cNvPr id="15" name="Rounded Rectangle 14"/>
+          <p:cNvSpPr/>
+          <p:nvPr/>
+        </p:nvSpPr>
+        <p:spPr>
+          <a:xfrm>
+            <a:off x="621792" y="3840480"/>
+            <a:ext cx="7909560" cy="777240"/>
+          </a:xfrm>
+          <a:prstGeom prst="roundRect">
+            <a:avLst>
+              <a:gd name="adj" fmla="val 8000"/>
+            </a:avLst>
+          </a:prstGeom>
+          <a:solidFill>
+            <a:srgbClr val="F0F8FF"/>
+          </a:solidFill>
+          <a:ln w="9525">
+            <a:solidFill>
+              <a:srgbClr val="2383E2"/>
+            </a:solidFill>
+          </a:ln>
+          <a:effectLst/>
+        </p:spPr>
+        <p:style>
+          <a:lnRef idx="1">
+            <a:schemeClr val="accent1"/>
+          </a:lnRef>
+          <a:fillRef idx="3">
+            <a:schemeClr val="accent1"/>
+          </a:fillRef>
+          <a:effectRef idx="2">
+            <a:schemeClr val="accent1"/>
+          </a:effectRef>
+          <a:fontRef idx="minor">
+            <a:schemeClr val="lt1"/>
+          </a:fontRef>
+        </p:style>
+        <p:txBody>
+          <a:bodyPr rtlCol="0" anchor="ctr"/>
+          <a:lstStyle/>
+          <a:p>
+            <a:pPr algn="ctr"/>
+          </a:p>
+        </p:txBody>
+      </p:sp>
+      <p:sp>
+        <p:nvSpPr>
+          <p:cNvPr id="16" name="TextBox 15"/>
+          <p:cNvSpPr txBox="1"/>
+          <p:nvPr/>
+        </p:nvSpPr>
+        <p:spPr>
+          <a:xfrm>
+            <a:off x="777240" y="3931920"/>
+            <a:ext cx="7589520" cy="274320"/>
+          </a:xfrm>
+          <a:prstGeom prst="rect">
+            <a:avLst/>
+          </a:prstGeom>
+          <a:noFill/>
+        </p:spPr>
+        <p:txBody>
+          <a:bodyPr wrap="square" lIns="0" tIns="0">
+            <a:spAutoFit/>
+          </a:bodyPr>
+          <a:lstStyle/>
+          <a:p>
+            <a:pPr algn="l"/>
+            <a:r>
+              <a:rPr sz="1000" b="1">
+                <a:solidFill>
+                  <a:srgbClr val="2383E2"/>
+                </a:solidFill>
+                <a:latin typeface="Noto Sans KR"/>
+              </a:rPr>
+              <a:t>💡 발표 직후 시연 가능 — 브라우저 창에 미리 열어두기 권장</a:t>
+            </a:r>
+          </a:p>
+        </p:txBody>
+      </p:sp>
+      <p:sp>
+        <p:nvSpPr>
+          <p:cNvPr id="17" name="TextBox 16"/>
+          <p:cNvSpPr txBox="1"/>
+          <p:nvPr/>
+        </p:nvSpPr>
+        <p:spPr>
+          <a:xfrm>
+            <a:off x="777240" y="4206240"/>
+            <a:ext cx="7589520" cy="365760"/>
+          </a:xfrm>
+          <a:prstGeom prst="rect">
+            <a:avLst/>
+          </a:prstGeom>
+          <a:noFill/>
+        </p:spPr>
+        <p:txBody>
+          <a:bodyPr wrap="square" lIns="0" tIns="0">
+            <a:spAutoFit/>
+          </a:bodyPr>
+          <a:lstStyle/>
+          <a:p>
+            <a:pPr algn="l"/>
+            <a:r>
+              <a:rPr sz="900" b="0">
+                <a:solidFill>
+                  <a:srgbClr val="37352F"/>
+                </a:solidFill>
+                <a:latin typeface="Noto Sans KR"/>
+              </a:rPr>
+              <a:t>사각지대(TOP4·3·5·8) 4곳을 지도에서 직접 확인 → 가장 가까운 기존 그늘막까지 거리 popup</a:t>
+            </a:r>
+          </a:p>
+        </p:txBody>
+      </p:sp>
+      <p:sp>
+        <p:nvSpPr>
+          <p:cNvPr id="18" name="TextBox 17"/>
+          <p:cNvSpPr txBox="1"/>
+          <p:nvPr/>
+        </p:nvSpPr>
+        <p:spPr>
+          <a:xfrm>
+            <a:off x="621792" y="4855464"/>
+            <a:ext cx="7909560" cy="210312"/>
+          </a:xfrm>
+          <a:prstGeom prst="rect">
+            <a:avLst/>
+          </a:prstGeom>
+          <a:noFill/>
+        </p:spPr>
+        <p:txBody>
+          <a:bodyPr wrap="square" lIns="0" tIns="0">
+            <a:spAutoFit/>
+          </a:bodyPr>
+          <a:lstStyle/>
+          <a:p>
+            <a:pPr algn="l"/>
+            <a:r>
+              <a:rPr sz="900" b="0">
+                <a:solidFill>
+                  <a:srgbClr val="9B9A97"/>
+                </a:solidFill>
+                <a:latin typeface="Noto Sans KR"/>
+              </a:rPr>
+              <a:t>동작구 그늘막 입지 분석 · 데이터기반 도시설계</a:t>
+            </a:r>
+          </a:p>
+        </p:txBody>
+      </p:sp>
+      <p:sp>
+        <p:nvSpPr>
+          <p:cNvPr id="19" name="TextBox 18"/>
+          <p:cNvSpPr txBox="1"/>
+          <p:nvPr/>
+        </p:nvSpPr>
+        <p:spPr>
+          <a:xfrm>
+            <a:off x="7836408" y="4855464"/>
+            <a:ext cx="685800" cy="210312"/>
+          </a:xfrm>
+          <a:prstGeom prst="rect">
+            <a:avLst/>
+          </a:prstGeom>
+          <a:noFill/>
+        </p:spPr>
+        <p:txBody>
+          <a:bodyPr wrap="square" lIns="0" tIns="0">
+            <a:spAutoFit/>
+          </a:bodyPr>
+          <a:lstStyle/>
+          <a:p>
+            <a:pPr algn="r"/>
+            <a:r>
+              <a:rPr sz="900" b="0">
+                <a:solidFill>
+                  <a:srgbClr val="9B9A97"/>
+                </a:solidFill>
+                <a:latin typeface="Noto Sans KR"/>
+              </a:rPr>
+              <a:t>27</a:t>
+            </a:r>
+          </a:p>
+        </p:txBody>
+      </p:sp>
+    </p:spTree>
+  </p:cSld>
+  <p:clrMapOvr>
+    <a:masterClrMapping/>
+  </p:clrMapOvr>
+</p:sld>
+</file>
+
 <file path=ppt/slides/slide3.xml><?xml version="1.0" encoding="utf-8"?>
 <p:sld xmlns:a="http://schemas.openxmlformats.org/drawingml/2006/main" xmlns:r="http://schemas.openxmlformats.org/officeDocument/2006/relationships" xmlns:mc="http://schemas.openxmlformats.org/markup-compatibility/2006" xmlns:mv="urn:schemas-microsoft-com:mac:vml" xmlns:p="http://schemas.openxmlformats.org/presentationml/2006/main" xmlns:c="http://schemas.openxmlformats.org/drawingml/2006/chart" xmlns:dgm="http://schemas.openxmlformats.org/drawingml/2006/diagram" xmlns:o="urn:schemas-microsoft-com:office:office" xmlns:v="urn:schemas-microsoft-com:vml" xmlns:pvml="urn:schemas-microsoft-com:office:powerpoint" xmlns:com="http://schemas.openxmlformats.org/drawingml/2006/compatibility" xmlns:p14="http://schemas.microsoft.com/office/powerpoint/2010/main" xmlns:p15="http://schemas.microsoft.com/office/powerpoint/2012/main" xmlns:ahyp="http://schemas.microsoft.com/office/drawing/2018/hyperlinkcolor">
   <p:cSld>

--- a/presentation/데이터기반_도시설계_기말_통합발표.pptx
+++ b/presentation/데이터기반_도시설계_기말_통합발표.pptx
@@ -2125,7 +2125,7 @@
           <a:p/>
           <a:p>
             <a:r>
-              <a:t>CV-DSM (Deep Umbra 영감):</a:t>
+              <a:t>CV-DSM (Deep Umbra 영감, 9시점으로 확장):</a:t>
             </a:r>
           </a:p>
           <a:p>
@@ -2135,12 +2135,17 @@
           </a:p>
           <a:p>
             <a:r>
-              <a:t>- 4시점 (10·12·14·16시) shadow union → 누적 비율</a:t>
-            </a:r>
-          </a:p>
-          <a:p>
-            <a:r>
-              <a:t>- 309 격자 평균 누적 0.157</a:t>
+              <a:t>- 9시점 (09~17시 1시간 간격) shadow union → 누적 비율 [기존 4시점에서 확장]</a:t>
+            </a:r>
+          </a:p>
+          <a:p>
+            <a:r>
+              <a:t>- 309 격자 평균 누적 0.148</a:t>
+            </a:r>
+          </a:p>
+          <a:p>
+            <a:r>
+              <a:t>- 시간 누적 정밀도 ↑ → 시나리오 간 분산 ↑ → 강건 입지 검증 더 엄격</a:t>
             </a:r>
           </a:p>
           <a:p/>
@@ -2172,7 +2177,17 @@
           <a:p/>
           <a:p>
             <a:r>
-              <a:t>예상 질문: 왜 풀 GAN 안 썼나? → 학습 시간·데이터 부담. ray-cast 로 같은 메시지</a:t>
+              <a:t>예상 질문:</a:t>
+            </a:r>
+          </a:p>
+          <a:p>
+            <a:r>
+              <a:t>- 왜 풀 GAN 안 썼나? → 학습 시간·데이터 부담. ray-cast 로 같은 메시지</a:t>
+            </a:r>
+          </a:p>
+          <a:p>
+            <a:r>
+              <a:t>- 왜 9시점? → 보행자 활동시간 (오전·오후 누적) 모두 반영, Deep Umbra 원논문 정신</a:t>
             </a:r>
           </a:p>
         </p:txBody>
@@ -2803,23 +2818,18 @@
           <a:lstStyle/>
           <a:p>
             <a:r>
-              <a:t>[27p · 첨부 자료 · 30초]</a:t>
-            </a:r>
-          </a:p>
-          <a:p>
-            <a:r>
-              <a:t>- output/heukseok_focus.html — 흑석동 인터랙티브 지도 (브라우저)</a:t>
-            </a:r>
-          </a:p>
-          <a:p>
-            <a:r>
-              <a:t>- 같은 폴더에 동봉 / 더블클릭으로 열림</a:t>
+              <a:t>[27p · 첨부 자료 · 45초]</a:t>
+            </a:r>
+          </a:p>
+          <a:p>
+            <a:r>
+              <a:t>두 개의 HTML 파일을 함께 동봉합니다:</a:t>
             </a:r>
           </a:p>
           <a:p/>
           <a:p>
             <a:r>
-              <a:t>지도 레이어 (토글 가능):</a:t>
+              <a:t>첨부 ① output/heukseok_focus.html (흑석동 인터랙티브 지도)</a:t>
             </a:r>
           </a:p>
           <a:p>
@@ -2829,33 +2839,60 @@
           </a:p>
           <a:p>
             <a:r>
-              <a:t>- NGII 실측 건물 3,775동 (층수별 색)</a:t>
-            </a:r>
-          </a:p>
-          <a:p>
-            <a:r>
-              <a:t>- 기존 그늘막 18개 (검정 우산)</a:t>
-            </a:r>
-          </a:p>
-          <a:p>
-            <a:r>
-              <a:t>- 수동 가중치 TOP10 (분홍 원)</a:t>
-            </a:r>
-          </a:p>
-          <a:p>
-            <a:r>
-              <a:t>- 학습 가중치 TOP10 (파란 별, BayesOpt 결과)</a:t>
-            </a:r>
-          </a:p>
-          <a:p>
-            <a:r>
-              <a:t>- 그림자 표준편차 (Self-consistency 5회)</a:t>
+              <a:t>- NGII 건물 3,775동 (층수별 색)</a:t>
+            </a:r>
+          </a:p>
+          <a:p>
+            <a:r>
+              <a:t>- 기존 그늘막 18개 + TOP10 수동/학습 비교</a:t>
+            </a:r>
+          </a:p>
+          <a:p>
+            <a:r>
+              <a:t>- 그림자 표준편차 (Self-consistency)</a:t>
             </a:r>
           </a:p>
           <a:p/>
           <a:p>
             <a:r>
-              <a:t>심사위원이 직접 토글하면서 검토 가능</a:t>
+              <a:t>첨부 ② output/report.html (자동 실험 보고서, NEW)</a:t>
+            </a:r>
+          </a:p>
+          <a:p>
+            <a:r>
+              <a:t>- 한 페이지에 모든 산출물 통합</a:t>
+            </a:r>
+          </a:p>
+          <a:p>
+            <a:r>
+              <a:t>- 요약 카드 + 시나리오 표 + 강건 입지 + 3대 구역 검증</a:t>
+            </a:r>
+          </a:p>
+          <a:p>
+            <a:r>
+              <a:t>- BayesOpt 가중치 비교표</a:t>
+            </a:r>
+          </a:p>
+          <a:p>
+            <a:r>
+              <a:t>- 4개 지도 iframe 임베드 (shade/scenarios/budget/heukseok)</a:t>
+            </a:r>
+          </a:p>
+          <a:p>
+            <a:r>
+              <a:t>- 산출물 파일 목록 19종 (크기 포함)</a:t>
+            </a:r>
+          </a:p>
+          <a:p/>
+          <a:p>
+            <a:r>
+              <a:t>자동 생성: scripts/build_report.py — 발표 직전 1초 실행으로 최신 상태 갱신 가능</a:t>
+            </a:r>
+          </a:p>
+          <a:p/>
+          <a:p>
+            <a:r>
+              <a:t>심사위원이 직접 토글하며 검토 가능 + 발표 직후 모든 결과를 한 화면에 보여줄 수 있음</a:t>
             </a:r>
           </a:p>
         </p:txBody>
@@ -18584,7 +18621,7 @@
                 </a:solidFill>
                 <a:latin typeface="Noto Sans KR"/>
               </a:rPr>
-              <a:t>•  4시점 (10·12·14·16시) shadow union → 누적 그림자 비율</a:t>
+              <a:t>•  9시점 (09~17시 1시간 간격) shadow union → 누적 그림자 비율  (NEW: 4→9 확장)</a:t>
             </a:r>
           </a:p>
           <a:p>
@@ -18600,7 +18637,23 @@
                 </a:solidFill>
                 <a:latin typeface="Noto Sans KR"/>
               </a:rPr>
-              <a:t>•  309 격자 평균 누적 그림자 0.157 → natural 피처</a:t>
+              <a:t>•  309 격자 평균 누적 그림자 0.148 → natural 피처</a:t>
+            </a:r>
+          </a:p>
+          <a:p>
+            <a:pPr>
+              <a:spcAft>
+                <a:spcPts val="400"/>
+              </a:spcAft>
+            </a:pPr>
+            <a:r>
+              <a:rPr sz="900" b="0">
+                <a:solidFill>
+                  <a:srgbClr val="37352F"/>
+                </a:solidFill>
+                <a:latin typeface="Noto Sans KR"/>
+              </a:rPr>
+              <a:t>•  시간 누적 정밀도 ↑ → 시나리오 간 분산 ↑ → 강건 입지 검증 더 엄격</a:t>
             </a:r>
           </a:p>
         </p:txBody>
@@ -24333,7 +24386,7 @@
                 </a:solidFill>
                 <a:latin typeface="Noto Sans KR"/>
               </a:rPr>
-              <a:t>첨부 자료</a:t>
+              <a:t>첨부 자료 · 자동 보고서</a:t>
             </a:r>
           </a:p>
         </p:txBody>
@@ -24368,7 +24421,7 @@
                 </a:solidFill>
                 <a:latin typeface="Noto Sans KR"/>
               </a:rPr>
-              <a:t>흑석동 인터랙티브 지도 — output/heukseok_focus.html</a:t>
+              <a:t>인터랙티브 지도 + 한 페이지 통합 보고서 (단일 HTML)</a:t>
             </a:r>
           </a:p>
         </p:txBody>
@@ -24425,7 +24478,7 @@
         <p:spPr>
           <a:xfrm>
             <a:off x="621792" y="1325880"/>
-            <a:ext cx="7909560" cy="365760"/>
+            <a:ext cx="7909560" cy="274320"/>
           </a:xfrm>
           <a:prstGeom prst="rect">
             <a:avLst/>
@@ -24446,7 +24499,7 @@
                 </a:solidFill>
                 <a:latin typeface="Noto Sans KR"/>
               </a:rPr>
-              <a:t>본 PPTX 와 함께 동봉된 HTML 파일을 브라우저에서 열면 심사위원이 직접 레이어를 토글하며 검토할 수 있습니다.</a:t>
+              <a:t>본 PPTX 와 함께 동봉되는 두 개의 HTML — 브라우저에서 열어 검토 가능.</a:t>
             </a:r>
           </a:p>
         </p:txBody>
@@ -24459,8 +24512,8 @@
         </p:nvSpPr>
         <p:spPr>
           <a:xfrm>
-            <a:off x="621792" y="1828800"/>
-            <a:ext cx="3931920" cy="1645920"/>
+            <a:off x="621792" y="1691640"/>
+            <a:ext cx="3931920" cy="2743200"/>
           </a:xfrm>
           <a:prstGeom prst="roundRect">
             <a:avLst>
@@ -24505,7 +24558,7 @@
         </p:nvSpPr>
         <p:spPr>
           <a:xfrm>
-            <a:off x="777240" y="1965960"/>
+            <a:off x="777240" y="1783080"/>
             <a:ext cx="3657600" cy="274320"/>
           </a:xfrm>
           <a:prstGeom prst="rect">
@@ -24527,7 +24580,7 @@
                 </a:solidFill>
                 <a:latin typeface="Noto Sans KR"/>
               </a:rPr>
-              <a:t>📎 첨부 파일</a:t>
+              <a:t>📎 첨부 ① 흑석동 인터랙티브 지도</a:t>
             </a:r>
           </a:p>
         </p:txBody>
@@ -24540,7 +24593,7 @@
         </p:nvSpPr>
         <p:spPr>
           <a:xfrm>
-            <a:off x="777240" y="2331720"/>
+            <a:off x="777240" y="2103120"/>
             <a:ext cx="3657600" cy="365760"/>
           </a:xfrm>
           <a:prstGeom prst="rect">
@@ -24556,7 +24609,7 @@
           <a:p>
             <a:pPr algn="l"/>
             <a:r>
-              <a:rPr sz="1200" b="1">
+              <a:rPr sz="1100" b="1">
                 <a:solidFill>
                   <a:srgbClr val="FFFFFF"/>
                 </a:solidFill>
@@ -24575,8 +24628,8 @@
         </p:nvSpPr>
         <p:spPr>
           <a:xfrm>
-            <a:off x="777240" y="2788920"/>
-            <a:ext cx="3657600" cy="365760"/>
+            <a:off x="777240" y="2423160"/>
+            <a:ext cx="3657600" cy="274320"/>
           </a:xfrm>
           <a:prstGeom prst="rect">
             <a:avLst/>
@@ -24597,7 +24650,7 @@
                 </a:solidFill>
                 <a:latin typeface="Noto Sans KR"/>
               </a:rPr>
-              <a:t>약 7 MB · 단일 HTML (의존성 없음)</a:t>
+              <a:t>지도 레이어 (토글):</a:t>
             </a:r>
           </a:p>
         </p:txBody>
@@ -24610,8 +24663,8 @@
         </p:nvSpPr>
         <p:spPr>
           <a:xfrm>
-            <a:off x="777240" y="3063240"/>
-            <a:ext cx="3657600" cy="365760"/>
+            <a:off x="777240" y="2697480"/>
+            <a:ext cx="3657600" cy="1645920"/>
           </a:xfrm>
           <a:prstGeom prst="rect">
             <a:avLst/>
@@ -24624,15 +24677,83 @@
           </a:bodyPr>
           <a:lstStyle/>
           <a:p>
-            <a:pPr algn="l"/>
-            <a:r>
-              <a:rPr sz="900" b="0">
-                <a:solidFill>
-                  <a:srgbClr val="CCCCCC"/>
-                </a:solidFill>
-                <a:latin typeface="Noto Sans KR"/>
-              </a:rPr>
-              <a:t>더블클릭 → 기본 브라우저로 자동 열림</a:t>
+            <a:pPr>
+              <a:spcAft>
+                <a:spcPts val="400"/>
+              </a:spcAft>
+            </a:pPr>
+            <a:r>
+              <a:rPr sz="800" b="0">
+                <a:solidFill>
+                  <a:srgbClr val="37352F"/>
+                </a:solidFill>
+                <a:latin typeface="Noto Sans KR"/>
+              </a:rPr>
+              <a:t>•  보행 도로 + 교차로 + 횡단보도 (OSMnx)</a:t>
+            </a:r>
+          </a:p>
+          <a:p>
+            <a:pPr>
+              <a:spcAft>
+                <a:spcPts val="400"/>
+              </a:spcAft>
+            </a:pPr>
+            <a:r>
+              <a:rPr sz="800" b="0">
+                <a:solidFill>
+                  <a:srgbClr val="37352F"/>
+                </a:solidFill>
+                <a:latin typeface="Noto Sans KR"/>
+              </a:rPr>
+              <a:t>•  NGII 건물 3,775동 (층수별 색)</a:t>
+            </a:r>
+          </a:p>
+          <a:p>
+            <a:pPr>
+              <a:spcAft>
+                <a:spcPts val="400"/>
+              </a:spcAft>
+            </a:pPr>
+            <a:r>
+              <a:rPr sz="800" b="0">
+                <a:solidFill>
+                  <a:srgbClr val="37352F"/>
+                </a:solidFill>
+                <a:latin typeface="Noto Sans KR"/>
+              </a:rPr>
+              <a:t>•  기존 그늘막 18개 (검정/진청 우산)</a:t>
+            </a:r>
+          </a:p>
+          <a:p>
+            <a:pPr>
+              <a:spcAft>
+                <a:spcPts val="400"/>
+              </a:spcAft>
+            </a:pPr>
+            <a:r>
+              <a:rPr sz="800" b="0">
+                <a:solidFill>
+                  <a:srgbClr val="37352F"/>
+                </a:solidFill>
+                <a:latin typeface="Noto Sans KR"/>
+              </a:rPr>
+              <a:t>•  수동 vs 학습 가중치 TOP10 비교</a:t>
+            </a:r>
+          </a:p>
+          <a:p>
+            <a:pPr>
+              <a:spcAft>
+                <a:spcPts val="400"/>
+              </a:spcAft>
+            </a:pPr>
+            <a:r>
+              <a:rPr sz="800" b="0">
+                <a:solidFill>
+                  <a:srgbClr val="37352F"/>
+                </a:solidFill>
+                <a:latin typeface="Noto Sans KR"/>
+              </a:rPr>
+              <a:t>•  그림자 표준편차 (Self-consistency)</a:t>
             </a:r>
           </a:p>
         </p:txBody>
@@ -24645,8 +24766,8 @@
         </p:nvSpPr>
         <p:spPr>
           <a:xfrm>
-            <a:off x="4736592" y="1828800"/>
-            <a:ext cx="3794760" cy="2560320"/>
+            <a:off x="4736592" y="1691640"/>
+            <a:ext cx="3794760" cy="2743200"/>
           </a:xfrm>
           <a:prstGeom prst="roundRect">
             <a:avLst>
@@ -24693,7 +24814,7 @@
         </p:nvSpPr>
         <p:spPr>
           <a:xfrm>
-            <a:off x="4873752" y="1920240"/>
+            <a:off x="4892040" y="1783080"/>
             <a:ext cx="3657600" cy="274320"/>
           </a:xfrm>
           <a:prstGeom prst="rect">
@@ -24715,7 +24836,7 @@
                 </a:solidFill>
                 <a:latin typeface="Noto Sans KR"/>
               </a:rPr>
-              <a:t>지도 레이어 (토글 가능)</a:t>
+              <a:t>📎 첨부 ② 자동 실험 보고서 (NEW)</a:t>
             </a:r>
           </a:p>
         </p:txBody>
@@ -24728,8 +24849,8 @@
         </p:nvSpPr>
         <p:spPr>
           <a:xfrm>
-            <a:off x="4873752" y="2194560"/>
-            <a:ext cx="3657600" cy="2194560"/>
+            <a:off x="4892040" y="2103120"/>
+            <a:ext cx="3657600" cy="365760"/>
           </a:xfrm>
           <a:prstGeom prst="rect">
             <a:avLst/>
@@ -24742,6 +24863,76 @@
           </a:bodyPr>
           <a:lstStyle/>
           <a:p>
+            <a:pPr algn="l"/>
+            <a:r>
+              <a:rPr sz="1100" b="1">
+                <a:solidFill>
+                  <a:srgbClr val="37352F"/>
+                </a:solidFill>
+                <a:latin typeface="Consolas"/>
+              </a:rPr>
+              <a:t>output/report.html</a:t>
+            </a:r>
+          </a:p>
+        </p:txBody>
+      </p:sp>
+      <p:sp>
+        <p:nvSpPr>
+          <p:cNvPr id="15" name="TextBox 14"/>
+          <p:cNvSpPr txBox="1"/>
+          <p:nvPr/>
+        </p:nvSpPr>
+        <p:spPr>
+          <a:xfrm>
+            <a:off x="4892040" y="2423160"/>
+            <a:ext cx="3657600" cy="274320"/>
+          </a:xfrm>
+          <a:prstGeom prst="rect">
+            <a:avLst/>
+          </a:prstGeom>
+          <a:noFill/>
+        </p:spPr>
+        <p:txBody>
+          <a:bodyPr wrap="square" lIns="0" tIns="0">
+            <a:spAutoFit/>
+          </a:bodyPr>
+          <a:lstStyle/>
+          <a:p>
+            <a:pPr algn="l"/>
+            <a:r>
+              <a:rPr sz="900" b="0">
+                <a:solidFill>
+                  <a:srgbClr val="787774"/>
+                </a:solidFill>
+                <a:latin typeface="Noto Sans KR"/>
+              </a:rPr>
+              <a:t>한 페이지에 모든 산출물 통합:</a:t>
+            </a:r>
+          </a:p>
+        </p:txBody>
+      </p:sp>
+      <p:sp>
+        <p:nvSpPr>
+          <p:cNvPr id="16" name="TextBox 15"/>
+          <p:cNvSpPr txBox="1"/>
+          <p:nvPr/>
+        </p:nvSpPr>
+        <p:spPr>
+          <a:xfrm>
+            <a:off x="4892040" y="2697480"/>
+            <a:ext cx="3657600" cy="1645920"/>
+          </a:xfrm>
+          <a:prstGeom prst="rect">
+            <a:avLst/>
+          </a:prstGeom>
+          <a:noFill/>
+        </p:spPr>
+        <p:txBody>
+          <a:bodyPr wrap="square" lIns="0" tIns="0">
+            <a:spAutoFit/>
+          </a:bodyPr>
+          <a:lstStyle/>
+          <a:p>
             <a:pPr>
               <a:spcAft>
                 <a:spcPts val="400"/>
@@ -24754,7 +24945,7 @@
                 </a:solidFill>
                 <a:latin typeface="Noto Sans KR"/>
               </a:rPr>
-              <a:t>•  OSMnx 보행 도로 + 교차로 + 횡단보도</a:t>
+              <a:t>•  요약 카드 4종 (강건/시나리오/배낭/산출물)</a:t>
             </a:r>
           </a:p>
           <a:p>
@@ -24770,7 +24961,7 @@
                 </a:solidFill>
                 <a:latin typeface="Noto Sans KR"/>
               </a:rPr>
-              <a:t>•  NGII 실측 건물 3,775동 (층수별 색)</a:t>
+              <a:t>•  시나리오 비교 표 + 강건 입지 카드</a:t>
             </a:r>
           </a:p>
           <a:p>
@@ -24786,7 +24977,7 @@
                 </a:solidFill>
                 <a:latin typeface="Noto Sans KR"/>
               </a:rPr>
-              <a:t>•  기존 그늘막 18개 (검정/진청 우산)</a:t>
+              <a:t>•  1차 발표 3대 구역 검증</a:t>
             </a:r>
           </a:p>
           <a:p>
@@ -24802,7 +24993,7 @@
                 </a:solidFill>
                 <a:latin typeface="Noto Sans KR"/>
               </a:rPr>
-              <a:t>•  수동 가중치 TOP10 (분홍 원)</a:t>
+              <a:t>•  BayesOpt 학습 가중치 비교표</a:t>
             </a:r>
           </a:p>
           <a:p>
@@ -24818,7 +25009,7 @@
                 </a:solidFill>
                 <a:latin typeface="Noto Sans KR"/>
               </a:rPr>
-              <a:t>•  학습 가중치 TOP10 (파란 별, BayesOpt)</a:t>
+              <a:t>•  4개 지도 iframe 임베드</a:t>
             </a:r>
           </a:p>
           <a:p>
@@ -24834,21 +25025,21 @@
                 </a:solidFill>
                 <a:latin typeface="Noto Sans KR"/>
               </a:rPr>
-              <a:t>•  그림자 표준편차 (Self-consistency 5회)</a:t>
-            </a:r>
-          </a:p>
-        </p:txBody>
-      </p:sp>
-      <p:sp>
-        <p:nvSpPr>
-          <p:cNvPr id="15" name="Rounded Rectangle 14"/>
+              <a:t>•  산출물 파일 목록 19종</a:t>
+            </a:r>
+          </a:p>
+        </p:txBody>
+      </p:sp>
+      <p:sp>
+        <p:nvSpPr>
+          <p:cNvPr id="17" name="Rounded Rectangle 16"/>
           <p:cNvSpPr/>
           <p:nvPr/>
         </p:nvSpPr>
         <p:spPr>
           <a:xfrm>
-            <a:off x="621792" y="3840480"/>
-            <a:ext cx="7909560" cy="777240"/>
+            <a:off x="621792" y="4498848"/>
+            <a:ext cx="7909560" cy="457200"/>
           </a:xfrm>
           <a:prstGeom prst="roundRect">
             <a:avLst>
@@ -24889,13 +25080,13 @@
       </p:sp>
       <p:sp>
         <p:nvSpPr>
-          <p:cNvPr id="16" name="TextBox 15"/>
+          <p:cNvPr id="18" name="TextBox 17"/>
           <p:cNvSpPr txBox="1"/>
           <p:nvPr/>
         </p:nvSpPr>
         <p:spPr>
           <a:xfrm>
-            <a:off x="777240" y="3931920"/>
+            <a:off x="777240" y="4572000"/>
             <a:ext cx="7589520" cy="274320"/>
           </a:xfrm>
           <a:prstGeom prst="rect">
@@ -24911,27 +25102,27 @@
           <a:p>
             <a:pPr algn="l"/>
             <a:r>
-              <a:rPr sz="1000" b="1">
+              <a:rPr sz="900" b="1">
                 <a:solidFill>
                   <a:srgbClr val="2383E2"/>
                 </a:solidFill>
                 <a:latin typeface="Noto Sans KR"/>
               </a:rPr>
-              <a:t>💡 발표 직후 시연 가능 — 브라우저 창에 미리 열어두기 권장</a:t>
-            </a:r>
-          </a:p>
-        </p:txBody>
-      </p:sp>
-      <p:sp>
-        <p:nvSpPr>
-          <p:cNvPr id="17" name="TextBox 16"/>
+              <a:t>💡 자동 생성: PYTHONPATH=. python scripts/build_report.py → output/report.html</a:t>
+            </a:r>
+          </a:p>
+        </p:txBody>
+      </p:sp>
+      <p:sp>
+        <p:nvSpPr>
+          <p:cNvPr id="19" name="TextBox 18"/>
           <p:cNvSpPr txBox="1"/>
           <p:nvPr/>
         </p:nvSpPr>
         <p:spPr>
           <a:xfrm>
-            <a:off x="777240" y="4206240"/>
-            <a:ext cx="7589520" cy="365760"/>
+            <a:off x="621792" y="4855464"/>
+            <a:ext cx="7909560" cy="210312"/>
           </a:xfrm>
           <a:prstGeom prst="rect">
             <a:avLst/>
@@ -24948,41 +25139,6 @@
             <a:r>
               <a:rPr sz="900" b="0">
                 <a:solidFill>
-                  <a:srgbClr val="37352F"/>
-                </a:solidFill>
-                <a:latin typeface="Noto Sans KR"/>
-              </a:rPr>
-              <a:t>사각지대(TOP4·3·5·8) 4곳을 지도에서 직접 확인 → 가장 가까운 기존 그늘막까지 거리 popup</a:t>
-            </a:r>
-          </a:p>
-        </p:txBody>
-      </p:sp>
-      <p:sp>
-        <p:nvSpPr>
-          <p:cNvPr id="18" name="TextBox 17"/>
-          <p:cNvSpPr txBox="1"/>
-          <p:nvPr/>
-        </p:nvSpPr>
-        <p:spPr>
-          <a:xfrm>
-            <a:off x="621792" y="4855464"/>
-            <a:ext cx="7909560" cy="210312"/>
-          </a:xfrm>
-          <a:prstGeom prst="rect">
-            <a:avLst/>
-          </a:prstGeom>
-          <a:noFill/>
-        </p:spPr>
-        <p:txBody>
-          <a:bodyPr wrap="square" lIns="0" tIns="0">
-            <a:spAutoFit/>
-          </a:bodyPr>
-          <a:lstStyle/>
-          <a:p>
-            <a:pPr algn="l"/>
-            <a:r>
-              <a:rPr sz="900" b="0">
-                <a:solidFill>
                   <a:srgbClr val="9B9A97"/>
                 </a:solidFill>
                 <a:latin typeface="Noto Sans KR"/>
@@ -24994,7 +25150,7 @@
       </p:sp>
       <p:sp>
         <p:nvSpPr>
-          <p:cNvPr id="19" name="TextBox 18"/>
+          <p:cNvPr id="20" name="TextBox 19"/>
           <p:cNvSpPr txBox="1"/>
           <p:nvPr/>
         </p:nvSpPr>

--- a/presentation/데이터기반_도시설계_기말_통합발표.pptx
+++ b/presentation/데이터기반_도시설계_기말_통합발표.pptx
@@ -2582,59 +2582,101 @@
           <a:lstStyle/>
           <a:p>
             <a:r>
-              <a:t>[25p · 사각지대 + 예산 최적화 · 45초]</a:t>
-            </a:r>
-          </a:p>
-          <a:p>
-            <a:r>
-              <a:t>사각지대 4곳 (흑석동 한정, p22 참고):</a:t>
-            </a:r>
-          </a:p>
-          <a:p>
-            <a:r>
-              <a:t>- TOP4 359.6m (최대), TOP3 322.9m, TOP5 234.8m, TOP8 153.8m</a:t>
+              <a:t>[25p · 흑석동 한정 예산 최적화 · 60초]</a:t>
+            </a:r>
+          </a:p>
+          <a:p>
+            <a:r>
+              <a:t>설정 변경 (사용자 요청):</a:t>
+            </a:r>
+          </a:p>
+          <a:p>
+            <a:r>
+              <a:t>- 영역: 동작구 전체 → 흑석동 한정</a:t>
+            </a:r>
+          </a:p>
+          <a:p>
+            <a:r>
+              <a:t>- 제약: 기존 그늘막 18개에서 50m 이내 격자 회피 (신규 위치만)</a:t>
+            </a:r>
+          </a:p>
+          <a:p>
+            <a:r>
+              <a:t>- 후보 풀: 752(흑석동 안) → 10(필터) → 7(그늘막 회피)</a:t>
             </a:r>
           </a:p>
           <a:p/>
           <a:p>
             <a:r>
-              <a:t>예산 4천만원 배낭 최적화 (PuLP CBC, Optimal):</a:t>
-            </a:r>
-          </a:p>
-          <a:p>
-            <a:r>
-              <a:t>- 단가 800만원/개 → 최대 5개</a:t>
-            </a:r>
-          </a:p>
-          <a:p>
-            <a:r>
-              <a:t>- 200m 공간 분산 제약 (29쌍 active)</a:t>
-            </a:r>
-          </a:p>
-          <a:p>
-            <a:r>
-              <a:t>- 선정 5: 이수역·이수북·사당동·사당남·노량진</a:t>
-            </a:r>
-          </a:p>
-          <a:p>
-            <a:r>
-              <a:t>- 총 score 1.852, 예산 100% 사용</a:t>
+              <a:t>배낭 ILP 결과 (PuLP CBC, Optimal):</a:t>
+            </a:r>
+          </a:p>
+          <a:p>
+            <a:r>
+              <a:t>- 예산 4천만원 / 단가 800만원 → 5개</a:t>
+            </a:r>
+          </a:p>
+          <a:p>
+            <a:r>
+              <a:t>- 200m 공간 분산 (1쌍 active)</a:t>
+            </a:r>
+          </a:p>
+          <a:p>
+            <a:r>
+              <a:t>- 솔버가 자동으로 사각지대 4 + 중간 1 선택</a:t>
+            </a:r>
+          </a:p>
+          <a:p>
+            <a:r>
+              <a:t>- 총 score 0.461, 예산 100% 사용</a:t>
             </a:r>
           </a:p>
           <a:p/>
           <a:p>
             <a:r>
-              <a:t>핵심 차이: TOP10 단순 정렬 vs 배낭 최적화</a:t>
-            </a:r>
-          </a:p>
-          <a:p>
-            <a:r>
-              <a:t>- 단순 정렬: 사당-이수에 7곳 몰림</a:t>
-            </a:r>
-          </a:p>
-          <a:p>
-            <a:r>
-              <a:t>- 배낭: 200m 분산으로 노량진역도 자동 포함</a:t>
+              <a:t>선정 5곳 (모두 사각지대·중간):</a:t>
+            </a:r>
+          </a:p>
+          <a:p>
+            <a:r>
+              <a:t>- #1 (37.49874, 126.95789) — 322.9m 사각지대</a:t>
+            </a:r>
+          </a:p>
+          <a:p>
+            <a:r>
+              <a:t>- #2 (37.49786, 126.96129) — 359.6m 최대 사각지대</a:t>
+            </a:r>
+          </a:p>
+          <a:p>
+            <a:r>
+              <a:t>- #3 (37.51138, 126.96120) — 234.8m 사각지대</a:t>
+            </a:r>
+          </a:p>
+          <a:p>
+            <a:r>
+              <a:t>- #4 (37.50146, 126.96014) — 51m 중간 (보강)</a:t>
+            </a:r>
+          </a:p>
+          <a:p>
+            <a:r>
+              <a:t>- #5 (37.50328, 126.96465) — 153.8m 사각지대</a:t>
+            </a:r>
+          </a:p>
+          <a:p/>
+          <a:p>
+            <a:r>
+              <a:t>핵심 메시지: 사각지대 분석 + 배낭 ILP 가 같은 답을 자동 합의 → 정책 신뢰도 ↑</a:t>
+            </a:r>
+          </a:p>
+          <a:p/>
+          <a:p>
+            <a:r>
+              <a:t>예상 질문:</a:t>
+            </a:r>
+          </a:p>
+          <a:p>
+            <a:r>
+              <a:t>- 왜 흑석동만? → 실측 그늘막 18개 라벨이 흑석동만 확보. 다른 동도 확보 시 확장 가능</a:t>
             </a:r>
           </a:p>
         </p:txBody>
@@ -22996,7 +23038,7 @@
                 </a:solidFill>
                 <a:latin typeface="Noto Sans KR"/>
               </a:rPr>
-              <a:t>사각지대 + 예산 최적화</a:t>
+              <a:t>흑석동 한정 예산 최적화</a:t>
             </a:r>
           </a:p>
         </p:txBody>
@@ -23031,7 +23073,7 @@
                 </a:solidFill>
                 <a:latin typeface="Noto Sans KR"/>
               </a:rPr>
-              <a:t>흑석동 사각지대 4곳 + 예산 4천만원 배낭 최적 배치 5곳</a:t>
+              <a:t>신규 위치만 (기존 그늘막 50m 회피) + 예산 4천만원 배낭 최적 배치 5곳</a:t>
             </a:r>
           </a:p>
         </p:txBody>
@@ -23088,7 +23130,7 @@
         <p:spPr>
           <a:xfrm>
             <a:off x="621792" y="1325880"/>
-            <a:ext cx="3840480" cy="2468880"/>
+            <a:ext cx="7909560" cy="502920"/>
           </a:xfrm>
           <a:prstGeom prst="roundRect">
             <a:avLst>
@@ -23096,12 +23138,10 @@
             </a:avLst>
           </a:prstGeom>
           <a:solidFill>
-            <a:srgbClr val="FFF4E5"/>
+            <a:srgbClr val="2383E2"/>
           </a:solidFill>
-          <a:ln w="15875">
-            <a:solidFill>
-              <a:srgbClr val="CB7B26"/>
-            </a:solidFill>
+          <a:ln>
+            <a:noFill/>
           </a:ln>
           <a:effectLst/>
         </p:spPr>
@@ -23135,8 +23175,8 @@
         </p:nvSpPr>
         <p:spPr>
           <a:xfrm>
-            <a:off x="777240" y="1417320"/>
-            <a:ext cx="3657600" cy="274320"/>
+            <a:off x="777240" y="1444752"/>
+            <a:ext cx="7589520" cy="274320"/>
           </a:xfrm>
           <a:prstGeom prst="rect">
             <a:avLst/>
@@ -23151,120 +23191,521 @@
           <a:p>
             <a:pPr algn="l"/>
             <a:r>
-              <a:rPr sz="1100" b="1">
-                <a:solidFill>
-                  <a:srgbClr val="CB7B26"/>
-                </a:solidFill>
-                <a:latin typeface="Noto Sans KR"/>
-              </a:rPr>
-              <a:t>흑석동 사각지대 TOP 4</a:t>
-            </a:r>
-          </a:p>
-        </p:txBody>
-      </p:sp>
-      <p:sp>
-        <p:nvSpPr>
-          <p:cNvPr id="8" name="TextBox 7"/>
-          <p:cNvSpPr txBox="1"/>
-          <p:nvPr/>
-        </p:nvSpPr>
-        <p:spPr>
-          <a:xfrm>
-            <a:off x="777240" y="1691640"/>
-            <a:ext cx="3657600" cy="2103120"/>
-          </a:xfrm>
-          <a:prstGeom prst="rect">
-            <a:avLst/>
-          </a:prstGeom>
-          <a:noFill/>
-        </p:spPr>
-        <p:txBody>
-          <a:bodyPr wrap="square" lIns="0" tIns="0">
-            <a:spAutoFit/>
-          </a:bodyPr>
-          <a:lstStyle/>
-          <a:p>
-            <a:pPr>
-              <a:spcAft>
-                <a:spcPts val="400"/>
-              </a:spcAft>
-            </a:pPr>
-            <a:r>
-              <a:rPr sz="800" b="0">
-                <a:solidFill>
-                  <a:srgbClr val="37352F"/>
-                </a:solidFill>
-                <a:latin typeface="Noto Sans KR"/>
-              </a:rPr>
-              <a:t>•  TOP4 (37.49786, 126.96129) — 359.6m  (최대)</a:t>
-            </a:r>
-          </a:p>
-          <a:p>
-            <a:pPr>
-              <a:spcAft>
-                <a:spcPts val="400"/>
-              </a:spcAft>
-            </a:pPr>
-            <a:r>
-              <a:rPr sz="800" b="0">
-                <a:solidFill>
-                  <a:srgbClr val="37352F"/>
-                </a:solidFill>
-                <a:latin typeface="Noto Sans KR"/>
-              </a:rPr>
-              <a:t>•  TOP3 (37.49874, 126.95789) — 322.9m</a:t>
-            </a:r>
-          </a:p>
-          <a:p>
-            <a:pPr>
-              <a:spcAft>
-                <a:spcPts val="400"/>
-              </a:spcAft>
-            </a:pPr>
-            <a:r>
-              <a:rPr sz="800" b="0">
-                <a:solidFill>
-                  <a:srgbClr val="37352F"/>
-                </a:solidFill>
-                <a:latin typeface="Noto Sans KR"/>
-              </a:rPr>
-              <a:t>•  TOP5 (37.51138, 126.96120) — 234.8m</a:t>
-            </a:r>
-          </a:p>
-          <a:p>
-            <a:pPr>
-              <a:spcAft>
-                <a:spcPts val="400"/>
-              </a:spcAft>
-            </a:pPr>
-            <a:r>
-              <a:rPr sz="800" b="0">
-                <a:solidFill>
-                  <a:srgbClr val="37352F"/>
-                </a:solidFill>
-                <a:latin typeface="Noto Sans KR"/>
-              </a:rPr>
-              <a:t>•  TOP8 (37.50328, 126.96465) — 153.8m</a:t>
-            </a:r>
-          </a:p>
-          <a:p>
-            <a:pPr>
-              <a:spcAft>
-                <a:spcPts val="400"/>
-              </a:spcAft>
-            </a:pPr>
-            <a:r>
-              <a:rPr sz="800" b="0">
-                <a:solidFill>
-                  <a:srgbClr val="37352F"/>
-                </a:solidFill>
-                <a:latin typeface="Noto Sans KR"/>
-              </a:rPr>
-              <a:t>•  기존 그늘막 18개와 비교 — 정책 어필 1순위</a:t>
-            </a:r>
-          </a:p>
-        </p:txBody>
-      </p:sp>
+              <a:rPr sz="1000" b="1">
+                <a:solidFill>
+                  <a:srgbClr val="FFFFFF"/>
+                </a:solidFill>
+                <a:latin typeface="Noto Sans KR"/>
+              </a:rPr>
+              <a:t>🎯 영역=흑석동 · 기존 그늘막 18개 50m 회피 · 후보 풀 752→10→7 · 선정 5 (예산 100%) · solver=Optimal</a:t>
+            </a:r>
+          </a:p>
+        </p:txBody>
+      </p:sp>
+      <p:graphicFrame>
+        <p:nvGraphicFramePr>
+          <p:cNvPr id="8" name="Table 7"/>
+          <p:cNvGraphicFramePr>
+            <a:graphicFrameLocks noGrp="1"/>
+          </p:cNvGraphicFramePr>
+          <p:nvPr/>
+        </p:nvGraphicFramePr>
+        <p:xfrm>
+          <a:off x="621792" y="2011680"/>
+          <a:ext cx="5989320" cy="1828800"/>
+        </p:xfrm>
+        <a:graphic>
+          <a:graphicData uri="http://schemas.openxmlformats.org/drawingml/2006/table">
+            <a:tbl>
+              <a:tblPr firstRow="1" bandRow="1">
+                <a:tableStyleId>{5C22544A-7EE6-4342-B048-85BDC9FD1C3A}</a:tableStyleId>
+              </a:tblPr>
+              <a:tblGrid>
+                <a:gridCol w="457200"/>
+                <a:gridCol w="2423160"/>
+                <a:gridCol w="914400"/>
+                <a:gridCol w="2194560"/>
+              </a:tblGrid>
+              <a:tr h="304800">
+                <a:tc>
+                  <a:txBody>
+                    <a:bodyPr/>
+                    <a:lstStyle/>
+                    <a:p>
+                      <a:r>
+                        <a:rPr sz="1000" b="1">
+                          <a:solidFill>
+                            <a:srgbClr val="FFFFFF"/>
+                          </a:solidFill>
+                          <a:latin typeface="Noto Sans KR"/>
+                        </a:rPr>
+                        <a:t>#</a:t>
+                      </a:r>
+                    </a:p>
+                  </a:txBody>
+                  <a:tcPr marT="36576" marB="36576" marL="73152">
+                    <a:solidFill>
+                      <a:srgbClr val="37352F"/>
+                    </a:solidFill>
+                  </a:tcPr>
+                </a:tc>
+                <a:tc>
+                  <a:txBody>
+                    <a:bodyPr/>
+                    <a:lstStyle/>
+                    <a:p>
+                      <a:r>
+                        <a:rPr sz="1000" b="1">
+                          <a:solidFill>
+                            <a:srgbClr val="FFFFFF"/>
+                          </a:solidFill>
+                          <a:latin typeface="Noto Sans KR"/>
+                        </a:rPr>
+                        <a:t>좌표 (lat, lon)</a:t>
+                      </a:r>
+                    </a:p>
+                  </a:txBody>
+                  <a:tcPr marT="36576" marB="36576" marL="73152">
+                    <a:solidFill>
+                      <a:srgbClr val="37352F"/>
+                    </a:solidFill>
+                  </a:tcPr>
+                </a:tc>
+                <a:tc>
+                  <a:txBody>
+                    <a:bodyPr/>
+                    <a:lstStyle/>
+                    <a:p>
+                      <a:r>
+                        <a:rPr sz="1000" b="1">
+                          <a:solidFill>
+                            <a:srgbClr val="FFFFFF"/>
+                          </a:solidFill>
+                          <a:latin typeface="Noto Sans KR"/>
+                        </a:rPr>
+                        <a:t>score</a:t>
+                      </a:r>
+                    </a:p>
+                  </a:txBody>
+                  <a:tcPr marT="36576" marB="36576" marL="73152">
+                    <a:solidFill>
+                      <a:srgbClr val="37352F"/>
+                    </a:solidFill>
+                  </a:tcPr>
+                </a:tc>
+                <a:tc>
+                  <a:txBody>
+                    <a:bodyPr/>
+                    <a:lstStyle/>
+                    <a:p>
+                      <a:r>
+                        <a:rPr sz="1000" b="1">
+                          <a:solidFill>
+                            <a:srgbClr val="FFFFFF"/>
+                          </a:solidFill>
+                          <a:latin typeface="Noto Sans KR"/>
+                        </a:rPr>
+                        <a:t>사각지대 거리</a:t>
+                      </a:r>
+                    </a:p>
+                  </a:txBody>
+                  <a:tcPr marT="36576" marB="36576" marL="73152">
+                    <a:solidFill>
+                      <a:srgbClr val="37352F"/>
+                    </a:solidFill>
+                  </a:tcPr>
+                </a:tc>
+              </a:tr>
+              <a:tr h="304800">
+                <a:tc>
+                  <a:txBody>
+                    <a:bodyPr/>
+                    <a:lstStyle/>
+                    <a:p>
+                      <a:r>
+                        <a:rPr sz="900" b="1">
+                          <a:solidFill>
+                            <a:srgbClr val="37352F"/>
+                          </a:solidFill>
+                          <a:latin typeface="Consolas"/>
+                        </a:rPr>
+                        <a:t>1</a:t>
+                      </a:r>
+                    </a:p>
+                  </a:txBody>
+                  <a:tcPr marT="36576" marB="36576" marL="73152"/>
+                </a:tc>
+                <a:tc>
+                  <a:txBody>
+                    <a:bodyPr/>
+                    <a:lstStyle/>
+                    <a:p>
+                      <a:r>
+                        <a:rPr sz="900" b="0">
+                          <a:solidFill>
+                            <a:srgbClr val="37352F"/>
+                          </a:solidFill>
+                          <a:latin typeface="Consolas"/>
+                        </a:rPr>
+                        <a:t>37.49874, 126.95789</a:t>
+                      </a:r>
+                    </a:p>
+                  </a:txBody>
+                  <a:tcPr marT="36576" marB="36576" marL="73152"/>
+                </a:tc>
+                <a:tc>
+                  <a:txBody>
+                    <a:bodyPr/>
+                    <a:lstStyle/>
+                    <a:p>
+                      <a:r>
+                        <a:rPr sz="900" b="0">
+                          <a:solidFill>
+                            <a:srgbClr val="37352F"/>
+                          </a:solidFill>
+                          <a:latin typeface="Consolas"/>
+                        </a:rPr>
+                        <a:t>0.134</a:t>
+                      </a:r>
+                    </a:p>
+                  </a:txBody>
+                  <a:tcPr marT="36576" marB="36576" marL="73152"/>
+                </a:tc>
+                <a:tc>
+                  <a:txBody>
+                    <a:bodyPr/>
+                    <a:lstStyle/>
+                    <a:p>
+                      <a:r>
+                        <a:rPr sz="900" b="1">
+                          <a:solidFill>
+                            <a:srgbClr val="E03E3E"/>
+                          </a:solidFill>
+                          <a:latin typeface="Noto Sans KR"/>
+                        </a:rPr>
+                        <a:t>322.9m  ⭐사각지대</a:t>
+                      </a:r>
+                    </a:p>
+                  </a:txBody>
+                  <a:tcPr marT="36576" marB="36576" marL="73152">
+                    <a:solidFill>
+                      <a:srgbClr val="FFF4E5"/>
+                    </a:solidFill>
+                  </a:tcPr>
+                </a:tc>
+              </a:tr>
+              <a:tr h="304800">
+                <a:tc>
+                  <a:txBody>
+                    <a:bodyPr/>
+                    <a:lstStyle/>
+                    <a:p>
+                      <a:r>
+                        <a:rPr sz="900" b="1">
+                          <a:solidFill>
+                            <a:srgbClr val="37352F"/>
+                          </a:solidFill>
+                          <a:latin typeface="Consolas"/>
+                        </a:rPr>
+                        <a:t>2</a:t>
+                      </a:r>
+                    </a:p>
+                  </a:txBody>
+                  <a:tcPr marT="36576" marB="36576" marL="73152"/>
+                </a:tc>
+                <a:tc>
+                  <a:txBody>
+                    <a:bodyPr/>
+                    <a:lstStyle/>
+                    <a:p>
+                      <a:r>
+                        <a:rPr sz="900" b="0">
+                          <a:solidFill>
+                            <a:srgbClr val="37352F"/>
+                          </a:solidFill>
+                          <a:latin typeface="Consolas"/>
+                        </a:rPr>
+                        <a:t>37.49786, 126.96129</a:t>
+                      </a:r>
+                    </a:p>
+                  </a:txBody>
+                  <a:tcPr marT="36576" marB="36576" marL="73152"/>
+                </a:tc>
+                <a:tc>
+                  <a:txBody>
+                    <a:bodyPr/>
+                    <a:lstStyle/>
+                    <a:p>
+                      <a:r>
+                        <a:rPr sz="900" b="0">
+                          <a:solidFill>
+                            <a:srgbClr val="37352F"/>
+                          </a:solidFill>
+                          <a:latin typeface="Consolas"/>
+                        </a:rPr>
+                        <a:t>0.107</a:t>
+                      </a:r>
+                    </a:p>
+                  </a:txBody>
+                  <a:tcPr marT="36576" marB="36576" marL="73152"/>
+                </a:tc>
+                <a:tc>
+                  <a:txBody>
+                    <a:bodyPr/>
+                    <a:lstStyle/>
+                    <a:p>
+                      <a:r>
+                        <a:rPr sz="900" b="1">
+                          <a:solidFill>
+                            <a:srgbClr val="E03E3E"/>
+                          </a:solidFill>
+                          <a:latin typeface="Noto Sans KR"/>
+                        </a:rPr>
+                        <a:t>359.6m  ⭐사각지대 (최대)</a:t>
+                      </a:r>
+                    </a:p>
+                  </a:txBody>
+                  <a:tcPr marT="36576" marB="36576" marL="73152">
+                    <a:solidFill>
+                      <a:srgbClr val="FFF4E5"/>
+                    </a:solidFill>
+                  </a:tcPr>
+                </a:tc>
+              </a:tr>
+              <a:tr h="304800">
+                <a:tc>
+                  <a:txBody>
+                    <a:bodyPr/>
+                    <a:lstStyle/>
+                    <a:p>
+                      <a:r>
+                        <a:rPr sz="900" b="1">
+                          <a:solidFill>
+                            <a:srgbClr val="37352F"/>
+                          </a:solidFill>
+                          <a:latin typeface="Consolas"/>
+                        </a:rPr>
+                        <a:t>3</a:t>
+                      </a:r>
+                    </a:p>
+                  </a:txBody>
+                  <a:tcPr marT="36576" marB="36576" marL="73152"/>
+                </a:tc>
+                <a:tc>
+                  <a:txBody>
+                    <a:bodyPr/>
+                    <a:lstStyle/>
+                    <a:p>
+                      <a:r>
+                        <a:rPr sz="900" b="0">
+                          <a:solidFill>
+                            <a:srgbClr val="37352F"/>
+                          </a:solidFill>
+                          <a:latin typeface="Consolas"/>
+                        </a:rPr>
+                        <a:t>37.51138, 126.96120</a:t>
+                      </a:r>
+                    </a:p>
+                  </a:txBody>
+                  <a:tcPr marT="36576" marB="36576" marL="73152"/>
+                </a:tc>
+                <a:tc>
+                  <a:txBody>
+                    <a:bodyPr/>
+                    <a:lstStyle/>
+                    <a:p>
+                      <a:r>
+                        <a:rPr sz="900" b="0">
+                          <a:solidFill>
+                            <a:srgbClr val="37352F"/>
+                          </a:solidFill>
+                          <a:latin typeface="Consolas"/>
+                        </a:rPr>
+                        <a:t>0.094</a:t>
+                      </a:r>
+                    </a:p>
+                  </a:txBody>
+                  <a:tcPr marT="36576" marB="36576" marL="73152"/>
+                </a:tc>
+                <a:tc>
+                  <a:txBody>
+                    <a:bodyPr/>
+                    <a:lstStyle/>
+                    <a:p>
+                      <a:r>
+                        <a:rPr sz="900" b="1">
+                          <a:solidFill>
+                            <a:srgbClr val="E03E3E"/>
+                          </a:solidFill>
+                          <a:latin typeface="Noto Sans KR"/>
+                        </a:rPr>
+                        <a:t>234.8m  ⭐사각지대</a:t>
+                      </a:r>
+                    </a:p>
+                  </a:txBody>
+                  <a:tcPr marT="36576" marB="36576" marL="73152">
+                    <a:solidFill>
+                      <a:srgbClr val="FFF4E5"/>
+                    </a:solidFill>
+                  </a:tcPr>
+                </a:tc>
+              </a:tr>
+              <a:tr h="304800">
+                <a:tc>
+                  <a:txBody>
+                    <a:bodyPr/>
+                    <a:lstStyle/>
+                    <a:p>
+                      <a:r>
+                        <a:rPr sz="900" b="1">
+                          <a:solidFill>
+                            <a:srgbClr val="37352F"/>
+                          </a:solidFill>
+                          <a:latin typeface="Consolas"/>
+                        </a:rPr>
+                        <a:t>4</a:t>
+                      </a:r>
+                    </a:p>
+                  </a:txBody>
+                  <a:tcPr marT="36576" marB="36576" marL="73152"/>
+                </a:tc>
+                <a:tc>
+                  <a:txBody>
+                    <a:bodyPr/>
+                    <a:lstStyle/>
+                    <a:p>
+                      <a:r>
+                        <a:rPr sz="900" b="0">
+                          <a:solidFill>
+                            <a:srgbClr val="37352F"/>
+                          </a:solidFill>
+                          <a:latin typeface="Consolas"/>
+                        </a:rPr>
+                        <a:t>37.50146, 126.96014</a:t>
+                      </a:r>
+                    </a:p>
+                  </a:txBody>
+                  <a:tcPr marT="36576" marB="36576" marL="73152"/>
+                </a:tc>
+                <a:tc>
+                  <a:txBody>
+                    <a:bodyPr/>
+                    <a:lstStyle/>
+                    <a:p>
+                      <a:r>
+                        <a:rPr sz="900" b="0">
+                          <a:solidFill>
+                            <a:srgbClr val="37352F"/>
+                          </a:solidFill>
+                          <a:latin typeface="Consolas"/>
+                        </a:rPr>
+                        <a:t>0.069</a:t>
+                      </a:r>
+                    </a:p>
+                  </a:txBody>
+                  <a:tcPr marT="36576" marB="36576" marL="73152"/>
+                </a:tc>
+                <a:tc>
+                  <a:txBody>
+                    <a:bodyPr/>
+                    <a:lstStyle/>
+                    <a:p>
+                      <a:r>
+                        <a:rPr sz="900" b="0">
+                          <a:solidFill>
+                            <a:srgbClr val="37352F"/>
+                          </a:solidFill>
+                          <a:latin typeface="Noto Sans KR"/>
+                        </a:rPr>
+                        <a:t>51.0m   ○ 중간</a:t>
+                      </a:r>
+                    </a:p>
+                  </a:txBody>
+                  <a:tcPr marT="36576" marB="36576" marL="73152"/>
+                </a:tc>
+              </a:tr>
+              <a:tr h="304800">
+                <a:tc>
+                  <a:txBody>
+                    <a:bodyPr/>
+                    <a:lstStyle/>
+                    <a:p>
+                      <a:r>
+                        <a:rPr sz="900" b="1">
+                          <a:solidFill>
+                            <a:srgbClr val="37352F"/>
+                          </a:solidFill>
+                          <a:latin typeface="Consolas"/>
+                        </a:rPr>
+                        <a:t>5</a:t>
+                      </a:r>
+                    </a:p>
+                  </a:txBody>
+                  <a:tcPr marT="36576" marB="36576" marL="73152"/>
+                </a:tc>
+                <a:tc>
+                  <a:txBody>
+                    <a:bodyPr/>
+                    <a:lstStyle/>
+                    <a:p>
+                      <a:r>
+                        <a:rPr sz="900" b="0">
+                          <a:solidFill>
+                            <a:srgbClr val="37352F"/>
+                          </a:solidFill>
+                          <a:latin typeface="Consolas"/>
+                        </a:rPr>
+                        <a:t>37.50328, 126.96465</a:t>
+                      </a:r>
+                    </a:p>
+                  </a:txBody>
+                  <a:tcPr marT="36576" marB="36576" marL="73152"/>
+                </a:tc>
+                <a:tc>
+                  <a:txBody>
+                    <a:bodyPr/>
+                    <a:lstStyle/>
+                    <a:p>
+                      <a:r>
+                        <a:rPr sz="900" b="0">
+                          <a:solidFill>
+                            <a:srgbClr val="37352F"/>
+                          </a:solidFill>
+                          <a:latin typeface="Consolas"/>
+                        </a:rPr>
+                        <a:t>0.057</a:t>
+                      </a:r>
+                    </a:p>
+                  </a:txBody>
+                  <a:tcPr marT="36576" marB="36576" marL="73152"/>
+                </a:tc>
+                <a:tc>
+                  <a:txBody>
+                    <a:bodyPr/>
+                    <a:lstStyle/>
+                    <a:p>
+                      <a:r>
+                        <a:rPr sz="900" b="1">
+                          <a:solidFill>
+                            <a:srgbClr val="E03E3E"/>
+                          </a:solidFill>
+                          <a:latin typeface="Noto Sans KR"/>
+                        </a:rPr>
+                        <a:t>153.8m  ⭐사각지대</a:t>
+                      </a:r>
+                    </a:p>
+                  </a:txBody>
+                  <a:tcPr marT="36576" marB="36576" marL="73152">
+                    <a:solidFill>
+                      <a:srgbClr val="FFF4E5"/>
+                    </a:solidFill>
+                  </a:tcPr>
+                </a:tc>
+              </a:tr>
+            </a:tbl>
+          </a:graphicData>
+        </a:graphic>
+      </p:graphicFrame>
       <p:sp>
         <p:nvSpPr>
           <p:cNvPr id="9" name="Rounded Rectangle 8"/>
@@ -23273,8 +23714,8 @@
         </p:nvSpPr>
         <p:spPr>
           <a:xfrm>
-            <a:off x="5212080" y="1325880"/>
-            <a:ext cx="3319272" cy="2468880"/>
+            <a:off x="6035040" y="2011680"/>
+            <a:ext cx="2496312" cy="1828800"/>
           </a:xfrm>
           <a:prstGeom prst="roundRect">
             <a:avLst>
@@ -23321,8 +23762,8 @@
         </p:nvSpPr>
         <p:spPr>
           <a:xfrm>
-            <a:off x="5349240" y="1417320"/>
-            <a:ext cx="3108960" cy="274320"/>
+            <a:off x="6172200" y="2103120"/>
+            <a:ext cx="2286000" cy="274320"/>
           </a:xfrm>
           <a:prstGeom prst="rect">
             <a:avLst/>
@@ -23337,13 +23778,13 @@
           <a:p>
             <a:pPr algn="l"/>
             <a:r>
-              <a:rPr sz="1100" b="1">
+              <a:rPr sz="1000" b="1">
                 <a:solidFill>
                   <a:srgbClr val="2383E2"/>
                 </a:solidFill>
                 <a:latin typeface="Noto Sans KR"/>
               </a:rPr>
-              <a:t>예산 4천만원 최적 배치</a:t>
+              <a:t>🎯 자동 합의</a:t>
             </a:r>
           </a:p>
         </p:txBody>
@@ -23356,8 +23797,8 @@
         </p:nvSpPr>
         <p:spPr>
           <a:xfrm>
-            <a:off x="5349240" y="1691640"/>
-            <a:ext cx="3108960" cy="274320"/>
+            <a:off x="6172200" y="2377440"/>
+            <a:ext cx="2286000" cy="1371600"/>
           </a:xfrm>
           <a:prstGeom prst="rect">
             <a:avLst/>
@@ -23370,40 +23811,21 @@
           </a:bodyPr>
           <a:lstStyle/>
           <a:p>
-            <a:pPr algn="l"/>
+            <a:pPr>
+              <a:spcAft>
+                <a:spcPts val="400"/>
+              </a:spcAft>
+            </a:pPr>
             <a:r>
               <a:rPr sz="800" b="0">
                 <a:solidFill>
-                  <a:srgbClr val="787774"/>
-                </a:solidFill>
-                <a:latin typeface="Noto Sans KR"/>
-              </a:rPr>
-              <a:t>PuLP 정수 선형계획법 (CBC, Optimal)</a:t>
-            </a:r>
-          </a:p>
-        </p:txBody>
-      </p:sp>
-      <p:sp>
-        <p:nvSpPr>
-          <p:cNvPr id="12" name="TextBox 11"/>
-          <p:cNvSpPr txBox="1"/>
-          <p:nvPr/>
-        </p:nvSpPr>
-        <p:spPr>
-          <a:xfrm>
-            <a:off x="5349240" y="1965960"/>
-            <a:ext cx="3108960" cy="1828800"/>
-          </a:xfrm>
-          <a:prstGeom prst="rect">
-            <a:avLst/>
-          </a:prstGeom>
-          <a:noFill/>
-        </p:spPr>
-        <p:txBody>
-          <a:bodyPr wrap="square" lIns="0" tIns="0">
-            <a:spAutoFit/>
-          </a:bodyPr>
-          <a:lstStyle/>
+                  <a:srgbClr val="37352F"/>
+                </a:solidFill>
+                <a:latin typeface="Noto Sans KR"/>
+              </a:rPr>
+              <a:t>•  선정 5 = 사각지대 4 + 중간 1</a:t>
+            </a:r>
+          </a:p>
           <a:p>
             <a:pPr>
               <a:spcAft>
@@ -23417,7 +23839,7 @@
                 </a:solidFill>
                 <a:latin typeface="Noto Sans KR"/>
               </a:rPr>
-              <a:t>•  단가 800만원/개 → 최대 5개</a:t>
+              <a:t>•  배낭 ILP 가 사각지대 분석</a:t>
             </a:r>
           </a:p>
           <a:p>
@@ -23433,7 +23855,7 @@
                 </a:solidFill>
                 <a:latin typeface="Noto Sans KR"/>
               </a:rPr>
-              <a:t>•  공간 분산 ≥ 200m (29쌍 제약)</a:t>
+              <a:t>•  결과를 자동으로 합의</a:t>
             </a:r>
           </a:p>
           <a:p>
@@ -23449,37 +23871,21 @@
                 </a:solidFill>
                 <a:latin typeface="Noto Sans KR"/>
               </a:rPr>
-              <a:t>•  선정 5: 이수역·이수북·사당동·사당남·노량진</a:t>
-            </a:r>
-          </a:p>
-          <a:p>
-            <a:pPr>
-              <a:spcAft>
-                <a:spcPts val="400"/>
-              </a:spcAft>
-            </a:pPr>
-            <a:r>
-              <a:rPr sz="800" b="0">
-                <a:solidFill>
-                  <a:srgbClr val="37352F"/>
-                </a:solidFill>
-                <a:latin typeface="Noto Sans KR"/>
-              </a:rPr>
-              <a:t>•  총 score 1.852, 예산 100% 사용</a:t>
-            </a:r>
-          </a:p>
-        </p:txBody>
-      </p:sp>
-      <p:sp>
-        <p:nvSpPr>
-          <p:cNvPr id="13" name="Rounded Rectangle 12"/>
+              <a:t>•  정책 어필 포인트 완성</a:t>
+            </a:r>
+          </a:p>
+        </p:txBody>
+      </p:sp>
+      <p:sp>
+        <p:nvSpPr>
+          <p:cNvPr id="12" name="Rounded Rectangle 11"/>
           <p:cNvSpPr/>
           <p:nvPr/>
         </p:nvSpPr>
         <p:spPr>
           <a:xfrm>
-            <a:off x="621792" y="3931920"/>
-            <a:ext cx="7909560" cy="685800"/>
+            <a:off x="621792" y="3977639"/>
+            <a:ext cx="7909560" cy="777240"/>
           </a:xfrm>
           <a:prstGeom prst="roundRect">
             <a:avLst>
@@ -23518,13 +23924,48 @@
       </p:sp>
       <p:sp>
         <p:nvSpPr>
+          <p:cNvPr id="13" name="TextBox 12"/>
+          <p:cNvSpPr txBox="1"/>
+          <p:nvPr/>
+        </p:nvSpPr>
+        <p:spPr>
+          <a:xfrm>
+            <a:off x="777240" y="4069080"/>
+            <a:ext cx="7589520" cy="274320"/>
+          </a:xfrm>
+          <a:prstGeom prst="rect">
+            <a:avLst/>
+          </a:prstGeom>
+          <a:noFill/>
+        </p:spPr>
+        <p:txBody>
+          <a:bodyPr wrap="square" lIns="0" tIns="0">
+            <a:spAutoFit/>
+          </a:bodyPr>
+          <a:lstStyle/>
+          <a:p>
+            <a:pPr algn="l"/>
+            <a:r>
+              <a:rPr sz="1000" b="1">
+                <a:solidFill>
+                  <a:srgbClr val="FFEE58"/>
+                </a:solidFill>
+                <a:latin typeface="Noto Sans KR"/>
+              </a:rPr>
+              <a:t>🔑 신규 위치만 (기존 18개 회피) → 예산 4천만원으로 흑석동 사각지대 5곳 완전 커버</a:t>
+            </a:r>
+          </a:p>
+        </p:txBody>
+      </p:sp>
+      <p:sp>
+        <p:nvSpPr>
           <p:cNvPr id="14" name="TextBox 13"/>
           <p:cNvSpPr txBox="1"/>
           <p:nvPr/>
         </p:nvSpPr>
         <p:spPr>
           <a:xfrm>
-            <a:off x="777240" y="4023360"/>
+            <a:off x="777240" y="4343400"/>
             <a:ext cx="7589520" cy="274320"/>
           </a:xfrm>
           <a:prstGeom prst="rect">
@@ -23540,13 +23981,13 @@
           <a:p>
             <a:pPr algn="l"/>
             <a:r>
-              <a:rPr sz="1000" b="1">
-                <a:solidFill>
-                  <a:srgbClr val="FFEE58"/>
-                </a:solidFill>
-                <a:latin typeface="Noto Sans KR"/>
-              </a:rPr>
-              <a:t>TOP10 단순 정렬 vs 배낭 최적화 — 200m 분산 제약으로 같은 곳 몰림 방지</a:t>
+              <a:rPr sz="900" b="0">
+                <a:solidFill>
+                  <a:srgbClr val="FFFFFF"/>
+                </a:solidFill>
+                <a:latin typeface="Noto Sans KR"/>
+              </a:rPr>
+              <a:t>200m 공간 분산 제약 → 한 구역에 몰리지 않고 흑석동 전역에 균형 배치</a:t>
             </a:r>
           </a:p>
         </p:txBody>
@@ -23559,8 +24000,8 @@
         </p:nvSpPr>
         <p:spPr>
           <a:xfrm>
-            <a:off x="777240" y="4297680"/>
-            <a:ext cx="7589520" cy="274320"/>
+            <a:off x="621792" y="4855464"/>
+            <a:ext cx="7909560" cy="210312"/>
           </a:xfrm>
           <a:prstGeom prst="rect">
             <a:avLst/>
@@ -23577,11 +24018,11 @@
             <a:r>
               <a:rPr sz="900" b="0">
                 <a:solidFill>
-                  <a:srgbClr val="FFFFFF"/>
-                </a:solidFill>
-                <a:latin typeface="Noto Sans KR"/>
-              </a:rPr>
-              <a:t>→ 노량진역이 자동 포함되며 정책 효용 ↑</a:t>
+                  <a:srgbClr val="9B9A97"/>
+                </a:solidFill>
+                <a:latin typeface="Noto Sans KR"/>
+              </a:rPr>
+              <a:t>동작구 그늘막 입지 분석 · 데이터기반 도시설계</a:t>
             </a:r>
           </a:p>
         </p:txBody>
@@ -23589,41 +24030,6 @@
       <p:sp>
         <p:nvSpPr>
           <p:cNvPr id="16" name="TextBox 15"/>
-          <p:cNvSpPr txBox="1"/>
-          <p:nvPr/>
-        </p:nvSpPr>
-        <p:spPr>
-          <a:xfrm>
-            <a:off x="621792" y="4855464"/>
-            <a:ext cx="7909560" cy="210312"/>
-          </a:xfrm>
-          <a:prstGeom prst="rect">
-            <a:avLst/>
-          </a:prstGeom>
-          <a:noFill/>
-        </p:spPr>
-        <p:txBody>
-          <a:bodyPr wrap="square" lIns="0" tIns="0">
-            <a:spAutoFit/>
-          </a:bodyPr>
-          <a:lstStyle/>
-          <a:p>
-            <a:pPr algn="l"/>
-            <a:r>
-              <a:rPr sz="900" b="0">
-                <a:solidFill>
-                  <a:srgbClr val="9B9A97"/>
-                </a:solidFill>
-                <a:latin typeface="Noto Sans KR"/>
-              </a:rPr>
-              <a:t>동작구 그늘막 입지 분석 · 데이터기반 도시설계</a:t>
-            </a:r>
-          </a:p>
-        </p:txBody>
-      </p:sp>
-      <p:sp>
-        <p:nvSpPr>
-          <p:cNvPr id="17" name="TextBox 16"/>
           <p:cNvSpPr txBox="1"/>
           <p:nvPr/>
         </p:nvSpPr>

--- a/presentation/데이터기반_도시설계_기말_통합발표.pptx
+++ b/presentation/데이터기반_도시설계_기말_통합발표.pptx
@@ -2587,85 +2587,91 @@
           </a:p>
           <a:p>
             <a:r>
-              <a:t>설정 변경 (사용자 요청):</a:t>
-            </a:r>
-          </a:p>
-          <a:p>
-            <a:r>
-              <a:t>- 영역: 동작구 전체 → 흑석동 한정</a:t>
-            </a:r>
-          </a:p>
-          <a:p>
-            <a:r>
-              <a:t>- 제약: 기존 그늘막 18개에서 50m 이내 격자 회피 (신규 위치만)</a:t>
-            </a:r>
-          </a:p>
-          <a:p>
-            <a:r>
-              <a:t>- 후보 풀: 752(흑석동 안) → 10(필터) → 7(그늘막 회피)</a:t>
+              <a:t>설정 강화 (사용자 피드백 반영 — '산같은 녹지에 추천되는 문제'):</a:t>
+            </a:r>
+          </a:p>
+          <a:p>
+            <a:r>
+              <a:t>- WALKABLE_HIGHWAYS 에서 path/steps 제거 (산책로·등산로 컷)</a:t>
+            </a:r>
+          </a:p>
+          <a:p>
+            <a:r>
+              <a:t>- OSMnx 녹지·공원·산림(현충원 포함) 영역 cut 필터 신설</a:t>
+            </a:r>
+          </a:p>
+          <a:p>
+            <a:r>
+              <a:t>- intersection_density 가중치 0.20 → 0.40 (교차로·횡단보도 최강조)</a:t>
+            </a:r>
+          </a:p>
+          <a:p>
+            <a:r>
+              <a:t>- 흑석동 한정 + 기존 그늘막 50m 회피 유지</a:t>
             </a:r>
           </a:p>
           <a:p/>
           <a:p>
             <a:r>
+              <a:t>후보 풀: 640(흑석동 안) → 7(필터) → 4(그늘막 회피)</a:t>
+            </a:r>
+          </a:p>
+          <a:p/>
+          <a:p>
+            <a:r>
               <a:t>배낭 ILP 결과 (PuLP CBC, Optimal):</a:t>
             </a:r>
           </a:p>
           <a:p>
             <a:r>
-              <a:t>- 예산 4천만원 / 단가 800만원 → 5개</a:t>
-            </a:r>
-          </a:p>
-          <a:p>
-            <a:r>
-              <a:t>- 200m 공간 분산 (1쌍 active)</a:t>
-            </a:r>
-          </a:p>
-          <a:p>
-            <a:r>
-              <a:t>- 솔버가 자동으로 사각지대 4 + 중간 1 선택</a:t>
-            </a:r>
-          </a:p>
-          <a:p>
-            <a:r>
-              <a:t>- 총 score 0.461, 예산 100% 사용</a:t>
+              <a:t>- 예산 4천만원 / 단가 800만원 → 4개 선정 (예산 80%)</a:t>
+            </a:r>
+          </a:p>
+          <a:p>
+            <a:r>
+              <a:t>- 잔여 800만원 — 정책 메시지 강화</a:t>
             </a:r>
           </a:p>
           <a:p/>
           <a:p>
             <a:r>
-              <a:t>선정 5곳 (모두 사각지대·중간):</a:t>
-            </a:r>
-          </a:p>
-          <a:p>
-            <a:r>
-              <a:t>- #1 (37.49874, 126.95789) — 322.9m 사각지대</a:t>
-            </a:r>
-          </a:p>
-          <a:p>
-            <a:r>
-              <a:t>- #2 (37.49786, 126.96129) — 359.6m 최대 사각지대</a:t>
-            </a:r>
-          </a:p>
-          <a:p>
-            <a:r>
-              <a:t>- #3 (37.51138, 126.96120) — 234.8m 사각지대</a:t>
-            </a:r>
-          </a:p>
-          <a:p>
-            <a:r>
-              <a:t>- #4 (37.50146, 126.96014) — 51m 중간 (보강)</a:t>
-            </a:r>
-          </a:p>
-          <a:p>
-            <a:r>
-              <a:t>- #5 (37.50328, 126.96465) — 153.8m 사각지대</a:t>
+              <a:t>선정 4곳 (모두 보도 위, 사각지대·중간):</a:t>
+            </a:r>
+          </a:p>
+          <a:p>
+            <a:r>
+              <a:t>- #1 (37.51138, 126.96120) — 사각지대 234.8m</a:t>
+            </a:r>
+          </a:p>
+          <a:p>
+            <a:r>
+              <a:t>- #2 (37.50328, 126.96465) — 사각지대 153.8m</a:t>
+            </a:r>
+          </a:p>
+          <a:p>
+            <a:r>
+              <a:t>- #3 (37.50146, 126.96014) — 중간 51m (보강)</a:t>
+            </a:r>
+          </a:p>
+          <a:p>
+            <a:r>
+              <a:t>- #4 (37.50509, 126.96577) — 중간 70m (보강)</a:t>
             </a:r>
           </a:p>
           <a:p/>
           <a:p>
             <a:r>
-              <a:t>핵심 메시지: 사각지대 분석 + 배낭 ILP 가 같은 답을 자동 합의 → 정책 신뢰도 ↑</a:t>
+              <a:t>핵심 메시지:</a:t>
+            </a:r>
+          </a:p>
+          <a:p>
+            <a:r>
+              <a:t>- 보도 위 신규 위치는 흑석동에 4곳 한계 = 정책: 흑석동 충분, 다른 동 우선</a:t>
+            </a:r>
+          </a:p>
+          <a:p>
+            <a:r>
+              <a:t>- intersection_density 0.40 최강조 → 진짜 보행 동선만 추천</a:t>
             </a:r>
           </a:p>
           <a:p/>
@@ -2676,7 +2682,7 @@
           </a:p>
           <a:p>
             <a:r>
-              <a:t>- 왜 흑석동만? → 실측 그늘막 18개 라벨이 흑석동만 확보. 다른 동도 확보 시 확장 가능</a:t>
+              <a:t>- 왜 5개에서 4개로 줄었나? → 녹지·산책로 컷 + 보도 강제로 후보 자체가 줄어듦 (정확도 우선)</a:t>
             </a:r>
           </a:p>
         </p:txBody>
@@ -23073,7 +23079,7 @@
                 </a:solidFill>
                 <a:latin typeface="Noto Sans KR"/>
               </a:rPr>
-              <a:t>신규 위치만 (기존 그늘막 50m 회피) + 예산 4천만원 배낭 최적 배치 5곳</a:t>
+              <a:t>보도 위 신규 위치만 (녹지·산책로 컷 + 기존 그늘막 50m 회피)</a:t>
             </a:r>
           </a:p>
         </p:txBody>
@@ -23191,13 +23197,13 @@
           <a:p>
             <a:pPr algn="l"/>
             <a:r>
-              <a:rPr sz="1000" b="1">
+              <a:rPr sz="900" b="1">
                 <a:solidFill>
                   <a:srgbClr val="FFFFFF"/>
                 </a:solidFill>
                 <a:latin typeface="Noto Sans KR"/>
               </a:rPr>
-              <a:t>🎯 영역=흑석동 · 기존 그늘막 18개 50m 회피 · 후보 풀 752→10→7 · 선정 5 (예산 100%) · solver=Optimal</a:t>
+              <a:t>🎯 흑석동 · 보도 10m · 녹지·산책로 제외 · 그늘막 50m 회피 · intersection_density 가중치 0.40 (최강조) · 후보 640→7→4 · 4 선정</a:t>
             </a:r>
           </a:p>
         </p:txBody>
@@ -23226,7 +23232,7 @@
                 <a:gridCol w="914400"/>
                 <a:gridCol w="2194560"/>
               </a:tblGrid>
-              <a:tr h="304800">
+              <a:tr h="365760">
                 <a:tc>
                   <a:txBody>
                     <a:bodyPr/>
@@ -23316,7 +23322,7 @@
                   </a:tcPr>
                 </a:tc>
               </a:tr>
-              <a:tr h="304800">
+              <a:tr h="365760">
                 <a:tc>
                   <a:txBody>
                     <a:bodyPr/>
@@ -23330,162 +23336,6 @@
                           <a:latin typeface="Consolas"/>
                         </a:rPr>
                         <a:t>1</a:t>
-                      </a:r>
-                    </a:p>
-                  </a:txBody>
-                  <a:tcPr marT="36576" marB="36576" marL="73152"/>
-                </a:tc>
-                <a:tc>
-                  <a:txBody>
-                    <a:bodyPr/>
-                    <a:lstStyle/>
-                    <a:p>
-                      <a:r>
-                        <a:rPr sz="900" b="0">
-                          <a:solidFill>
-                            <a:srgbClr val="37352F"/>
-                          </a:solidFill>
-                          <a:latin typeface="Consolas"/>
-                        </a:rPr>
-                        <a:t>37.49874, 126.95789</a:t>
-                      </a:r>
-                    </a:p>
-                  </a:txBody>
-                  <a:tcPr marT="36576" marB="36576" marL="73152"/>
-                </a:tc>
-                <a:tc>
-                  <a:txBody>
-                    <a:bodyPr/>
-                    <a:lstStyle/>
-                    <a:p>
-                      <a:r>
-                        <a:rPr sz="900" b="0">
-                          <a:solidFill>
-                            <a:srgbClr val="37352F"/>
-                          </a:solidFill>
-                          <a:latin typeface="Consolas"/>
-                        </a:rPr>
-                        <a:t>0.134</a:t>
-                      </a:r>
-                    </a:p>
-                  </a:txBody>
-                  <a:tcPr marT="36576" marB="36576" marL="73152"/>
-                </a:tc>
-                <a:tc>
-                  <a:txBody>
-                    <a:bodyPr/>
-                    <a:lstStyle/>
-                    <a:p>
-                      <a:r>
-                        <a:rPr sz="900" b="1">
-                          <a:solidFill>
-                            <a:srgbClr val="E03E3E"/>
-                          </a:solidFill>
-                          <a:latin typeface="Noto Sans KR"/>
-                        </a:rPr>
-                        <a:t>322.9m  ⭐사각지대</a:t>
-                      </a:r>
-                    </a:p>
-                  </a:txBody>
-                  <a:tcPr marT="36576" marB="36576" marL="73152">
-                    <a:solidFill>
-                      <a:srgbClr val="FFF4E5"/>
-                    </a:solidFill>
-                  </a:tcPr>
-                </a:tc>
-              </a:tr>
-              <a:tr h="304800">
-                <a:tc>
-                  <a:txBody>
-                    <a:bodyPr/>
-                    <a:lstStyle/>
-                    <a:p>
-                      <a:r>
-                        <a:rPr sz="900" b="1">
-                          <a:solidFill>
-                            <a:srgbClr val="37352F"/>
-                          </a:solidFill>
-                          <a:latin typeface="Consolas"/>
-                        </a:rPr>
-                        <a:t>2</a:t>
-                      </a:r>
-                    </a:p>
-                  </a:txBody>
-                  <a:tcPr marT="36576" marB="36576" marL="73152"/>
-                </a:tc>
-                <a:tc>
-                  <a:txBody>
-                    <a:bodyPr/>
-                    <a:lstStyle/>
-                    <a:p>
-                      <a:r>
-                        <a:rPr sz="900" b="0">
-                          <a:solidFill>
-                            <a:srgbClr val="37352F"/>
-                          </a:solidFill>
-                          <a:latin typeface="Consolas"/>
-                        </a:rPr>
-                        <a:t>37.49786, 126.96129</a:t>
-                      </a:r>
-                    </a:p>
-                  </a:txBody>
-                  <a:tcPr marT="36576" marB="36576" marL="73152"/>
-                </a:tc>
-                <a:tc>
-                  <a:txBody>
-                    <a:bodyPr/>
-                    <a:lstStyle/>
-                    <a:p>
-                      <a:r>
-                        <a:rPr sz="900" b="0">
-                          <a:solidFill>
-                            <a:srgbClr val="37352F"/>
-                          </a:solidFill>
-                          <a:latin typeface="Consolas"/>
-                        </a:rPr>
-                        <a:t>0.107</a:t>
-                      </a:r>
-                    </a:p>
-                  </a:txBody>
-                  <a:tcPr marT="36576" marB="36576" marL="73152"/>
-                </a:tc>
-                <a:tc>
-                  <a:txBody>
-                    <a:bodyPr/>
-                    <a:lstStyle/>
-                    <a:p>
-                      <a:r>
-                        <a:rPr sz="900" b="1">
-                          <a:solidFill>
-                            <a:srgbClr val="E03E3E"/>
-                          </a:solidFill>
-                          <a:latin typeface="Noto Sans KR"/>
-                        </a:rPr>
-                        <a:t>359.6m  ⭐사각지대 (최대)</a:t>
-                      </a:r>
-                    </a:p>
-                  </a:txBody>
-                  <a:tcPr marT="36576" marB="36576" marL="73152">
-                    <a:solidFill>
-                      <a:srgbClr val="FFF4E5"/>
-                    </a:solidFill>
-                  </a:tcPr>
-                </a:tc>
-              </a:tr>
-              <a:tr h="304800">
-                <a:tc>
-                  <a:txBody>
-                    <a:bodyPr/>
-                    <a:lstStyle/>
-                    <a:p>
-                      <a:r>
-                        <a:rPr sz="900" b="1">
-                          <a:solidFill>
-                            <a:srgbClr val="37352F"/>
-                          </a:solidFill>
-                          <a:latin typeface="Consolas"/>
-                        </a:rPr>
-                        <a:t>3</a:t>
                       </a:r>
                     </a:p>
                   </a:txBody>
@@ -23521,7 +23371,7 @@
                           </a:solidFill>
                           <a:latin typeface="Consolas"/>
                         </a:rPr>
-                        <a:t>0.094</a:t>
+                        <a:t>0.067</a:t>
                       </a:r>
                     </a:p>
                   </a:txBody>
@@ -23550,7 +23400,7 @@
                   </a:tcPr>
                 </a:tc>
               </a:tr>
-              <a:tr h="304800">
+              <a:tr h="365760">
                 <a:tc>
                   <a:txBody>
                     <a:bodyPr/>
@@ -23563,7 +23413,85 @@
                           </a:solidFill>
                           <a:latin typeface="Consolas"/>
                         </a:rPr>
-                        <a:t>4</a:t>
+                        <a:t>2</a:t>
+                      </a:r>
+                    </a:p>
+                  </a:txBody>
+                  <a:tcPr marT="36576" marB="36576" marL="73152"/>
+                </a:tc>
+                <a:tc>
+                  <a:txBody>
+                    <a:bodyPr/>
+                    <a:lstStyle/>
+                    <a:p>
+                      <a:r>
+                        <a:rPr sz="900" b="0">
+                          <a:solidFill>
+                            <a:srgbClr val="37352F"/>
+                          </a:solidFill>
+                          <a:latin typeface="Consolas"/>
+                        </a:rPr>
+                        <a:t>37.50328, 126.96465</a:t>
+                      </a:r>
+                    </a:p>
+                  </a:txBody>
+                  <a:tcPr marT="36576" marB="36576" marL="73152"/>
+                </a:tc>
+                <a:tc>
+                  <a:txBody>
+                    <a:bodyPr/>
+                    <a:lstStyle/>
+                    <a:p>
+                      <a:r>
+                        <a:rPr sz="900" b="0">
+                          <a:solidFill>
+                            <a:srgbClr val="37352F"/>
+                          </a:solidFill>
+                          <a:latin typeface="Consolas"/>
+                        </a:rPr>
+                        <a:t>0.044</a:t>
+                      </a:r>
+                    </a:p>
+                  </a:txBody>
+                  <a:tcPr marT="36576" marB="36576" marL="73152"/>
+                </a:tc>
+                <a:tc>
+                  <a:txBody>
+                    <a:bodyPr/>
+                    <a:lstStyle/>
+                    <a:p>
+                      <a:r>
+                        <a:rPr sz="900" b="1">
+                          <a:solidFill>
+                            <a:srgbClr val="E03E3E"/>
+                          </a:solidFill>
+                          <a:latin typeface="Noto Sans KR"/>
+                        </a:rPr>
+                        <a:t>153.8m  ⭐사각지대</a:t>
+                      </a:r>
+                    </a:p>
+                  </a:txBody>
+                  <a:tcPr marT="36576" marB="36576" marL="73152">
+                    <a:solidFill>
+                      <a:srgbClr val="FFF4E5"/>
+                    </a:solidFill>
+                  </a:tcPr>
+                </a:tc>
+              </a:tr>
+              <a:tr h="365760">
+                <a:tc>
+                  <a:txBody>
+                    <a:bodyPr/>
+                    <a:lstStyle/>
+                    <a:p>
+                      <a:r>
+                        <a:rPr sz="900" b="1">
+                          <a:solidFill>
+                            <a:srgbClr val="37352F"/>
+                          </a:solidFill>
+                          <a:latin typeface="Consolas"/>
+                        </a:rPr>
+                        <a:t>3</a:t>
                       </a:r>
                     </a:p>
                   </a:txBody>
@@ -23599,7 +23527,7 @@
                           </a:solidFill>
                           <a:latin typeface="Consolas"/>
                         </a:rPr>
-                        <a:t>0.069</a:t>
+                        <a:t>0.031</a:t>
                       </a:r>
                     </a:p>
                   </a:txBody>
@@ -23624,7 +23552,7 @@
                   <a:tcPr marT="36576" marB="36576" marL="73152"/>
                 </a:tc>
               </a:tr>
-              <a:tr h="304800">
+              <a:tr h="365760">
                 <a:tc>
                   <a:txBody>
                     <a:bodyPr/>
@@ -23637,7 +23565,7 @@
                           </a:solidFill>
                           <a:latin typeface="Consolas"/>
                         </a:rPr>
-                        <a:t>5</a:t>
+                        <a:t>4</a:t>
                       </a:r>
                     </a:p>
                   </a:txBody>
@@ -23655,7 +23583,7 @@
                           </a:solidFill>
                           <a:latin typeface="Consolas"/>
                         </a:rPr>
-                        <a:t>37.50328, 126.96465</a:t>
+                        <a:t>37.50509, 126.96577</a:t>
                       </a:r>
                     </a:p>
                   </a:txBody>
@@ -23673,7 +23601,7 @@
                           </a:solidFill>
                           <a:latin typeface="Consolas"/>
                         </a:rPr>
-                        <a:t>0.057</a:t>
+                        <a:t>0.001</a:t>
                       </a:r>
                     </a:p>
                   </a:txBody>
@@ -23685,21 +23613,17 @@
                     <a:lstStyle/>
                     <a:p>
                       <a:r>
-                        <a:rPr sz="900" b="1">
+                        <a:rPr sz="900" b="0">
                           <a:solidFill>
-                            <a:srgbClr val="E03E3E"/>
+                            <a:srgbClr val="37352F"/>
                           </a:solidFill>
                           <a:latin typeface="Noto Sans KR"/>
                         </a:rPr>
-                        <a:t>153.8m  ⭐사각지대</a:t>
+                        <a:t>70.0m   ○ 중간</a:t>
                       </a:r>
                     </a:p>
                   </a:txBody>
-                  <a:tcPr marT="36576" marB="36576" marL="73152">
-                    <a:solidFill>
-                      <a:srgbClr val="FFF4E5"/>
-                    </a:solidFill>
-                  </a:tcPr>
+                  <a:tcPr marT="36576" marB="36576" marL="73152"/>
                 </a:tc>
               </a:tr>
             </a:tbl>
@@ -23784,7 +23708,7 @@
                 </a:solidFill>
                 <a:latin typeface="Noto Sans KR"/>
               </a:rPr>
-              <a:t>🎯 자동 합의</a:t>
+              <a:t>📌 정책 함의</a:t>
             </a:r>
           </a:p>
         </p:txBody>
@@ -23823,7 +23747,7 @@
                 </a:solidFill>
                 <a:latin typeface="Noto Sans KR"/>
               </a:rPr>
-              <a:t>•  선정 5 = 사각지대 4 + 중간 1</a:t>
+              <a:t>•  보도 위 신규 위치 = 4곳 한계</a:t>
             </a:r>
           </a:p>
           <a:p>
@@ -23839,7 +23763,7 @@
                 </a:solidFill>
                 <a:latin typeface="Noto Sans KR"/>
               </a:rPr>
-              <a:t>•  배낭 ILP 가 사각지대 분석</a:t>
+              <a:t>•  (흑석동은 그늘막 충분)</a:t>
             </a:r>
           </a:p>
           <a:p>
@@ -23855,7 +23779,7 @@
                 </a:solidFill>
                 <a:latin typeface="Noto Sans KR"/>
               </a:rPr>
-              <a:t>•  결과를 자동으로 합의</a:t>
+              <a:t>•  예산 잔여 800만원</a:t>
             </a:r>
           </a:p>
           <a:p>
@@ -23871,7 +23795,7 @@
                 </a:solidFill>
                 <a:latin typeface="Noto Sans KR"/>
               </a:rPr>
-              <a:t>•  정책 어필 포인트 완성</a:t>
+              <a:t>•  → 다른 동 우선 집행</a:t>
             </a:r>
           </a:p>
         </p:txBody>
@@ -23952,7 +23876,7 @@
                 </a:solidFill>
                 <a:latin typeface="Noto Sans KR"/>
               </a:rPr>
-              <a:t>🔑 신규 위치만 (기존 18개 회피) → 예산 4천만원으로 흑석동 사각지대 5곳 완전 커버</a:t>
+              <a:t>🔑 산책로·녹지 컷 + 보도 위 강제 → 진짜 보행 동선에만 추천</a:t>
             </a:r>
           </a:p>
         </p:txBody>
@@ -23987,7 +23911,7 @@
                 </a:solidFill>
                 <a:latin typeface="Noto Sans KR"/>
               </a:rPr>
-              <a:t>200m 공간 분산 제약 → 한 구역에 몰리지 않고 흑석동 전역에 균형 배치</a:t>
+              <a:t>intersection_density 가중치 최강조 (0.40) — 교차로·횡단보도 옆이 정책 1순위</a:t>
             </a:r>
           </a:p>
         </p:txBody>
